--- a/docs/pptx/whole/jx-linsubhr-sens-akikdigo.pptx
+++ b/docs/pptx/whole/jx-linsubhr-sens-akikdigo.pptx
@@ -5339,7 +5339,7 @@
           <p:spPr>
             <a:xfrm>
               <a:off x="817517" y="1896563"/>
-              <a:ext cx="6169365" cy="82021"/>
+              <a:ext cx="6833128" cy="82021"/>
             </a:xfrm>
             <a:prstGeom prst="rect">
               <a:avLst/>
@@ -5371,7 +5371,7 @@
                   <a:latin typeface="Helvetica"/>
                   <a:cs typeface="Helvetica"/>
                 </a:rPr>
-                <a:t>subHR per 0.1 ratio decline: 1.22 (1.08-1.39), p = 0.002  |  per IQR decline (Δ = 0.27): 1.75 (1.23-2.49)  |  IQR: [0.71, 0.98]</a:t>
+                <a:t>subHR per 0.1 ratio decline: 1.22 (1.08-1.39), p_Bonf = 0.012 (n = 6)  |  per IQR decline (Δ = 0.27): 1.75 (1.23-2.49)  |  IQR: [0.71, 0.98]</a:t>
               </a:r>
             </a:p>
           </p:txBody>

--- a/docs/pptx/whole/jx-linsubhr-sens-akikdigo.pptx
+++ b/docs/pptx/whole/jx-linsubhr-sens-akikdigo.pptx
@@ -5062,8 +5062,8 @@
           </p:nvSpPr>
           <p:spPr>
             <a:xfrm>
-              <a:off x="1980137" y="5785772"/>
-              <a:ext cx="155356" cy="80101"/>
+              <a:off x="1977028" y="5785772"/>
+              <a:ext cx="161574" cy="80101"/>
             </a:xfrm>
             <a:prstGeom prst="rect">
               <a:avLst/>
@@ -5095,7 +5095,7 @@
                   <a:latin typeface="Helvetica"/>
                   <a:cs typeface="Helvetica"/>
                 </a:rPr>
-                <a:t>0.6</a:t>
+                <a:t>-40</a:t>
               </a:r>
             </a:p>
           </p:txBody>
@@ -5108,8 +5108,8 @@
           </p:nvSpPr>
           <p:spPr>
             <a:xfrm>
-              <a:off x="3731922" y="5785772"/>
-              <a:ext cx="155356" cy="80101"/>
+              <a:off x="3728813" y="5785772"/>
+              <a:ext cx="161574" cy="80101"/>
             </a:xfrm>
             <a:prstGeom prst="rect">
               <a:avLst/>
@@ -5141,7 +5141,7 @@
                   <a:latin typeface="Helvetica"/>
                   <a:cs typeface="Helvetica"/>
                 </a:rPr>
-                <a:t>0.8</a:t>
+                <a:t>-20</a:t>
               </a:r>
             </a:p>
           </p:txBody>
@@ -5154,8 +5154,8 @@
           </p:nvSpPr>
           <p:spPr>
             <a:xfrm>
-              <a:off x="5483707" y="5785772"/>
-              <a:ext cx="155356" cy="80101"/>
+              <a:off x="5530296" y="5785772"/>
+              <a:ext cx="62179" cy="80101"/>
             </a:xfrm>
             <a:prstGeom prst="rect">
               <a:avLst/>
@@ -5187,7 +5187,7 @@
                   <a:latin typeface="Helvetica"/>
                   <a:cs typeface="Helvetica"/>
                 </a:rPr>
-                <a:t>1.0</a:t>
+                <a:t>0</a:t>
               </a:r>
             </a:p>
           </p:txBody>
@@ -5200,8 +5200,8 @@
           </p:nvSpPr>
           <p:spPr>
             <a:xfrm>
-              <a:off x="7235493" y="5785772"/>
-              <a:ext cx="155356" cy="80101"/>
+              <a:off x="7250992" y="5785772"/>
+              <a:ext cx="124358" cy="80101"/>
             </a:xfrm>
             <a:prstGeom prst="rect">
               <a:avLst/>
@@ -5233,7 +5233,7 @@
                   <a:latin typeface="Helvetica"/>
                   <a:cs typeface="Helvetica"/>
                 </a:rPr>
-                <a:t>1.2</a:t>
+                <a:t>20</a:t>
               </a:r>
             </a:p>
           </p:txBody>
@@ -5246,8 +5246,8 @@
           </p:nvSpPr>
           <p:spPr>
             <a:xfrm>
-              <a:off x="2691419" y="5925448"/>
-              <a:ext cx="4051889" cy="100218"/>
+              <a:off x="1561815" y="5925448"/>
+              <a:ext cx="6311097" cy="100218"/>
             </a:xfrm>
             <a:prstGeom prst="rect">
               <a:avLst/>
@@ -5279,7 +5279,7 @@
                   <a:latin typeface="Helvetica"/>
                   <a:cs typeface="Helvetica"/>
                 </a:rPr>
-                <a:t>Sensitivity eGFR Ratio (CKD-EPI 2012 CysC / CKD-EPI 2021 Cr)</a:t>
+                <a:t>Sensitivity eGFR Difference (%): 100 × (CKD-EPI 2012 CysC − CKD-EPI 2021 Cr) / CKD-EPI 2021 Cr</a:t>
               </a:r>
             </a:p>
           </p:txBody>
@@ -5339,7 +5339,7 @@
           <p:spPr>
             <a:xfrm>
               <a:off x="817517" y="1896563"/>
-              <a:ext cx="6833128" cy="82021"/>
+              <a:ext cx="6959864" cy="82021"/>
             </a:xfrm>
             <a:prstGeom prst="rect">
               <a:avLst/>
@@ -5371,7 +5371,7 @@
                   <a:latin typeface="Helvetica"/>
                   <a:cs typeface="Helvetica"/>
                 </a:rPr>
-                <a:t>subHR per 0.1 ratio decline: 1.22 (1.08-1.39), p_Bonf = 0.012 (n = 6)  |  per IQR decline (Δ = 0.27): 1.75 (1.23-2.49)  |  IQR: [0.71, 0.98]</a:t>
+                <a:t>subHR per 10 % decline: 1.22 (1.08-1.39), p_Bonf = 0.012 (n = 6)  |  per IQR decline (Δ = 27.5 %): 1.75 (1.23-2.49)  |  IQR: [-29.1, -1.6] %</a:t>
               </a:r>
             </a:p>
           </p:txBody>

--- a/docs/pptx/whole/jx-linsubhr-sens-akikdigo.pptx
+++ b/docs/pptx/whole/jx-linsubhr-sens-akikdigo.pptx
@@ -2265,34 +2265,26 @@
         </p:sp>
         <p:sp>
           <p:nvSpPr>
-            <p:cNvPr id="4" name="pl4"/>
+            <p:cNvPr id="4" name="rc4"/>
             <p:cNvSpPr/>
             <p:nvPr/>
           </p:nvSpPr>
           <p:spPr>
             <a:xfrm>
-              <a:off x="817517" y="5142518"/>
-              <a:ext cx="7799693" cy="0"/>
+              <a:off x="457200" y="1600200"/>
+              <a:ext cx="8229600" cy="4525962"/>
             </a:xfrm>
-            <a:custGeom>
+            <a:prstGeom prst="rect">
               <a:avLst/>
-              <a:pathLst>
-                <a:path w="7799693" h="0">
-                  <a:moveTo>
-                    <a:pt x="0" y="0"/>
-                  </a:moveTo>
-                  <a:lnTo>
-                    <a:pt x="7799693" y="0"/>
-                  </a:lnTo>
-                  <a:lnTo>
-                    <a:pt x="7799693" y="0"/>
-                  </a:lnTo>
-                </a:path>
-              </a:pathLst>
-            </a:custGeom>
-            <a:ln w="6775" cap="flat">
+            </a:prstGeom>
+            <a:solidFill>
+              <a:srgbClr val="FFFFFF">
+                <a:alpha val="100000"/>
+              </a:srgbClr>
+            </a:solidFill>
+            <a:ln w="13550" cap="rnd">
               <a:solidFill>
-                <a:srgbClr val="EBEBEB">
+                <a:srgbClr val="FFFFFF">
                   <a:alpha val="100000"/>
                 </a:srgbClr>
               </a:solidFill>
@@ -2314,21 +2306,21 @@
           </p:nvSpPr>
           <p:spPr>
             <a:xfrm>
-              <a:off x="817517" y="4313054"/>
-              <a:ext cx="7799693" cy="0"/>
+              <a:off x="887106" y="3250627"/>
+              <a:ext cx="7660515" cy="0"/>
             </a:xfrm>
             <a:custGeom>
               <a:avLst/>
               <a:pathLst>
-                <a:path w="7799693" h="0">
+                <a:path w="7660515" h="0">
                   <a:moveTo>
                     <a:pt x="0" y="0"/>
                   </a:moveTo>
                   <a:lnTo>
-                    <a:pt x="7799693" y="0"/>
-                  </a:lnTo>
-                  <a:lnTo>
-                    <a:pt x="7799693" y="0"/>
+                    <a:pt x="7660515" y="0"/>
+                  </a:lnTo>
+                  <a:lnTo>
+                    <a:pt x="7660515" y="0"/>
                   </a:lnTo>
                 </a:path>
               </a:pathLst>
@@ -2357,21 +2349,21 @@
           </p:nvSpPr>
           <p:spPr>
             <a:xfrm>
-              <a:off x="817517" y="3483591"/>
-              <a:ext cx="7799693" cy="0"/>
+              <a:off x="887106" y="2951293"/>
+              <a:ext cx="7660515" cy="0"/>
             </a:xfrm>
             <a:custGeom>
               <a:avLst/>
               <a:pathLst>
-                <a:path w="7799693" h="0">
+                <a:path w="7660515" h="0">
                   <a:moveTo>
                     <a:pt x="0" y="0"/>
                   </a:moveTo>
                   <a:lnTo>
-                    <a:pt x="7799693" y="0"/>
-                  </a:lnTo>
-                  <a:lnTo>
-                    <a:pt x="7799693" y="0"/>
+                    <a:pt x="7660515" y="0"/>
+                  </a:lnTo>
+                  <a:lnTo>
+                    <a:pt x="7660515" y="0"/>
                   </a:lnTo>
                 </a:path>
               </a:pathLst>
@@ -2400,21 +2392,21 @@
           </p:nvSpPr>
           <p:spPr>
             <a:xfrm>
-              <a:off x="817517" y="2654127"/>
-              <a:ext cx="7799693" cy="0"/>
+              <a:off x="887106" y="2651959"/>
+              <a:ext cx="7660515" cy="0"/>
             </a:xfrm>
             <a:custGeom>
               <a:avLst/>
               <a:pathLst>
-                <a:path w="7799693" h="0">
+                <a:path w="7660515" h="0">
                   <a:moveTo>
                     <a:pt x="0" y="0"/>
                   </a:moveTo>
                   <a:lnTo>
-                    <a:pt x="7799693" y="0"/>
-                  </a:lnTo>
-                  <a:lnTo>
-                    <a:pt x="7799693" y="0"/>
+                    <a:pt x="7660515" y="0"/>
+                  </a:lnTo>
+                  <a:lnTo>
+                    <a:pt x="7660515" y="0"/>
                   </a:lnTo>
                 </a:path>
               </a:pathLst>
@@ -2443,21 +2435,21 @@
           </p:nvSpPr>
           <p:spPr>
             <a:xfrm>
-              <a:off x="1181923" y="2073503"/>
-              <a:ext cx="0" cy="3649639"/>
+              <a:off x="887106" y="2352625"/>
+              <a:ext cx="7660515" cy="0"/>
             </a:xfrm>
             <a:custGeom>
               <a:avLst/>
               <a:pathLst>
-                <a:path w="0" h="3649639">
+                <a:path w="7660515" h="0">
                   <a:moveTo>
-                    <a:pt x="0" y="3649639"/>
+                    <a:pt x="0" y="0"/>
                   </a:moveTo>
                   <a:lnTo>
-                    <a:pt x="0" y="0"/>
-                  </a:lnTo>
-                  <a:lnTo>
-                    <a:pt x="0" y="0"/>
+                    <a:pt x="7660515" y="0"/>
+                  </a:lnTo>
+                  <a:lnTo>
+                    <a:pt x="7660515" y="0"/>
                   </a:lnTo>
                 </a:path>
               </a:pathLst>
@@ -2486,15 +2478,15 @@
           </p:nvSpPr>
           <p:spPr>
             <a:xfrm>
-              <a:off x="2933708" y="2073503"/>
-              <a:ext cx="0" cy="3649639"/>
+              <a:off x="1245010" y="2143092"/>
+              <a:ext cx="0" cy="1317069"/>
             </a:xfrm>
             <a:custGeom>
               <a:avLst/>
               <a:pathLst>
-                <a:path w="0" h="3649639">
+                <a:path w="0" h="1317069">
                   <a:moveTo>
-                    <a:pt x="0" y="3649639"/>
+                    <a:pt x="0" y="1317069"/>
                   </a:moveTo>
                   <a:lnTo>
                     <a:pt x="0" y="0"/>
@@ -2529,15 +2521,15 @@
           </p:nvSpPr>
           <p:spPr>
             <a:xfrm>
-              <a:off x="4685493" y="2073503"/>
-              <a:ext cx="0" cy="3649639"/>
+              <a:off x="2965536" y="2143092"/>
+              <a:ext cx="0" cy="1317069"/>
             </a:xfrm>
             <a:custGeom>
               <a:avLst/>
               <a:pathLst>
-                <a:path w="0" h="3649639">
+                <a:path w="0" h="1317069">
                   <a:moveTo>
-                    <a:pt x="0" y="3649639"/>
+                    <a:pt x="0" y="1317069"/>
                   </a:moveTo>
                   <a:lnTo>
                     <a:pt x="0" y="0"/>
@@ -2572,15 +2564,15 @@
           </p:nvSpPr>
           <p:spPr>
             <a:xfrm>
-              <a:off x="6437278" y="2073503"/>
-              <a:ext cx="0" cy="3649639"/>
+              <a:off x="4686062" y="2143092"/>
+              <a:ext cx="0" cy="1317069"/>
             </a:xfrm>
             <a:custGeom>
               <a:avLst/>
               <a:pathLst>
-                <a:path w="0" h="3649639">
+                <a:path w="0" h="1317069">
                   <a:moveTo>
-                    <a:pt x="0" y="3649639"/>
+                    <a:pt x="0" y="1317069"/>
                   </a:moveTo>
                   <a:lnTo>
                     <a:pt x="0" y="0"/>
@@ -2615,15 +2607,15 @@
           </p:nvSpPr>
           <p:spPr>
             <a:xfrm>
-              <a:off x="8189063" y="2073503"/>
-              <a:ext cx="0" cy="3649639"/>
+              <a:off x="6406588" y="2143092"/>
+              <a:ext cx="0" cy="1317069"/>
             </a:xfrm>
             <a:custGeom>
               <a:avLst/>
               <a:pathLst>
-                <a:path w="0" h="3649639">
+                <a:path w="0" h="1317069">
                   <a:moveTo>
-                    <a:pt x="0" y="3649639"/>
+                    <a:pt x="0" y="1317069"/>
                   </a:moveTo>
                   <a:lnTo>
                     <a:pt x="0" y="0"/>
@@ -2658,26 +2650,26 @@
           </p:nvSpPr>
           <p:spPr>
             <a:xfrm>
-              <a:off x="817517" y="5557249"/>
-              <a:ext cx="7799693" cy="0"/>
+              <a:off x="8127114" y="2143092"/>
+              <a:ext cx="0" cy="1317069"/>
             </a:xfrm>
             <a:custGeom>
               <a:avLst/>
               <a:pathLst>
-                <a:path w="7799693" h="0">
+                <a:path w="0" h="1317069">
                   <a:moveTo>
+                    <a:pt x="0" y="1317069"/>
+                  </a:moveTo>
+                  <a:lnTo>
                     <a:pt x="0" y="0"/>
-                  </a:moveTo>
-                  <a:lnTo>
-                    <a:pt x="7799693" y="0"/>
-                  </a:lnTo>
-                  <a:lnTo>
-                    <a:pt x="7799693" y="0"/>
+                  </a:lnTo>
+                  <a:lnTo>
+                    <a:pt x="0" y="0"/>
                   </a:lnTo>
                 </a:path>
               </a:pathLst>
             </a:custGeom>
-            <a:ln w="13550" cap="flat">
+            <a:ln w="6775" cap="flat">
               <a:solidFill>
                 <a:srgbClr val="EBEBEB">
                   <a:alpha val="100000"/>
@@ -2701,21 +2693,21 @@
           </p:nvSpPr>
           <p:spPr>
             <a:xfrm>
-              <a:off x="817517" y="4727786"/>
-              <a:ext cx="7799693" cy="0"/>
+              <a:off x="887106" y="3400294"/>
+              <a:ext cx="7660515" cy="0"/>
             </a:xfrm>
             <a:custGeom>
               <a:avLst/>
               <a:pathLst>
-                <a:path w="7799693" h="0">
+                <a:path w="7660515" h="0">
                   <a:moveTo>
                     <a:pt x="0" y="0"/>
                   </a:moveTo>
                   <a:lnTo>
-                    <a:pt x="7799693" y="0"/>
-                  </a:lnTo>
-                  <a:lnTo>
-                    <a:pt x="7799693" y="0"/>
+                    <a:pt x="7660515" y="0"/>
+                  </a:lnTo>
+                  <a:lnTo>
+                    <a:pt x="7660515" y="0"/>
                   </a:lnTo>
                 </a:path>
               </a:pathLst>
@@ -2744,21 +2736,21 @@
           </p:nvSpPr>
           <p:spPr>
             <a:xfrm>
-              <a:off x="817517" y="3898322"/>
-              <a:ext cx="7799693" cy="0"/>
+              <a:off x="887106" y="3100960"/>
+              <a:ext cx="7660515" cy="0"/>
             </a:xfrm>
             <a:custGeom>
               <a:avLst/>
               <a:pathLst>
-                <a:path w="7799693" h="0">
+                <a:path w="7660515" h="0">
                   <a:moveTo>
                     <a:pt x="0" y="0"/>
                   </a:moveTo>
                   <a:lnTo>
-                    <a:pt x="7799693" y="0"/>
-                  </a:lnTo>
-                  <a:lnTo>
-                    <a:pt x="7799693" y="0"/>
+                    <a:pt x="7660515" y="0"/>
+                  </a:lnTo>
+                  <a:lnTo>
+                    <a:pt x="7660515" y="0"/>
                   </a:lnTo>
                 </a:path>
               </a:pathLst>
@@ -2787,21 +2779,21 @@
           </p:nvSpPr>
           <p:spPr>
             <a:xfrm>
-              <a:off x="817517" y="3068859"/>
-              <a:ext cx="7799693" cy="0"/>
+              <a:off x="887106" y="2801626"/>
+              <a:ext cx="7660515" cy="0"/>
             </a:xfrm>
             <a:custGeom>
               <a:avLst/>
               <a:pathLst>
-                <a:path w="7799693" h="0">
+                <a:path w="7660515" h="0">
                   <a:moveTo>
                     <a:pt x="0" y="0"/>
                   </a:moveTo>
                   <a:lnTo>
-                    <a:pt x="7799693" y="0"/>
-                  </a:lnTo>
-                  <a:lnTo>
-                    <a:pt x="7799693" y="0"/>
+                    <a:pt x="7660515" y="0"/>
+                  </a:lnTo>
+                  <a:lnTo>
+                    <a:pt x="7660515" y="0"/>
                   </a:lnTo>
                 </a:path>
               </a:pathLst>
@@ -2830,21 +2822,21 @@
           </p:nvSpPr>
           <p:spPr>
             <a:xfrm>
-              <a:off x="817517" y="2239395"/>
-              <a:ext cx="7799693" cy="0"/>
+              <a:off x="887106" y="2502292"/>
+              <a:ext cx="7660515" cy="0"/>
             </a:xfrm>
             <a:custGeom>
               <a:avLst/>
               <a:pathLst>
-                <a:path w="7799693" h="0">
+                <a:path w="7660515" h="0">
                   <a:moveTo>
                     <a:pt x="0" y="0"/>
                   </a:moveTo>
                   <a:lnTo>
-                    <a:pt x="7799693" y="0"/>
-                  </a:lnTo>
-                  <a:lnTo>
-                    <a:pt x="7799693" y="0"/>
+                    <a:pt x="7660515" y="0"/>
+                  </a:lnTo>
+                  <a:lnTo>
+                    <a:pt x="7660515" y="0"/>
                   </a:lnTo>
                 </a:path>
               </a:pathLst>
@@ -2873,21 +2865,21 @@
           </p:nvSpPr>
           <p:spPr>
             <a:xfrm>
-              <a:off x="2057816" y="2073503"/>
-              <a:ext cx="0" cy="3649639"/>
+              <a:off x="887106" y="2202958"/>
+              <a:ext cx="7660515" cy="0"/>
             </a:xfrm>
             <a:custGeom>
               <a:avLst/>
               <a:pathLst>
-                <a:path w="0" h="3649639">
+                <a:path w="7660515" h="0">
                   <a:moveTo>
-                    <a:pt x="0" y="3649639"/>
+                    <a:pt x="0" y="0"/>
                   </a:moveTo>
                   <a:lnTo>
-                    <a:pt x="0" y="0"/>
-                  </a:lnTo>
-                  <a:lnTo>
-                    <a:pt x="0" y="0"/>
+                    <a:pt x="7660515" y="0"/>
+                  </a:lnTo>
+                  <a:lnTo>
+                    <a:pt x="7660515" y="0"/>
                   </a:lnTo>
                 </a:path>
               </a:pathLst>
@@ -2916,15 +2908,15 @@
           </p:nvSpPr>
           <p:spPr>
             <a:xfrm>
-              <a:off x="3809601" y="2073503"/>
-              <a:ext cx="0" cy="3649639"/>
+              <a:off x="2105273" y="2143092"/>
+              <a:ext cx="0" cy="1317069"/>
             </a:xfrm>
             <a:custGeom>
               <a:avLst/>
               <a:pathLst>
-                <a:path w="0" h="3649639">
+                <a:path w="0" h="1317069">
                   <a:moveTo>
-                    <a:pt x="0" y="3649639"/>
+                    <a:pt x="0" y="1317069"/>
                   </a:moveTo>
                   <a:lnTo>
                     <a:pt x="0" y="0"/>
@@ -2959,15 +2951,15 @@
           </p:nvSpPr>
           <p:spPr>
             <a:xfrm>
-              <a:off x="5561386" y="2073503"/>
-              <a:ext cx="0" cy="3649639"/>
+              <a:off x="3825799" y="2143092"/>
+              <a:ext cx="0" cy="1317069"/>
             </a:xfrm>
             <a:custGeom>
               <a:avLst/>
               <a:pathLst>
-                <a:path w="0" h="3649639">
+                <a:path w="0" h="1317069">
                   <a:moveTo>
-                    <a:pt x="0" y="3649639"/>
+                    <a:pt x="0" y="1317069"/>
                   </a:moveTo>
                   <a:lnTo>
                     <a:pt x="0" y="0"/>
@@ -3002,15 +2994,15 @@
           </p:nvSpPr>
           <p:spPr>
             <a:xfrm>
-              <a:off x="7313171" y="2073503"/>
-              <a:ext cx="0" cy="3649639"/>
+              <a:off x="5546325" y="2143092"/>
+              <a:ext cx="0" cy="1317069"/>
             </a:xfrm>
             <a:custGeom>
               <a:avLst/>
               <a:pathLst>
-                <a:path w="0" h="3649639">
+                <a:path w="0" h="1317069">
                   <a:moveTo>
-                    <a:pt x="0" y="3649639"/>
+                    <a:pt x="0" y="1317069"/>
                   </a:moveTo>
                   <a:lnTo>
                     <a:pt x="0" y="0"/>
@@ -3039,618 +3031,661 @@
         </p:sp>
         <p:sp>
           <p:nvSpPr>
-            <p:cNvPr id="22" name="pg22"/>
+            <p:cNvPr id="22" name="pl22"/>
             <p:cNvSpPr/>
             <p:nvPr/>
           </p:nvSpPr>
           <p:spPr>
             <a:xfrm>
-              <a:off x="1172049" y="2940021"/>
-              <a:ext cx="7090630" cy="2438777"/>
+              <a:off x="7266851" y="2143092"/>
+              <a:ext cx="0" cy="1317069"/>
             </a:xfrm>
             <a:custGeom>
               <a:avLst/>
               <a:pathLst>
-                <a:path w="7090630" h="2438777">
+                <a:path w="0" h="1317069">
+                  <a:moveTo>
+                    <a:pt x="0" y="1317069"/>
+                  </a:moveTo>
+                  <a:lnTo>
+                    <a:pt x="0" y="0"/>
+                  </a:lnTo>
+                  <a:lnTo>
+                    <a:pt x="0" y="0"/>
+                  </a:lnTo>
+                </a:path>
+              </a:pathLst>
+            </a:custGeom>
+            <a:ln w="13550" cap="flat">
+              <a:solidFill>
+                <a:srgbClr val="EBEBEB">
+                  <a:alpha val="100000"/>
+                </a:srgbClr>
+              </a:solidFill>
+              <a:prstDash val="solid"/>
+              <a:round/>
+            </a:ln>
+          </p:spPr>
+          <p:txBody>
+            <a:bodyPr/>
+            <a:lstStyle/>
+            <a:p/>
+          </p:txBody>
+        </p:sp>
+        <p:sp>
+          <p:nvSpPr>
+            <p:cNvPr id="23" name="pg23"/>
+            <p:cNvSpPr/>
+            <p:nvPr/>
+          </p:nvSpPr>
+          <p:spPr>
+            <a:xfrm>
+              <a:off x="1235312" y="2455798"/>
+              <a:ext cx="6964104" cy="880097"/>
+            </a:xfrm>
+            <a:custGeom>
+              <a:avLst/>
+              <a:pathLst>
+                <a:path w="6964104" h="880097">
                   <a:moveTo>
                     <a:pt x="0" y="0"/>
                   </a:moveTo>
                   <a:lnTo>
-                    <a:pt x="71622" y="70042"/>
-                  </a:lnTo>
-                  <a:lnTo>
-                    <a:pt x="143245" y="138211"/>
-                  </a:lnTo>
-                  <a:lnTo>
-                    <a:pt x="214867" y="204555"/>
-                  </a:lnTo>
-                  <a:lnTo>
-                    <a:pt x="286490" y="269123"/>
-                  </a:lnTo>
-                  <a:lnTo>
-                    <a:pt x="358112" y="331964"/>
-                  </a:lnTo>
-                  <a:lnTo>
-                    <a:pt x="429735" y="393122"/>
-                  </a:lnTo>
-                  <a:lnTo>
-                    <a:pt x="501357" y="452644"/>
-                  </a:lnTo>
-                  <a:lnTo>
-                    <a:pt x="572980" y="510574"/>
-                  </a:lnTo>
-                  <a:lnTo>
-                    <a:pt x="644602" y="566952"/>
-                  </a:lnTo>
-                  <a:lnTo>
-                    <a:pt x="716225" y="621822"/>
-                  </a:lnTo>
-                  <a:lnTo>
-                    <a:pt x="787847" y="675224"/>
-                  </a:lnTo>
-                  <a:lnTo>
-                    <a:pt x="859470" y="727196"/>
-                  </a:lnTo>
-                  <a:lnTo>
-                    <a:pt x="931092" y="777777"/>
-                  </a:lnTo>
-                  <a:lnTo>
-                    <a:pt x="1002715" y="827005"/>
-                  </a:lnTo>
-                  <a:lnTo>
-                    <a:pt x="1074337" y="874916"/>
-                  </a:lnTo>
-                  <a:lnTo>
-                    <a:pt x="1145960" y="921544"/>
-                  </a:lnTo>
-                  <a:lnTo>
-                    <a:pt x="1217582" y="966924"/>
-                  </a:lnTo>
-                  <a:lnTo>
-                    <a:pt x="1289205" y="1011090"/>
-                  </a:lnTo>
-                  <a:lnTo>
-                    <a:pt x="1360827" y="1054074"/>
-                  </a:lnTo>
-                  <a:lnTo>
-                    <a:pt x="1432450" y="1095907"/>
-                  </a:lnTo>
-                  <a:lnTo>
-                    <a:pt x="1504073" y="1136621"/>
-                  </a:lnTo>
-                  <a:lnTo>
-                    <a:pt x="1575695" y="1176245"/>
-                  </a:lnTo>
-                  <a:lnTo>
-                    <a:pt x="1647318" y="1214809"/>
-                  </a:lnTo>
-                  <a:lnTo>
-                    <a:pt x="1718940" y="1252341"/>
-                  </a:lnTo>
-                  <a:lnTo>
-                    <a:pt x="1790563" y="1288868"/>
-                  </a:lnTo>
-                  <a:lnTo>
-                    <a:pt x="1862185" y="1324418"/>
-                  </a:lnTo>
-                  <a:lnTo>
-                    <a:pt x="1933808" y="1359017"/>
-                  </a:lnTo>
-                  <a:lnTo>
-                    <a:pt x="2005430" y="1392689"/>
-                  </a:lnTo>
-                  <a:lnTo>
-                    <a:pt x="2077053" y="1425461"/>
-                  </a:lnTo>
-                  <a:lnTo>
-                    <a:pt x="2148675" y="1457355"/>
-                  </a:lnTo>
-                  <a:lnTo>
-                    <a:pt x="2220298" y="1488396"/>
-                  </a:lnTo>
-                  <a:lnTo>
-                    <a:pt x="2291920" y="1518606"/>
-                  </a:lnTo>
-                  <a:lnTo>
-                    <a:pt x="2363543" y="1548007"/>
-                  </a:lnTo>
-                  <a:lnTo>
-                    <a:pt x="2435165" y="1576622"/>
-                  </a:lnTo>
-                  <a:lnTo>
-                    <a:pt x="2506788" y="1604471"/>
-                  </a:lnTo>
-                  <a:lnTo>
-                    <a:pt x="2578410" y="1631575"/>
-                  </a:lnTo>
-                  <a:lnTo>
-                    <a:pt x="2650033" y="1657953"/>
-                  </a:lnTo>
-                  <a:lnTo>
-                    <a:pt x="2721655" y="1683625"/>
-                  </a:lnTo>
-                  <a:lnTo>
-                    <a:pt x="2793278" y="1708610"/>
-                  </a:lnTo>
-                  <a:lnTo>
-                    <a:pt x="2864901" y="1732927"/>
-                  </a:lnTo>
-                  <a:lnTo>
-                    <a:pt x="2936523" y="1756593"/>
-                  </a:lnTo>
-                  <a:lnTo>
-                    <a:pt x="3008146" y="1779625"/>
-                  </a:lnTo>
-                  <a:lnTo>
-                    <a:pt x="3079768" y="1790971"/>
-                  </a:lnTo>
-                  <a:lnTo>
-                    <a:pt x="3151391" y="1795957"/>
-                  </a:lnTo>
-                  <a:lnTo>
-                    <a:pt x="3223013" y="1800913"/>
-                  </a:lnTo>
-                  <a:lnTo>
-                    <a:pt x="3294636" y="1805839"/>
-                  </a:lnTo>
-                  <a:lnTo>
-                    <a:pt x="3366258" y="1810735"/>
-                  </a:lnTo>
-                  <a:lnTo>
-                    <a:pt x="3437881" y="1815602"/>
-                  </a:lnTo>
-                  <a:lnTo>
-                    <a:pt x="3509503" y="1820439"/>
-                  </a:lnTo>
-                  <a:lnTo>
-                    <a:pt x="3581126" y="1825247"/>
-                  </a:lnTo>
-                  <a:lnTo>
-                    <a:pt x="3652748" y="1830027"/>
-                  </a:lnTo>
-                  <a:lnTo>
-                    <a:pt x="3724371" y="1834777"/>
-                  </a:lnTo>
-                  <a:lnTo>
-                    <a:pt x="3795993" y="1839498"/>
-                  </a:lnTo>
-                  <a:lnTo>
-                    <a:pt x="3867616" y="1844192"/>
-                  </a:lnTo>
-                  <a:lnTo>
-                    <a:pt x="3939238" y="1848856"/>
-                  </a:lnTo>
-                  <a:lnTo>
-                    <a:pt x="4010861" y="1853493"/>
-                  </a:lnTo>
-                  <a:lnTo>
-                    <a:pt x="4082483" y="1858102"/>
-                  </a:lnTo>
-                  <a:lnTo>
-                    <a:pt x="4154106" y="1862683"/>
-                  </a:lnTo>
-                  <a:lnTo>
-                    <a:pt x="4225729" y="1867236"/>
-                  </a:lnTo>
-                  <a:lnTo>
-                    <a:pt x="4297351" y="1871762"/>
-                  </a:lnTo>
-                  <a:lnTo>
-                    <a:pt x="4368974" y="1876260"/>
-                  </a:lnTo>
-                  <a:lnTo>
-                    <a:pt x="4440596" y="1880731"/>
-                  </a:lnTo>
-                  <a:lnTo>
-                    <a:pt x="4512219" y="1885176"/>
-                  </a:lnTo>
-                  <a:lnTo>
-                    <a:pt x="4583841" y="1889593"/>
-                  </a:lnTo>
-                  <a:lnTo>
-                    <a:pt x="4655464" y="1893984"/>
-                  </a:lnTo>
-                  <a:lnTo>
-                    <a:pt x="4727086" y="1898348"/>
-                  </a:lnTo>
-                  <a:lnTo>
-                    <a:pt x="4798709" y="1902686"/>
-                  </a:lnTo>
-                  <a:lnTo>
-                    <a:pt x="4870331" y="1906998"/>
-                  </a:lnTo>
-                  <a:lnTo>
-                    <a:pt x="4941954" y="1911284"/>
-                  </a:lnTo>
-                  <a:lnTo>
-                    <a:pt x="5013576" y="1915544"/>
-                  </a:lnTo>
-                  <a:lnTo>
-                    <a:pt x="5085199" y="1919778"/>
-                  </a:lnTo>
-                  <a:lnTo>
-                    <a:pt x="5156821" y="1923987"/>
-                  </a:lnTo>
-                  <a:lnTo>
-                    <a:pt x="5228444" y="1928170"/>
-                  </a:lnTo>
-                  <a:lnTo>
-                    <a:pt x="5300066" y="1932328"/>
-                  </a:lnTo>
-                  <a:lnTo>
-                    <a:pt x="5371689" y="1936461"/>
-                  </a:lnTo>
-                  <a:lnTo>
-                    <a:pt x="5443311" y="1940569"/>
-                  </a:lnTo>
-                  <a:lnTo>
-                    <a:pt x="5514934" y="1944652"/>
-                  </a:lnTo>
-                  <a:lnTo>
-                    <a:pt x="5586557" y="1948711"/>
-                  </a:lnTo>
-                  <a:lnTo>
-                    <a:pt x="5658179" y="1952745"/>
-                  </a:lnTo>
-                  <a:lnTo>
-                    <a:pt x="5729802" y="1956755"/>
-                  </a:lnTo>
-                  <a:lnTo>
-                    <a:pt x="5801424" y="1960740"/>
-                  </a:lnTo>
-                  <a:lnTo>
-                    <a:pt x="5873047" y="1964702"/>
-                  </a:lnTo>
-                  <a:lnTo>
-                    <a:pt x="5944669" y="1968639"/>
-                  </a:lnTo>
-                  <a:lnTo>
-                    <a:pt x="6016292" y="1972553"/>
-                  </a:lnTo>
-                  <a:lnTo>
-                    <a:pt x="6087914" y="1976444"/>
-                  </a:lnTo>
-                  <a:lnTo>
-                    <a:pt x="6159537" y="1980310"/>
-                  </a:lnTo>
-                  <a:lnTo>
-                    <a:pt x="6231159" y="1984154"/>
-                  </a:lnTo>
-                  <a:lnTo>
-                    <a:pt x="6302782" y="1987974"/>
-                  </a:lnTo>
-                  <a:lnTo>
-                    <a:pt x="6374404" y="1991771"/>
-                  </a:lnTo>
-                  <a:lnTo>
-                    <a:pt x="6446027" y="1995545"/>
-                  </a:lnTo>
-                  <a:lnTo>
-                    <a:pt x="6517649" y="1999297"/>
-                  </a:lnTo>
-                  <a:lnTo>
-                    <a:pt x="6589272" y="2003026"/>
-                  </a:lnTo>
-                  <a:lnTo>
-                    <a:pt x="6660894" y="2006732"/>
-                  </a:lnTo>
-                  <a:lnTo>
-                    <a:pt x="6732517" y="2010416"/>
-                  </a:lnTo>
-                  <a:lnTo>
-                    <a:pt x="6804139" y="2014078"/>
-                  </a:lnTo>
-                  <a:lnTo>
-                    <a:pt x="6875762" y="2017717"/>
-                  </a:lnTo>
-                  <a:lnTo>
-                    <a:pt x="6947385" y="2021335"/>
-                  </a:lnTo>
-                  <a:lnTo>
-                    <a:pt x="7019007" y="2024931"/>
-                  </a:lnTo>
-                  <a:lnTo>
-                    <a:pt x="7090630" y="2028505"/>
-                  </a:lnTo>
-                  <a:lnTo>
-                    <a:pt x="7090630" y="2438777"/>
-                  </a:lnTo>
-                  <a:lnTo>
-                    <a:pt x="7019007" y="2433870"/>
-                  </a:lnTo>
-                  <a:lnTo>
-                    <a:pt x="6947385" y="2428828"/>
-                  </a:lnTo>
-                  <a:lnTo>
-                    <a:pt x="6875762" y="2423647"/>
-                  </a:lnTo>
-                  <a:lnTo>
-                    <a:pt x="6804139" y="2418324"/>
-                  </a:lnTo>
-                  <a:lnTo>
-                    <a:pt x="6732517" y="2412855"/>
-                  </a:lnTo>
-                  <a:lnTo>
-                    <a:pt x="6660894" y="2407235"/>
-                  </a:lnTo>
-                  <a:lnTo>
-                    <a:pt x="6589272" y="2401460"/>
-                  </a:lnTo>
-                  <a:lnTo>
-                    <a:pt x="6517649" y="2395527"/>
-                  </a:lnTo>
-                  <a:lnTo>
-                    <a:pt x="6446027" y="2389431"/>
-                  </a:lnTo>
-                  <a:lnTo>
-                    <a:pt x="6374404" y="2383167"/>
-                  </a:lnTo>
-                  <a:lnTo>
-                    <a:pt x="6302782" y="2376731"/>
-                  </a:lnTo>
-                  <a:lnTo>
-                    <a:pt x="6231159" y="2370117"/>
-                  </a:lnTo>
-                  <a:lnTo>
-                    <a:pt x="6159537" y="2363322"/>
-                  </a:lnTo>
-                  <a:lnTo>
-                    <a:pt x="6087914" y="2356340"/>
-                  </a:lnTo>
-                  <a:lnTo>
-                    <a:pt x="6016292" y="2349166"/>
-                  </a:lnTo>
-                  <a:lnTo>
-                    <a:pt x="5944669" y="2341795"/>
-                  </a:lnTo>
-                  <a:lnTo>
-                    <a:pt x="5873047" y="2334221"/>
-                  </a:lnTo>
-                  <a:lnTo>
-                    <a:pt x="5801424" y="2326439"/>
-                  </a:lnTo>
-                  <a:lnTo>
-                    <a:pt x="5729802" y="2318443"/>
-                  </a:lnTo>
-                  <a:lnTo>
-                    <a:pt x="5658179" y="2310227"/>
-                  </a:lnTo>
-                  <a:lnTo>
-                    <a:pt x="5586557" y="2301785"/>
-                  </a:lnTo>
-                  <a:lnTo>
-                    <a:pt x="5514934" y="2293111"/>
-                  </a:lnTo>
-                  <a:lnTo>
-                    <a:pt x="5443311" y="2284198"/>
-                  </a:lnTo>
-                  <a:lnTo>
-                    <a:pt x="5371689" y="2275041"/>
-                  </a:lnTo>
-                  <a:lnTo>
-                    <a:pt x="5300066" y="2265631"/>
-                  </a:lnTo>
-                  <a:lnTo>
-                    <a:pt x="5228444" y="2255963"/>
-                  </a:lnTo>
-                  <a:lnTo>
-                    <a:pt x="5156821" y="2246029"/>
-                  </a:lnTo>
-                  <a:lnTo>
-                    <a:pt x="5085199" y="2235822"/>
-                  </a:lnTo>
-                  <a:lnTo>
-                    <a:pt x="5013576" y="2225334"/>
-                  </a:lnTo>
-                  <a:lnTo>
-                    <a:pt x="4941954" y="2214557"/>
-                  </a:lnTo>
-                  <a:lnTo>
-                    <a:pt x="4870331" y="2203485"/>
-                  </a:lnTo>
-                  <a:lnTo>
-                    <a:pt x="4798709" y="2192107"/>
-                  </a:lnTo>
-                  <a:lnTo>
-                    <a:pt x="4727086" y="2180417"/>
-                  </a:lnTo>
-                  <a:lnTo>
-                    <a:pt x="4655464" y="2168406"/>
-                  </a:lnTo>
-                  <a:lnTo>
-                    <a:pt x="4583841" y="2156064"/>
-                  </a:lnTo>
-                  <a:lnTo>
-                    <a:pt x="4512219" y="2143383"/>
-                  </a:lnTo>
-                  <a:lnTo>
-                    <a:pt x="4440596" y="2130353"/>
-                  </a:lnTo>
-                  <a:lnTo>
-                    <a:pt x="4368974" y="2116965"/>
-                  </a:lnTo>
-                  <a:lnTo>
-                    <a:pt x="4297351" y="2103209"/>
-                  </a:lnTo>
-                  <a:lnTo>
-                    <a:pt x="4225729" y="2089074"/>
-                  </a:lnTo>
-                  <a:lnTo>
-                    <a:pt x="4154106" y="2074551"/>
-                  </a:lnTo>
-                  <a:lnTo>
-                    <a:pt x="4082483" y="2059628"/>
-                  </a:lnTo>
-                  <a:lnTo>
-                    <a:pt x="4010861" y="2044295"/>
-                  </a:lnTo>
-                  <a:lnTo>
-                    <a:pt x="3939238" y="2028541"/>
-                  </a:lnTo>
-                  <a:lnTo>
-                    <a:pt x="3867616" y="2012353"/>
-                  </a:lnTo>
-                  <a:lnTo>
-                    <a:pt x="3795993" y="1995720"/>
-                  </a:lnTo>
-                  <a:lnTo>
-                    <a:pt x="3724371" y="1978630"/>
-                  </a:lnTo>
-                  <a:lnTo>
-                    <a:pt x="3652748" y="1961070"/>
-                  </a:lnTo>
-                  <a:lnTo>
-                    <a:pt x="3581126" y="1943027"/>
-                  </a:lnTo>
-                  <a:lnTo>
-                    <a:pt x="3509503" y="1924487"/>
-                  </a:lnTo>
-                  <a:lnTo>
-                    <a:pt x="3437881" y="1905438"/>
-                  </a:lnTo>
-                  <a:lnTo>
-                    <a:pt x="3366258" y="1885865"/>
-                  </a:lnTo>
-                  <a:lnTo>
-                    <a:pt x="3294636" y="1865754"/>
-                  </a:lnTo>
-                  <a:lnTo>
-                    <a:pt x="3223013" y="1845090"/>
-                  </a:lnTo>
-                  <a:lnTo>
-                    <a:pt x="3151391" y="1823858"/>
-                  </a:lnTo>
-                  <a:lnTo>
-                    <a:pt x="3079768" y="1802042"/>
-                  </a:lnTo>
-                  <a:lnTo>
-                    <a:pt x="3008146" y="1785955"/>
-                  </a:lnTo>
-                  <a:lnTo>
-                    <a:pt x="2936523" y="1780908"/>
-                  </a:lnTo>
-                  <a:lnTo>
-                    <a:pt x="2864901" y="1775831"/>
-                  </a:lnTo>
-                  <a:lnTo>
-                    <a:pt x="2793278" y="1770723"/>
-                  </a:lnTo>
-                  <a:lnTo>
-                    <a:pt x="2721655" y="1765584"/>
-                  </a:lnTo>
-                  <a:lnTo>
-                    <a:pt x="2650033" y="1760413"/>
-                  </a:lnTo>
-                  <a:lnTo>
-                    <a:pt x="2578410" y="1755212"/>
-                  </a:lnTo>
-                  <a:lnTo>
-                    <a:pt x="2506788" y="1749978"/>
-                  </a:lnTo>
-                  <a:lnTo>
-                    <a:pt x="2435165" y="1744713"/>
-                  </a:lnTo>
-                  <a:lnTo>
-                    <a:pt x="2363543" y="1739416"/>
-                  </a:lnTo>
-                  <a:lnTo>
-                    <a:pt x="2291920" y="1734087"/>
-                  </a:lnTo>
-                  <a:lnTo>
-                    <a:pt x="2220298" y="1728725"/>
-                  </a:lnTo>
-                  <a:lnTo>
-                    <a:pt x="2148675" y="1723331"/>
-                  </a:lnTo>
-                  <a:lnTo>
-                    <a:pt x="2077053" y="1717904"/>
-                  </a:lnTo>
-                  <a:lnTo>
-                    <a:pt x="2005430" y="1712444"/>
-                  </a:lnTo>
-                  <a:lnTo>
-                    <a:pt x="1933808" y="1706952"/>
-                  </a:lnTo>
-                  <a:lnTo>
-                    <a:pt x="1862185" y="1701425"/>
-                  </a:lnTo>
-                  <a:lnTo>
-                    <a:pt x="1790563" y="1695865"/>
-                  </a:lnTo>
-                  <a:lnTo>
-                    <a:pt x="1718940" y="1690272"/>
-                  </a:lnTo>
-                  <a:lnTo>
-                    <a:pt x="1647318" y="1684644"/>
-                  </a:lnTo>
-                  <a:lnTo>
-                    <a:pt x="1575695" y="1678982"/>
-                  </a:lnTo>
-                  <a:lnTo>
-                    <a:pt x="1504073" y="1673286"/>
-                  </a:lnTo>
-                  <a:lnTo>
-                    <a:pt x="1432450" y="1667556"/>
-                  </a:lnTo>
-                  <a:lnTo>
-                    <a:pt x="1360827" y="1661790"/>
-                  </a:lnTo>
-                  <a:lnTo>
-                    <a:pt x="1289205" y="1655990"/>
-                  </a:lnTo>
-                  <a:lnTo>
-                    <a:pt x="1217582" y="1650154"/>
-                  </a:lnTo>
-                  <a:lnTo>
-                    <a:pt x="1145960" y="1644283"/>
-                  </a:lnTo>
-                  <a:lnTo>
-                    <a:pt x="1074337" y="1638376"/>
-                  </a:lnTo>
-                  <a:lnTo>
-                    <a:pt x="1002715" y="1632433"/>
-                  </a:lnTo>
-                  <a:lnTo>
-                    <a:pt x="931092" y="1626455"/>
-                  </a:lnTo>
-                  <a:lnTo>
-                    <a:pt x="859470" y="1620440"/>
-                  </a:lnTo>
-                  <a:lnTo>
-                    <a:pt x="787847" y="1614388"/>
-                  </a:lnTo>
-                  <a:lnTo>
-                    <a:pt x="716225" y="1608300"/>
-                  </a:lnTo>
-                  <a:lnTo>
-                    <a:pt x="644602" y="1602175"/>
-                  </a:lnTo>
-                  <a:lnTo>
-                    <a:pt x="572980" y="1596012"/>
-                  </a:lnTo>
-                  <a:lnTo>
-                    <a:pt x="501357" y="1589812"/>
-                  </a:lnTo>
-                  <a:lnTo>
-                    <a:pt x="429735" y="1583575"/>
-                  </a:lnTo>
-                  <a:lnTo>
-                    <a:pt x="358112" y="1577299"/>
-                  </a:lnTo>
-                  <a:lnTo>
-                    <a:pt x="286490" y="1570986"/>
-                  </a:lnTo>
-                  <a:lnTo>
-                    <a:pt x="214867" y="1564634"/>
-                  </a:lnTo>
-                  <a:lnTo>
-                    <a:pt x="143245" y="1558244"/>
-                  </a:lnTo>
-                  <a:lnTo>
-                    <a:pt x="71622" y="1551815"/>
-                  </a:lnTo>
-                  <a:lnTo>
-                    <a:pt x="0" y="1545347"/>
+                    <a:pt x="70344" y="25276"/>
+                  </a:lnTo>
+                  <a:lnTo>
+                    <a:pt x="140688" y="49877"/>
+                  </a:lnTo>
+                  <a:lnTo>
+                    <a:pt x="211033" y="73819"/>
+                  </a:lnTo>
+                  <a:lnTo>
+                    <a:pt x="281377" y="97120"/>
+                  </a:lnTo>
+                  <a:lnTo>
+                    <a:pt x="351722" y="119798"/>
+                  </a:lnTo>
+                  <a:lnTo>
+                    <a:pt x="422066" y="141868"/>
+                  </a:lnTo>
+                  <a:lnTo>
+                    <a:pt x="492411" y="163348"/>
+                  </a:lnTo>
+                  <a:lnTo>
+                    <a:pt x="562755" y="184254"/>
+                  </a:lnTo>
+                  <a:lnTo>
+                    <a:pt x="633100" y="204599"/>
+                  </a:lnTo>
+                  <a:lnTo>
+                    <a:pt x="703444" y="224401"/>
+                  </a:lnTo>
+                  <a:lnTo>
+                    <a:pt x="773789" y="243672"/>
+                  </a:lnTo>
+                  <a:lnTo>
+                    <a:pt x="844133" y="262428"/>
+                  </a:lnTo>
+                  <a:lnTo>
+                    <a:pt x="914478" y="280681"/>
+                  </a:lnTo>
+                  <a:lnTo>
+                    <a:pt x="984822" y="298446"/>
+                  </a:lnTo>
+                  <a:lnTo>
+                    <a:pt x="1055167" y="315736"/>
+                  </a:lnTo>
+                  <a:lnTo>
+                    <a:pt x="1125511" y="332563"/>
+                  </a:lnTo>
+                  <a:lnTo>
+                    <a:pt x="1195856" y="348940"/>
+                  </a:lnTo>
+                  <a:lnTo>
+                    <a:pt x="1266200" y="364878"/>
+                  </a:lnTo>
+                  <a:lnTo>
+                    <a:pt x="1336545" y="380390"/>
+                  </a:lnTo>
+                  <a:lnTo>
+                    <a:pt x="1406889" y="395487"/>
+                  </a:lnTo>
+                  <a:lnTo>
+                    <a:pt x="1477234" y="410179"/>
+                  </a:lnTo>
+                  <a:lnTo>
+                    <a:pt x="1547578" y="424479"/>
+                  </a:lnTo>
+                  <a:lnTo>
+                    <a:pt x="1617923" y="438396"/>
+                  </a:lnTo>
+                  <a:lnTo>
+                    <a:pt x="1688267" y="451940"/>
+                  </a:lnTo>
+                  <a:lnTo>
+                    <a:pt x="1758612" y="465122"/>
+                  </a:lnTo>
+                  <a:lnTo>
+                    <a:pt x="1828956" y="477951"/>
+                  </a:lnTo>
+                  <a:lnTo>
+                    <a:pt x="1899301" y="490437"/>
+                  </a:lnTo>
+                  <a:lnTo>
+                    <a:pt x="1969645" y="502588"/>
+                  </a:lnTo>
+                  <a:lnTo>
+                    <a:pt x="2039990" y="514415"/>
+                  </a:lnTo>
+                  <a:lnTo>
+                    <a:pt x="2110334" y="525925"/>
+                  </a:lnTo>
+                  <a:lnTo>
+                    <a:pt x="2180679" y="537127"/>
+                  </a:lnTo>
+                  <a:lnTo>
+                    <a:pt x="2251023" y="548029"/>
+                  </a:lnTo>
+                  <a:lnTo>
+                    <a:pt x="2321368" y="558639"/>
+                  </a:lnTo>
+                  <a:lnTo>
+                    <a:pt x="2391712" y="568966"/>
+                  </a:lnTo>
+                  <a:lnTo>
+                    <a:pt x="2462057" y="579016"/>
+                  </a:lnTo>
+                  <a:lnTo>
+                    <a:pt x="2532401" y="588797"/>
+                  </a:lnTo>
+                  <a:lnTo>
+                    <a:pt x="2602746" y="598316"/>
+                  </a:lnTo>
+                  <a:lnTo>
+                    <a:pt x="2673090" y="607580"/>
+                  </a:lnTo>
+                  <a:lnTo>
+                    <a:pt x="2743435" y="616597"/>
+                  </a:lnTo>
+                  <a:lnTo>
+                    <a:pt x="2813779" y="625372"/>
+                  </a:lnTo>
+                  <a:lnTo>
+                    <a:pt x="2884124" y="633913"/>
+                  </a:lnTo>
+                  <a:lnTo>
+                    <a:pt x="2954468" y="642225"/>
+                  </a:lnTo>
+                  <a:lnTo>
+                    <a:pt x="3024813" y="646319"/>
+                  </a:lnTo>
+                  <a:lnTo>
+                    <a:pt x="3095157" y="648118"/>
+                  </a:lnTo>
+                  <a:lnTo>
+                    <a:pt x="3165502" y="649907"/>
+                  </a:lnTo>
+                  <a:lnTo>
+                    <a:pt x="3235846" y="651685"/>
+                  </a:lnTo>
+                  <a:lnTo>
+                    <a:pt x="3306191" y="653451"/>
+                  </a:lnTo>
+                  <a:lnTo>
+                    <a:pt x="3376535" y="655208"/>
+                  </a:lnTo>
+                  <a:lnTo>
+                    <a:pt x="3446880" y="656953"/>
+                  </a:lnTo>
+                  <a:lnTo>
+                    <a:pt x="3517224" y="658689"/>
+                  </a:lnTo>
+                  <a:lnTo>
+                    <a:pt x="3587569" y="660413"/>
+                  </a:lnTo>
+                  <a:lnTo>
+                    <a:pt x="3657913" y="662127"/>
+                  </a:lnTo>
+                  <a:lnTo>
+                    <a:pt x="3728257" y="663831"/>
+                  </a:lnTo>
+                  <a:lnTo>
+                    <a:pt x="3798602" y="665525"/>
+                  </a:lnTo>
+                  <a:lnTo>
+                    <a:pt x="3868946" y="667208"/>
+                  </a:lnTo>
+                  <a:lnTo>
+                    <a:pt x="3939291" y="668882"/>
+                  </a:lnTo>
+                  <a:lnTo>
+                    <a:pt x="4009635" y="670545"/>
+                  </a:lnTo>
+                  <a:lnTo>
+                    <a:pt x="4079980" y="672198"/>
+                  </a:lnTo>
+                  <a:lnTo>
+                    <a:pt x="4150324" y="673841"/>
+                  </a:lnTo>
+                  <a:lnTo>
+                    <a:pt x="4220669" y="675474"/>
+                  </a:lnTo>
+                  <a:lnTo>
+                    <a:pt x="4291013" y="677098"/>
+                  </a:lnTo>
+                  <a:lnTo>
+                    <a:pt x="4361358" y="678711"/>
+                  </a:lnTo>
+                  <a:lnTo>
+                    <a:pt x="4431702" y="680315"/>
+                  </a:lnTo>
+                  <a:lnTo>
+                    <a:pt x="4502047" y="681909"/>
+                  </a:lnTo>
+                  <a:lnTo>
+                    <a:pt x="4572391" y="683494"/>
+                  </a:lnTo>
+                  <a:lnTo>
+                    <a:pt x="4642736" y="685069"/>
+                  </a:lnTo>
+                  <a:lnTo>
+                    <a:pt x="4713080" y="686634"/>
+                  </a:lnTo>
+                  <a:lnTo>
+                    <a:pt x="4783425" y="688190"/>
+                  </a:lnTo>
+                  <a:lnTo>
+                    <a:pt x="4853769" y="689737"/>
+                  </a:lnTo>
+                  <a:lnTo>
+                    <a:pt x="4924114" y="691274"/>
+                  </a:lnTo>
+                  <a:lnTo>
+                    <a:pt x="4994458" y="692802"/>
+                  </a:lnTo>
+                  <a:lnTo>
+                    <a:pt x="5064803" y="694321"/>
+                  </a:lnTo>
+                  <a:lnTo>
+                    <a:pt x="5135147" y="695831"/>
+                  </a:lnTo>
+                  <a:lnTo>
+                    <a:pt x="5205492" y="697331"/>
+                  </a:lnTo>
+                  <a:lnTo>
+                    <a:pt x="5275836" y="698823"/>
+                  </a:lnTo>
+                  <a:lnTo>
+                    <a:pt x="5346181" y="700305"/>
+                  </a:lnTo>
+                  <a:lnTo>
+                    <a:pt x="5416525" y="701779"/>
+                  </a:lnTo>
+                  <a:lnTo>
+                    <a:pt x="5486870" y="703244"/>
+                  </a:lnTo>
+                  <a:lnTo>
+                    <a:pt x="5557214" y="704699"/>
+                  </a:lnTo>
+                  <a:lnTo>
+                    <a:pt x="5627559" y="706146"/>
+                  </a:lnTo>
+                  <a:lnTo>
+                    <a:pt x="5697903" y="707585"/>
+                  </a:lnTo>
+                  <a:lnTo>
+                    <a:pt x="5768248" y="709014"/>
+                  </a:lnTo>
+                  <a:lnTo>
+                    <a:pt x="5838592" y="710435"/>
+                  </a:lnTo>
+                  <a:lnTo>
+                    <a:pt x="5908937" y="711848"/>
+                  </a:lnTo>
+                  <a:lnTo>
+                    <a:pt x="5979281" y="713252"/>
+                  </a:lnTo>
+                  <a:lnTo>
+                    <a:pt x="6049626" y="714647"/>
+                  </a:lnTo>
+                  <a:lnTo>
+                    <a:pt x="6119970" y="716034"/>
+                  </a:lnTo>
+                  <a:lnTo>
+                    <a:pt x="6190315" y="717413"/>
+                  </a:lnTo>
+                  <a:lnTo>
+                    <a:pt x="6260659" y="718783"/>
+                  </a:lnTo>
+                  <a:lnTo>
+                    <a:pt x="6331004" y="720145"/>
+                  </a:lnTo>
+                  <a:lnTo>
+                    <a:pt x="6401348" y="721499"/>
+                  </a:lnTo>
+                  <a:lnTo>
+                    <a:pt x="6471693" y="722845"/>
+                  </a:lnTo>
+                  <a:lnTo>
+                    <a:pt x="6542037" y="724182"/>
+                  </a:lnTo>
+                  <a:lnTo>
+                    <a:pt x="6612382" y="725512"/>
+                  </a:lnTo>
+                  <a:lnTo>
+                    <a:pt x="6682726" y="726833"/>
+                  </a:lnTo>
+                  <a:lnTo>
+                    <a:pt x="6753071" y="728146"/>
+                  </a:lnTo>
+                  <a:lnTo>
+                    <a:pt x="6823415" y="729452"/>
+                  </a:lnTo>
+                  <a:lnTo>
+                    <a:pt x="6893760" y="730750"/>
+                  </a:lnTo>
+                  <a:lnTo>
+                    <a:pt x="6964104" y="732039"/>
+                  </a:lnTo>
+                  <a:lnTo>
+                    <a:pt x="6964104" y="880097"/>
+                  </a:lnTo>
+                  <a:lnTo>
+                    <a:pt x="6893760" y="878326"/>
+                  </a:lnTo>
+                  <a:lnTo>
+                    <a:pt x="6823415" y="876506"/>
+                  </a:lnTo>
+                  <a:lnTo>
+                    <a:pt x="6753071" y="874637"/>
+                  </a:lnTo>
+                  <a:lnTo>
+                    <a:pt x="6682726" y="872716"/>
+                  </a:lnTo>
+                  <a:lnTo>
+                    <a:pt x="6612382" y="870742"/>
+                  </a:lnTo>
+                  <a:lnTo>
+                    <a:pt x="6542037" y="868714"/>
+                  </a:lnTo>
+                  <a:lnTo>
+                    <a:pt x="6471693" y="866630"/>
+                  </a:lnTo>
+                  <a:lnTo>
+                    <a:pt x="6401348" y="864489"/>
+                  </a:lnTo>
+                  <a:lnTo>
+                    <a:pt x="6331004" y="862289"/>
+                  </a:lnTo>
+                  <a:lnTo>
+                    <a:pt x="6260659" y="860028"/>
+                  </a:lnTo>
+                  <a:lnTo>
+                    <a:pt x="6190315" y="857706"/>
+                  </a:lnTo>
+                  <a:lnTo>
+                    <a:pt x="6119970" y="855319"/>
+                  </a:lnTo>
+                  <a:lnTo>
+                    <a:pt x="6049626" y="852867"/>
+                  </a:lnTo>
+                  <a:lnTo>
+                    <a:pt x="5979281" y="850347"/>
+                  </a:lnTo>
+                  <a:lnTo>
+                    <a:pt x="5908937" y="847759"/>
+                  </a:lnTo>
+                  <a:lnTo>
+                    <a:pt x="5838592" y="845098"/>
+                  </a:lnTo>
+                  <a:lnTo>
+                    <a:pt x="5768248" y="842365"/>
+                  </a:lnTo>
+                  <a:lnTo>
+                    <a:pt x="5697903" y="839557"/>
+                  </a:lnTo>
+                  <a:lnTo>
+                    <a:pt x="5627559" y="836671"/>
+                  </a:lnTo>
+                  <a:lnTo>
+                    <a:pt x="5557214" y="833706"/>
+                  </a:lnTo>
+                  <a:lnTo>
+                    <a:pt x="5486870" y="830660"/>
+                  </a:lnTo>
+                  <a:lnTo>
+                    <a:pt x="5416525" y="827529"/>
+                  </a:lnTo>
+                  <a:lnTo>
+                    <a:pt x="5346181" y="824313"/>
+                  </a:lnTo>
+                  <a:lnTo>
+                    <a:pt x="5275836" y="821008"/>
+                  </a:lnTo>
+                  <a:lnTo>
+                    <a:pt x="5205492" y="817613"/>
+                  </a:lnTo>
+                  <a:lnTo>
+                    <a:pt x="5135147" y="814124"/>
+                  </a:lnTo>
+                  <a:lnTo>
+                    <a:pt x="5064803" y="810539"/>
+                  </a:lnTo>
+                  <a:lnTo>
+                    <a:pt x="4994458" y="806855"/>
+                  </a:lnTo>
+                  <a:lnTo>
+                    <a:pt x="4924114" y="803070"/>
+                  </a:lnTo>
+                  <a:lnTo>
+                    <a:pt x="4853769" y="799181"/>
+                  </a:lnTo>
+                  <a:lnTo>
+                    <a:pt x="4783425" y="795185"/>
+                  </a:lnTo>
+                  <a:lnTo>
+                    <a:pt x="4713080" y="791080"/>
+                  </a:lnTo>
+                  <a:lnTo>
+                    <a:pt x="4642736" y="786861"/>
+                  </a:lnTo>
+                  <a:lnTo>
+                    <a:pt x="4572391" y="782526"/>
+                  </a:lnTo>
+                  <a:lnTo>
+                    <a:pt x="4502047" y="778073"/>
+                  </a:lnTo>
+                  <a:lnTo>
+                    <a:pt x="4431702" y="773496"/>
+                  </a:lnTo>
+                  <a:lnTo>
+                    <a:pt x="4361358" y="768794"/>
+                  </a:lnTo>
+                  <a:lnTo>
+                    <a:pt x="4291013" y="763963"/>
+                  </a:lnTo>
+                  <a:lnTo>
+                    <a:pt x="4220669" y="758998"/>
+                  </a:lnTo>
+                  <a:lnTo>
+                    <a:pt x="4150324" y="753897"/>
+                  </a:lnTo>
+                  <a:lnTo>
+                    <a:pt x="4079980" y="748656"/>
+                  </a:lnTo>
+                  <a:lnTo>
+                    <a:pt x="4009635" y="743271"/>
+                  </a:lnTo>
+                  <a:lnTo>
+                    <a:pt x="3939291" y="737738"/>
+                  </a:lnTo>
+                  <a:lnTo>
+                    <a:pt x="3868946" y="732052"/>
+                  </a:lnTo>
+                  <a:lnTo>
+                    <a:pt x="3798602" y="726211"/>
+                  </a:lnTo>
+                  <a:lnTo>
+                    <a:pt x="3728257" y="720208"/>
+                  </a:lnTo>
+                  <a:lnTo>
+                    <a:pt x="3657913" y="714041"/>
+                  </a:lnTo>
+                  <a:lnTo>
+                    <a:pt x="3587569" y="707704"/>
+                  </a:lnTo>
+                  <a:lnTo>
+                    <a:pt x="3517224" y="701192"/>
+                  </a:lnTo>
+                  <a:lnTo>
+                    <a:pt x="3446880" y="694502"/>
+                  </a:lnTo>
+                  <a:lnTo>
+                    <a:pt x="3376535" y="687627"/>
+                  </a:lnTo>
+                  <a:lnTo>
+                    <a:pt x="3306191" y="680564"/>
+                  </a:lnTo>
+                  <a:lnTo>
+                    <a:pt x="3235846" y="673306"/>
+                  </a:lnTo>
+                  <a:lnTo>
+                    <a:pt x="3165502" y="665849"/>
+                  </a:lnTo>
+                  <a:lnTo>
+                    <a:pt x="3095157" y="658187"/>
+                  </a:lnTo>
+                  <a:lnTo>
+                    <a:pt x="3024813" y="650314"/>
+                  </a:lnTo>
+                  <a:lnTo>
+                    <a:pt x="2954468" y="644509"/>
+                  </a:lnTo>
+                  <a:lnTo>
+                    <a:pt x="2884124" y="642688"/>
+                  </a:lnTo>
+                  <a:lnTo>
+                    <a:pt x="2813779" y="640855"/>
+                  </a:lnTo>
+                  <a:lnTo>
+                    <a:pt x="2743435" y="639012"/>
+                  </a:lnTo>
+                  <a:lnTo>
+                    <a:pt x="2673090" y="637157"/>
+                  </a:lnTo>
+                  <a:lnTo>
+                    <a:pt x="2602746" y="635291"/>
+                  </a:lnTo>
+                  <a:lnTo>
+                    <a:pt x="2532401" y="633414"/>
+                  </a:lnTo>
+                  <a:lnTo>
+                    <a:pt x="2462057" y="631526"/>
+                  </a:lnTo>
+                  <a:lnTo>
+                    <a:pt x="2391712" y="629626"/>
+                  </a:lnTo>
+                  <a:lnTo>
+                    <a:pt x="2321368" y="627714"/>
+                  </a:lnTo>
+                  <a:lnTo>
+                    <a:pt x="2251023" y="625791"/>
+                  </a:lnTo>
+                  <a:lnTo>
+                    <a:pt x="2180679" y="623856"/>
+                  </a:lnTo>
+                  <a:lnTo>
+                    <a:pt x="2110334" y="621909"/>
+                  </a:lnTo>
+                  <a:lnTo>
+                    <a:pt x="2039990" y="619951"/>
+                  </a:lnTo>
+                  <a:lnTo>
+                    <a:pt x="1969645" y="617981"/>
+                  </a:lnTo>
+                  <a:lnTo>
+                    <a:pt x="1899301" y="615998"/>
+                  </a:lnTo>
+                  <a:lnTo>
+                    <a:pt x="1828956" y="614004"/>
+                  </a:lnTo>
+                  <a:lnTo>
+                    <a:pt x="1758612" y="611998"/>
+                  </a:lnTo>
+                  <a:lnTo>
+                    <a:pt x="1688267" y="609979"/>
+                  </a:lnTo>
+                  <a:lnTo>
+                    <a:pt x="1617923" y="607948"/>
+                  </a:lnTo>
+                  <a:lnTo>
+                    <a:pt x="1547578" y="605905"/>
+                  </a:lnTo>
+                  <a:lnTo>
+                    <a:pt x="1477234" y="603849"/>
+                  </a:lnTo>
+                  <a:lnTo>
+                    <a:pt x="1406889" y="601781"/>
+                  </a:lnTo>
+                  <a:lnTo>
+                    <a:pt x="1336545" y="599701"/>
+                  </a:lnTo>
+                  <a:lnTo>
+                    <a:pt x="1266200" y="597607"/>
+                  </a:lnTo>
+                  <a:lnTo>
+                    <a:pt x="1195856" y="595501"/>
+                  </a:lnTo>
+                  <a:lnTo>
+                    <a:pt x="1125511" y="593383"/>
+                  </a:lnTo>
+                  <a:lnTo>
+                    <a:pt x="1055167" y="591251"/>
+                  </a:lnTo>
+                  <a:lnTo>
+                    <a:pt x="984822" y="589106"/>
+                  </a:lnTo>
+                  <a:lnTo>
+                    <a:pt x="914478" y="586949"/>
+                  </a:lnTo>
+                  <a:lnTo>
+                    <a:pt x="844133" y="584778"/>
+                  </a:lnTo>
+                  <a:lnTo>
+                    <a:pt x="773789" y="582594"/>
+                  </a:lnTo>
+                  <a:lnTo>
+                    <a:pt x="703444" y="580397"/>
+                  </a:lnTo>
+                  <a:lnTo>
+                    <a:pt x="633100" y="578187"/>
+                  </a:lnTo>
+                  <a:lnTo>
+                    <a:pt x="562755" y="575963"/>
+                  </a:lnTo>
+                  <a:lnTo>
+                    <a:pt x="492411" y="573726"/>
+                  </a:lnTo>
+                  <a:lnTo>
+                    <a:pt x="422066" y="571475"/>
+                  </a:lnTo>
+                  <a:lnTo>
+                    <a:pt x="351722" y="569210"/>
+                  </a:lnTo>
+                  <a:lnTo>
+                    <a:pt x="281377" y="566932"/>
+                  </a:lnTo>
+                  <a:lnTo>
+                    <a:pt x="211033" y="564639"/>
+                  </a:lnTo>
+                  <a:lnTo>
+                    <a:pt x="140688" y="562333"/>
+                  </a:lnTo>
+                  <a:lnTo>
+                    <a:pt x="70344" y="560013"/>
+                  </a:lnTo>
+                  <a:lnTo>
+                    <a:pt x="0" y="557679"/>
                   </a:lnTo>
                   <a:close/>
                 </a:path>
@@ -3670,643 +3705,318 @@
         </p:sp>
         <p:sp>
           <p:nvSpPr>
-            <p:cNvPr id="23" name="pl23"/>
-            <p:cNvSpPr/>
-            <p:nvPr/>
-          </p:nvSpPr>
-          <p:spPr>
-            <a:xfrm>
-              <a:off x="1172049" y="2940021"/>
-              <a:ext cx="7090630" cy="2028505"/>
-            </a:xfrm>
-            <a:custGeom>
-              <a:avLst/>
-              <a:pathLst>
-                <a:path w="7090630" h="2028505">
-                  <a:moveTo>
-                    <a:pt x="0" y="0"/>
-                  </a:moveTo>
-                  <a:lnTo>
-                    <a:pt x="71622" y="70042"/>
-                  </a:lnTo>
-                  <a:lnTo>
-                    <a:pt x="143245" y="138211"/>
-                  </a:lnTo>
-                  <a:lnTo>
-                    <a:pt x="214867" y="204555"/>
-                  </a:lnTo>
-                  <a:lnTo>
-                    <a:pt x="286490" y="269123"/>
-                  </a:lnTo>
-                  <a:lnTo>
-                    <a:pt x="358112" y="331964"/>
-                  </a:lnTo>
-                  <a:lnTo>
-                    <a:pt x="429735" y="393122"/>
-                  </a:lnTo>
-                  <a:lnTo>
-                    <a:pt x="501357" y="452644"/>
-                  </a:lnTo>
-                  <a:lnTo>
-                    <a:pt x="572980" y="510574"/>
-                  </a:lnTo>
-                  <a:lnTo>
-                    <a:pt x="644602" y="566952"/>
-                  </a:lnTo>
-                  <a:lnTo>
-                    <a:pt x="716225" y="621822"/>
-                  </a:lnTo>
-                  <a:lnTo>
-                    <a:pt x="787847" y="675224"/>
-                  </a:lnTo>
-                  <a:lnTo>
-                    <a:pt x="859470" y="727196"/>
-                  </a:lnTo>
-                  <a:lnTo>
-                    <a:pt x="931092" y="777777"/>
-                  </a:lnTo>
-                  <a:lnTo>
-                    <a:pt x="1002715" y="827005"/>
-                  </a:lnTo>
-                  <a:lnTo>
-                    <a:pt x="1074337" y="874916"/>
-                  </a:lnTo>
-                  <a:lnTo>
-                    <a:pt x="1145960" y="921544"/>
-                  </a:lnTo>
-                  <a:lnTo>
-                    <a:pt x="1217582" y="966924"/>
-                  </a:lnTo>
-                  <a:lnTo>
-                    <a:pt x="1289205" y="1011090"/>
-                  </a:lnTo>
-                  <a:lnTo>
-                    <a:pt x="1360827" y="1054074"/>
-                  </a:lnTo>
-                  <a:lnTo>
-                    <a:pt x="1432450" y="1095907"/>
-                  </a:lnTo>
-                  <a:lnTo>
-                    <a:pt x="1504073" y="1136621"/>
-                  </a:lnTo>
-                  <a:lnTo>
-                    <a:pt x="1575695" y="1176245"/>
-                  </a:lnTo>
-                  <a:lnTo>
-                    <a:pt x="1647318" y="1214809"/>
-                  </a:lnTo>
-                  <a:lnTo>
-                    <a:pt x="1718940" y="1252341"/>
-                  </a:lnTo>
-                  <a:lnTo>
-                    <a:pt x="1790563" y="1288868"/>
-                  </a:lnTo>
-                  <a:lnTo>
-                    <a:pt x="1862185" y="1324418"/>
-                  </a:lnTo>
-                  <a:lnTo>
-                    <a:pt x="1933808" y="1359017"/>
-                  </a:lnTo>
-                  <a:lnTo>
-                    <a:pt x="2005430" y="1392689"/>
-                  </a:lnTo>
-                  <a:lnTo>
-                    <a:pt x="2077053" y="1425461"/>
-                  </a:lnTo>
-                  <a:lnTo>
-                    <a:pt x="2148675" y="1457355"/>
-                  </a:lnTo>
-                  <a:lnTo>
-                    <a:pt x="2220298" y="1488396"/>
-                  </a:lnTo>
-                  <a:lnTo>
-                    <a:pt x="2291920" y="1518606"/>
-                  </a:lnTo>
-                  <a:lnTo>
-                    <a:pt x="2363543" y="1548007"/>
-                  </a:lnTo>
-                  <a:lnTo>
-                    <a:pt x="2435165" y="1576622"/>
-                  </a:lnTo>
-                  <a:lnTo>
-                    <a:pt x="2506788" y="1604471"/>
-                  </a:lnTo>
-                  <a:lnTo>
-                    <a:pt x="2578410" y="1631575"/>
-                  </a:lnTo>
-                  <a:lnTo>
-                    <a:pt x="2650033" y="1657953"/>
-                  </a:lnTo>
-                  <a:lnTo>
-                    <a:pt x="2721655" y="1683625"/>
-                  </a:lnTo>
-                  <a:lnTo>
-                    <a:pt x="2793278" y="1708610"/>
-                  </a:lnTo>
-                  <a:lnTo>
-                    <a:pt x="2864901" y="1732927"/>
-                  </a:lnTo>
-                  <a:lnTo>
-                    <a:pt x="2936523" y="1756593"/>
-                  </a:lnTo>
-                  <a:lnTo>
-                    <a:pt x="3008146" y="1779625"/>
-                  </a:lnTo>
-                  <a:lnTo>
-                    <a:pt x="3079768" y="1790971"/>
-                  </a:lnTo>
-                  <a:lnTo>
-                    <a:pt x="3151391" y="1795957"/>
-                  </a:lnTo>
-                  <a:lnTo>
-                    <a:pt x="3223013" y="1800913"/>
-                  </a:lnTo>
-                  <a:lnTo>
-                    <a:pt x="3294636" y="1805839"/>
-                  </a:lnTo>
-                  <a:lnTo>
-                    <a:pt x="3366258" y="1810735"/>
-                  </a:lnTo>
-                  <a:lnTo>
-                    <a:pt x="3437881" y="1815602"/>
-                  </a:lnTo>
-                  <a:lnTo>
-                    <a:pt x="3509503" y="1820439"/>
-                  </a:lnTo>
-                  <a:lnTo>
-                    <a:pt x="3581126" y="1825247"/>
-                  </a:lnTo>
-                  <a:lnTo>
-                    <a:pt x="3652748" y="1830027"/>
-                  </a:lnTo>
-                  <a:lnTo>
-                    <a:pt x="3724371" y="1834777"/>
-                  </a:lnTo>
-                  <a:lnTo>
-                    <a:pt x="3795993" y="1839498"/>
-                  </a:lnTo>
-                  <a:lnTo>
-                    <a:pt x="3867616" y="1844192"/>
-                  </a:lnTo>
-                  <a:lnTo>
-                    <a:pt x="3939238" y="1848856"/>
-                  </a:lnTo>
-                  <a:lnTo>
-                    <a:pt x="4010861" y="1853493"/>
-                  </a:lnTo>
-                  <a:lnTo>
-                    <a:pt x="4082483" y="1858102"/>
-                  </a:lnTo>
-                  <a:lnTo>
-                    <a:pt x="4154106" y="1862683"/>
-                  </a:lnTo>
-                  <a:lnTo>
-                    <a:pt x="4225729" y="1867236"/>
-                  </a:lnTo>
-                  <a:lnTo>
-                    <a:pt x="4297351" y="1871762"/>
-                  </a:lnTo>
-                  <a:lnTo>
-                    <a:pt x="4368974" y="1876260"/>
-                  </a:lnTo>
-                  <a:lnTo>
-                    <a:pt x="4440596" y="1880731"/>
-                  </a:lnTo>
-                  <a:lnTo>
-                    <a:pt x="4512219" y="1885176"/>
-                  </a:lnTo>
-                  <a:lnTo>
-                    <a:pt x="4583841" y="1889593"/>
-                  </a:lnTo>
-                  <a:lnTo>
-                    <a:pt x="4655464" y="1893984"/>
-                  </a:lnTo>
-                  <a:lnTo>
-                    <a:pt x="4727086" y="1898348"/>
-                  </a:lnTo>
-                  <a:lnTo>
-                    <a:pt x="4798709" y="1902686"/>
-                  </a:lnTo>
-                  <a:lnTo>
-                    <a:pt x="4870331" y="1906998"/>
-                  </a:lnTo>
-                  <a:lnTo>
-                    <a:pt x="4941954" y="1911284"/>
-                  </a:lnTo>
-                  <a:lnTo>
-                    <a:pt x="5013576" y="1915544"/>
-                  </a:lnTo>
-                  <a:lnTo>
-                    <a:pt x="5085199" y="1919778"/>
-                  </a:lnTo>
-                  <a:lnTo>
-                    <a:pt x="5156821" y="1923987"/>
-                  </a:lnTo>
-                  <a:lnTo>
-                    <a:pt x="5228444" y="1928170"/>
-                  </a:lnTo>
-                  <a:lnTo>
-                    <a:pt x="5300066" y="1932328"/>
-                  </a:lnTo>
-                  <a:lnTo>
-                    <a:pt x="5371689" y="1936461"/>
-                  </a:lnTo>
-                  <a:lnTo>
-                    <a:pt x="5443311" y="1940569"/>
-                  </a:lnTo>
-                  <a:lnTo>
-                    <a:pt x="5514934" y="1944652"/>
-                  </a:lnTo>
-                  <a:lnTo>
-                    <a:pt x="5586557" y="1948711"/>
-                  </a:lnTo>
-                  <a:lnTo>
-                    <a:pt x="5658179" y="1952745"/>
-                  </a:lnTo>
-                  <a:lnTo>
-                    <a:pt x="5729802" y="1956755"/>
-                  </a:lnTo>
-                  <a:lnTo>
-                    <a:pt x="5801424" y="1960740"/>
-                  </a:lnTo>
-                  <a:lnTo>
-                    <a:pt x="5873047" y="1964702"/>
-                  </a:lnTo>
-                  <a:lnTo>
-                    <a:pt x="5944669" y="1968639"/>
-                  </a:lnTo>
-                  <a:lnTo>
-                    <a:pt x="6016292" y="1972553"/>
-                  </a:lnTo>
-                  <a:lnTo>
-                    <a:pt x="6087914" y="1976444"/>
-                  </a:lnTo>
-                  <a:lnTo>
-                    <a:pt x="6159537" y="1980310"/>
-                  </a:lnTo>
-                  <a:lnTo>
-                    <a:pt x="6231159" y="1984154"/>
-                  </a:lnTo>
-                  <a:lnTo>
-                    <a:pt x="6302782" y="1987974"/>
-                  </a:lnTo>
-                  <a:lnTo>
-                    <a:pt x="6374404" y="1991771"/>
-                  </a:lnTo>
-                  <a:lnTo>
-                    <a:pt x="6446027" y="1995545"/>
-                  </a:lnTo>
-                  <a:lnTo>
-                    <a:pt x="6517649" y="1999297"/>
-                  </a:lnTo>
-                  <a:lnTo>
-                    <a:pt x="6589272" y="2003026"/>
-                  </a:lnTo>
-                  <a:lnTo>
-                    <a:pt x="6660894" y="2006732"/>
-                  </a:lnTo>
-                  <a:lnTo>
-                    <a:pt x="6732517" y="2010416"/>
-                  </a:lnTo>
-                  <a:lnTo>
-                    <a:pt x="6804139" y="2014078"/>
-                  </a:lnTo>
-                  <a:lnTo>
-                    <a:pt x="6875762" y="2017717"/>
-                  </a:lnTo>
-                  <a:lnTo>
-                    <a:pt x="6947385" y="2021335"/>
-                  </a:lnTo>
-                  <a:lnTo>
-                    <a:pt x="7019007" y="2024931"/>
-                  </a:lnTo>
-                  <a:lnTo>
-                    <a:pt x="7090630" y="2028505"/>
-                  </a:lnTo>
-                </a:path>
-              </a:pathLst>
-            </a:custGeom>
-          </p:spPr>
-          <p:txBody>
-            <a:bodyPr/>
-            <a:lstStyle/>
-            <a:p/>
-          </p:txBody>
-        </p:sp>
-        <p:sp>
-          <p:nvSpPr>
             <p:cNvPr id="24" name="pl24"/>
             <p:cNvSpPr/>
             <p:nvPr/>
           </p:nvSpPr>
           <p:spPr>
             <a:xfrm>
-              <a:off x="1172049" y="4485368"/>
-              <a:ext cx="7090630" cy="893430"/>
+              <a:off x="1235312" y="2455798"/>
+              <a:ext cx="6964104" cy="732039"/>
             </a:xfrm>
             <a:custGeom>
               <a:avLst/>
               <a:pathLst>
-                <a:path w="7090630" h="893430">
+                <a:path w="6964104" h="732039">
                   <a:moveTo>
-                    <a:pt x="7090630" y="893430"/>
+                    <a:pt x="0" y="0"/>
                   </a:moveTo>
                   <a:lnTo>
-                    <a:pt x="7019007" y="888523"/>
-                  </a:lnTo>
-                  <a:lnTo>
-                    <a:pt x="6947385" y="883481"/>
-                  </a:lnTo>
-                  <a:lnTo>
-                    <a:pt x="6875762" y="878300"/>
-                  </a:lnTo>
-                  <a:lnTo>
-                    <a:pt x="6804139" y="872977"/>
-                  </a:lnTo>
-                  <a:lnTo>
-                    <a:pt x="6732517" y="867507"/>
-                  </a:lnTo>
-                  <a:lnTo>
-                    <a:pt x="6660894" y="861888"/>
-                  </a:lnTo>
-                  <a:lnTo>
-                    <a:pt x="6589272" y="856113"/>
-                  </a:lnTo>
-                  <a:lnTo>
-                    <a:pt x="6517649" y="850180"/>
-                  </a:lnTo>
-                  <a:lnTo>
-                    <a:pt x="6446027" y="844084"/>
-                  </a:lnTo>
-                  <a:lnTo>
-                    <a:pt x="6374404" y="837820"/>
-                  </a:lnTo>
-                  <a:lnTo>
-                    <a:pt x="6302782" y="831383"/>
-                  </a:lnTo>
-                  <a:lnTo>
-                    <a:pt x="6231159" y="824770"/>
-                  </a:lnTo>
-                  <a:lnTo>
-                    <a:pt x="6159537" y="817975"/>
-                  </a:lnTo>
-                  <a:lnTo>
-                    <a:pt x="6087914" y="810993"/>
-                  </a:lnTo>
-                  <a:lnTo>
-                    <a:pt x="6016292" y="803819"/>
-                  </a:lnTo>
-                  <a:lnTo>
-                    <a:pt x="5944669" y="796448"/>
-                  </a:lnTo>
-                  <a:lnTo>
-                    <a:pt x="5873047" y="788874"/>
-                  </a:lnTo>
-                  <a:lnTo>
-                    <a:pt x="5801424" y="781092"/>
-                  </a:lnTo>
-                  <a:lnTo>
-                    <a:pt x="5729802" y="773096"/>
-                  </a:lnTo>
-                  <a:lnTo>
-                    <a:pt x="5658179" y="764880"/>
-                  </a:lnTo>
-                  <a:lnTo>
-                    <a:pt x="5586557" y="756438"/>
-                  </a:lnTo>
-                  <a:lnTo>
-                    <a:pt x="5514934" y="747764"/>
-                  </a:lnTo>
-                  <a:lnTo>
-                    <a:pt x="5443311" y="738851"/>
-                  </a:lnTo>
-                  <a:lnTo>
-                    <a:pt x="5371689" y="729694"/>
-                  </a:lnTo>
-                  <a:lnTo>
-                    <a:pt x="5300066" y="720284"/>
-                  </a:lnTo>
-                  <a:lnTo>
-                    <a:pt x="5228444" y="710616"/>
-                  </a:lnTo>
-                  <a:lnTo>
-                    <a:pt x="5156821" y="700682"/>
-                  </a:lnTo>
-                  <a:lnTo>
-                    <a:pt x="5085199" y="690474"/>
-                  </a:lnTo>
-                  <a:lnTo>
-                    <a:pt x="5013576" y="679987"/>
-                  </a:lnTo>
-                  <a:lnTo>
-                    <a:pt x="4941954" y="669210"/>
-                  </a:lnTo>
-                  <a:lnTo>
-                    <a:pt x="4870331" y="658137"/>
-                  </a:lnTo>
-                  <a:lnTo>
-                    <a:pt x="4798709" y="646760"/>
-                  </a:lnTo>
-                  <a:lnTo>
-                    <a:pt x="4727086" y="635070"/>
-                  </a:lnTo>
-                  <a:lnTo>
-                    <a:pt x="4655464" y="623059"/>
-                  </a:lnTo>
-                  <a:lnTo>
-                    <a:pt x="4583841" y="610717"/>
-                  </a:lnTo>
-                  <a:lnTo>
-                    <a:pt x="4512219" y="598036"/>
-                  </a:lnTo>
-                  <a:lnTo>
-                    <a:pt x="4440596" y="585006"/>
-                  </a:lnTo>
-                  <a:lnTo>
-                    <a:pt x="4368974" y="571618"/>
-                  </a:lnTo>
-                  <a:lnTo>
-                    <a:pt x="4297351" y="557862"/>
-                  </a:lnTo>
-                  <a:lnTo>
-                    <a:pt x="4225729" y="543727"/>
-                  </a:lnTo>
-                  <a:lnTo>
-                    <a:pt x="4154106" y="529204"/>
-                  </a:lnTo>
-                  <a:lnTo>
-                    <a:pt x="4082483" y="514281"/>
-                  </a:lnTo>
-                  <a:lnTo>
-                    <a:pt x="4010861" y="498948"/>
-                  </a:lnTo>
-                  <a:lnTo>
-                    <a:pt x="3939238" y="483194"/>
-                  </a:lnTo>
-                  <a:lnTo>
-                    <a:pt x="3867616" y="467006"/>
-                  </a:lnTo>
-                  <a:lnTo>
-                    <a:pt x="3795993" y="450373"/>
-                  </a:lnTo>
-                  <a:lnTo>
-                    <a:pt x="3724371" y="433283"/>
-                  </a:lnTo>
-                  <a:lnTo>
-                    <a:pt x="3652748" y="415723"/>
-                  </a:lnTo>
-                  <a:lnTo>
-                    <a:pt x="3581126" y="397679"/>
-                  </a:lnTo>
-                  <a:lnTo>
-                    <a:pt x="3509503" y="379140"/>
-                  </a:lnTo>
-                  <a:lnTo>
-                    <a:pt x="3437881" y="360091"/>
-                  </a:lnTo>
-                  <a:lnTo>
-                    <a:pt x="3366258" y="340518"/>
-                  </a:lnTo>
-                  <a:lnTo>
-                    <a:pt x="3294636" y="320407"/>
-                  </a:lnTo>
-                  <a:lnTo>
-                    <a:pt x="3223013" y="299743"/>
-                  </a:lnTo>
-                  <a:lnTo>
-                    <a:pt x="3151391" y="278511"/>
-                  </a:lnTo>
-                  <a:lnTo>
-                    <a:pt x="3079768" y="256694"/>
-                  </a:lnTo>
-                  <a:lnTo>
-                    <a:pt x="3008146" y="240608"/>
-                  </a:lnTo>
-                  <a:lnTo>
-                    <a:pt x="2936523" y="235561"/>
-                  </a:lnTo>
-                  <a:lnTo>
-                    <a:pt x="2864901" y="230484"/>
-                  </a:lnTo>
-                  <a:lnTo>
-                    <a:pt x="2793278" y="225376"/>
-                  </a:lnTo>
-                  <a:lnTo>
-                    <a:pt x="2721655" y="220237"/>
-                  </a:lnTo>
-                  <a:lnTo>
-                    <a:pt x="2650033" y="215066"/>
-                  </a:lnTo>
-                  <a:lnTo>
-                    <a:pt x="2578410" y="209864"/>
-                  </a:lnTo>
-                  <a:lnTo>
-                    <a:pt x="2506788" y="204631"/>
-                  </a:lnTo>
-                  <a:lnTo>
-                    <a:pt x="2435165" y="199366"/>
-                  </a:lnTo>
-                  <a:lnTo>
-                    <a:pt x="2363543" y="194069"/>
-                  </a:lnTo>
-                  <a:lnTo>
-                    <a:pt x="2291920" y="188740"/>
-                  </a:lnTo>
-                  <a:lnTo>
-                    <a:pt x="2220298" y="183378"/>
-                  </a:lnTo>
-                  <a:lnTo>
-                    <a:pt x="2148675" y="177984"/>
-                  </a:lnTo>
-                  <a:lnTo>
-                    <a:pt x="2077053" y="172557"/>
-                  </a:lnTo>
-                  <a:lnTo>
-                    <a:pt x="2005430" y="167097"/>
-                  </a:lnTo>
-                  <a:lnTo>
-                    <a:pt x="1933808" y="161604"/>
-                  </a:lnTo>
-                  <a:lnTo>
-                    <a:pt x="1862185" y="156078"/>
-                  </a:lnTo>
-                  <a:lnTo>
-                    <a:pt x="1790563" y="150518"/>
-                  </a:lnTo>
-                  <a:lnTo>
-                    <a:pt x="1718940" y="144925"/>
-                  </a:lnTo>
-                  <a:lnTo>
-                    <a:pt x="1647318" y="139297"/>
-                  </a:lnTo>
-                  <a:lnTo>
-                    <a:pt x="1575695" y="133635"/>
-                  </a:lnTo>
-                  <a:lnTo>
-                    <a:pt x="1504073" y="127939"/>
-                  </a:lnTo>
-                  <a:lnTo>
-                    <a:pt x="1432450" y="122208"/>
-                  </a:lnTo>
-                  <a:lnTo>
-                    <a:pt x="1360827" y="116443"/>
-                  </a:lnTo>
-                  <a:lnTo>
-                    <a:pt x="1289205" y="110642"/>
-                  </a:lnTo>
-                  <a:lnTo>
-                    <a:pt x="1217582" y="104807"/>
-                  </a:lnTo>
-                  <a:lnTo>
-                    <a:pt x="1145960" y="98936"/>
-                  </a:lnTo>
-                  <a:lnTo>
-                    <a:pt x="1074337" y="93029"/>
-                  </a:lnTo>
-                  <a:lnTo>
-                    <a:pt x="1002715" y="87086"/>
-                  </a:lnTo>
-                  <a:lnTo>
-                    <a:pt x="931092" y="81107"/>
-                  </a:lnTo>
-                  <a:lnTo>
-                    <a:pt x="859470" y="75092"/>
-                  </a:lnTo>
-                  <a:lnTo>
-                    <a:pt x="787847" y="69041"/>
-                  </a:lnTo>
-                  <a:lnTo>
-                    <a:pt x="716225" y="62953"/>
-                  </a:lnTo>
-                  <a:lnTo>
-                    <a:pt x="644602" y="56827"/>
-                  </a:lnTo>
-                  <a:lnTo>
-                    <a:pt x="572980" y="50665"/>
-                  </a:lnTo>
-                  <a:lnTo>
-                    <a:pt x="501357" y="44465"/>
-                  </a:lnTo>
-                  <a:lnTo>
-                    <a:pt x="429735" y="38228"/>
-                  </a:lnTo>
-                  <a:lnTo>
-                    <a:pt x="358112" y="31952"/>
-                  </a:lnTo>
-                  <a:lnTo>
-                    <a:pt x="286490" y="25639"/>
-                  </a:lnTo>
-                  <a:lnTo>
-                    <a:pt x="214867" y="19287"/>
-                  </a:lnTo>
-                  <a:lnTo>
-                    <a:pt x="143245" y="12897"/>
-                  </a:lnTo>
-                  <a:lnTo>
-                    <a:pt x="71622" y="6468"/>
-                  </a:lnTo>
-                  <a:lnTo>
-                    <a:pt x="0" y="0"/>
+                    <a:pt x="70344" y="25276"/>
+                  </a:lnTo>
+                  <a:lnTo>
+                    <a:pt x="140688" y="49877"/>
+                  </a:lnTo>
+                  <a:lnTo>
+                    <a:pt x="211033" y="73819"/>
+                  </a:lnTo>
+                  <a:lnTo>
+                    <a:pt x="281377" y="97120"/>
+                  </a:lnTo>
+                  <a:lnTo>
+                    <a:pt x="351722" y="119798"/>
+                  </a:lnTo>
+                  <a:lnTo>
+                    <a:pt x="422066" y="141868"/>
+                  </a:lnTo>
+                  <a:lnTo>
+                    <a:pt x="492411" y="163348"/>
+                  </a:lnTo>
+                  <a:lnTo>
+                    <a:pt x="562755" y="184254"/>
+                  </a:lnTo>
+                  <a:lnTo>
+                    <a:pt x="633100" y="204599"/>
+                  </a:lnTo>
+                  <a:lnTo>
+                    <a:pt x="703444" y="224401"/>
+                  </a:lnTo>
+                  <a:lnTo>
+                    <a:pt x="773789" y="243672"/>
+                  </a:lnTo>
+                  <a:lnTo>
+                    <a:pt x="844133" y="262428"/>
+                  </a:lnTo>
+                  <a:lnTo>
+                    <a:pt x="914478" y="280681"/>
+                  </a:lnTo>
+                  <a:lnTo>
+                    <a:pt x="984822" y="298446"/>
+                  </a:lnTo>
+                  <a:lnTo>
+                    <a:pt x="1055167" y="315736"/>
+                  </a:lnTo>
+                  <a:lnTo>
+                    <a:pt x="1125511" y="332563"/>
+                  </a:lnTo>
+                  <a:lnTo>
+                    <a:pt x="1195856" y="348940"/>
+                  </a:lnTo>
+                  <a:lnTo>
+                    <a:pt x="1266200" y="364878"/>
+                  </a:lnTo>
+                  <a:lnTo>
+                    <a:pt x="1336545" y="380390"/>
+                  </a:lnTo>
+                  <a:lnTo>
+                    <a:pt x="1406889" y="395487"/>
+                  </a:lnTo>
+                  <a:lnTo>
+                    <a:pt x="1477234" y="410179"/>
+                  </a:lnTo>
+                  <a:lnTo>
+                    <a:pt x="1547578" y="424479"/>
+                  </a:lnTo>
+                  <a:lnTo>
+                    <a:pt x="1617923" y="438396"/>
+                  </a:lnTo>
+                  <a:lnTo>
+                    <a:pt x="1688267" y="451940"/>
+                  </a:lnTo>
+                  <a:lnTo>
+                    <a:pt x="1758612" y="465122"/>
+                  </a:lnTo>
+                  <a:lnTo>
+                    <a:pt x="1828956" y="477951"/>
+                  </a:lnTo>
+                  <a:lnTo>
+                    <a:pt x="1899301" y="490437"/>
+                  </a:lnTo>
+                  <a:lnTo>
+                    <a:pt x="1969645" y="502588"/>
+                  </a:lnTo>
+                  <a:lnTo>
+                    <a:pt x="2039990" y="514415"/>
+                  </a:lnTo>
+                  <a:lnTo>
+                    <a:pt x="2110334" y="525925"/>
+                  </a:lnTo>
+                  <a:lnTo>
+                    <a:pt x="2180679" y="537127"/>
+                  </a:lnTo>
+                  <a:lnTo>
+                    <a:pt x="2251023" y="548029"/>
+                  </a:lnTo>
+                  <a:lnTo>
+                    <a:pt x="2321368" y="558639"/>
+                  </a:lnTo>
+                  <a:lnTo>
+                    <a:pt x="2391712" y="568966"/>
+                  </a:lnTo>
+                  <a:lnTo>
+                    <a:pt x="2462057" y="579016"/>
+                  </a:lnTo>
+                  <a:lnTo>
+                    <a:pt x="2532401" y="588797"/>
+                  </a:lnTo>
+                  <a:lnTo>
+                    <a:pt x="2602746" y="598316"/>
+                  </a:lnTo>
+                  <a:lnTo>
+                    <a:pt x="2673090" y="607580"/>
+                  </a:lnTo>
+                  <a:lnTo>
+                    <a:pt x="2743435" y="616597"/>
+                  </a:lnTo>
+                  <a:lnTo>
+                    <a:pt x="2813779" y="625372"/>
+                  </a:lnTo>
+                  <a:lnTo>
+                    <a:pt x="2884124" y="633913"/>
+                  </a:lnTo>
+                  <a:lnTo>
+                    <a:pt x="2954468" y="642225"/>
+                  </a:lnTo>
+                  <a:lnTo>
+                    <a:pt x="3024813" y="646319"/>
+                  </a:lnTo>
+                  <a:lnTo>
+                    <a:pt x="3095157" y="648118"/>
+                  </a:lnTo>
+                  <a:lnTo>
+                    <a:pt x="3165502" y="649907"/>
+                  </a:lnTo>
+                  <a:lnTo>
+                    <a:pt x="3235846" y="651685"/>
+                  </a:lnTo>
+                  <a:lnTo>
+                    <a:pt x="3306191" y="653451"/>
+                  </a:lnTo>
+                  <a:lnTo>
+                    <a:pt x="3376535" y="655208"/>
+                  </a:lnTo>
+                  <a:lnTo>
+                    <a:pt x="3446880" y="656953"/>
+                  </a:lnTo>
+                  <a:lnTo>
+                    <a:pt x="3517224" y="658689"/>
+                  </a:lnTo>
+                  <a:lnTo>
+                    <a:pt x="3587569" y="660413"/>
+                  </a:lnTo>
+                  <a:lnTo>
+                    <a:pt x="3657913" y="662127"/>
+                  </a:lnTo>
+                  <a:lnTo>
+                    <a:pt x="3728257" y="663831"/>
+                  </a:lnTo>
+                  <a:lnTo>
+                    <a:pt x="3798602" y="665525"/>
+                  </a:lnTo>
+                  <a:lnTo>
+                    <a:pt x="3868946" y="667208"/>
+                  </a:lnTo>
+                  <a:lnTo>
+                    <a:pt x="3939291" y="668882"/>
+                  </a:lnTo>
+                  <a:lnTo>
+                    <a:pt x="4009635" y="670545"/>
+                  </a:lnTo>
+                  <a:lnTo>
+                    <a:pt x="4079980" y="672198"/>
+                  </a:lnTo>
+                  <a:lnTo>
+                    <a:pt x="4150324" y="673841"/>
+                  </a:lnTo>
+                  <a:lnTo>
+                    <a:pt x="4220669" y="675474"/>
+                  </a:lnTo>
+                  <a:lnTo>
+                    <a:pt x="4291013" y="677098"/>
+                  </a:lnTo>
+                  <a:lnTo>
+                    <a:pt x="4361358" y="678711"/>
+                  </a:lnTo>
+                  <a:lnTo>
+                    <a:pt x="4431702" y="680315"/>
+                  </a:lnTo>
+                  <a:lnTo>
+                    <a:pt x="4502047" y="681909"/>
+                  </a:lnTo>
+                  <a:lnTo>
+                    <a:pt x="4572391" y="683494"/>
+                  </a:lnTo>
+                  <a:lnTo>
+                    <a:pt x="4642736" y="685069"/>
+                  </a:lnTo>
+                  <a:lnTo>
+                    <a:pt x="4713080" y="686634"/>
+                  </a:lnTo>
+                  <a:lnTo>
+                    <a:pt x="4783425" y="688190"/>
+                  </a:lnTo>
+                  <a:lnTo>
+                    <a:pt x="4853769" y="689737"/>
+                  </a:lnTo>
+                  <a:lnTo>
+                    <a:pt x="4924114" y="691274"/>
+                  </a:lnTo>
+                  <a:lnTo>
+                    <a:pt x="4994458" y="692802"/>
+                  </a:lnTo>
+                  <a:lnTo>
+                    <a:pt x="5064803" y="694321"/>
+                  </a:lnTo>
+                  <a:lnTo>
+                    <a:pt x="5135147" y="695831"/>
+                  </a:lnTo>
+                  <a:lnTo>
+                    <a:pt x="5205492" y="697331"/>
+                  </a:lnTo>
+                  <a:lnTo>
+                    <a:pt x="5275836" y="698823"/>
+                  </a:lnTo>
+                  <a:lnTo>
+                    <a:pt x="5346181" y="700305"/>
+                  </a:lnTo>
+                  <a:lnTo>
+                    <a:pt x="5416525" y="701779"/>
+                  </a:lnTo>
+                  <a:lnTo>
+                    <a:pt x="5486870" y="703244"/>
+                  </a:lnTo>
+                  <a:lnTo>
+                    <a:pt x="5557214" y="704699"/>
+                  </a:lnTo>
+                  <a:lnTo>
+                    <a:pt x="5627559" y="706146"/>
+                  </a:lnTo>
+                  <a:lnTo>
+                    <a:pt x="5697903" y="707585"/>
+                  </a:lnTo>
+                  <a:lnTo>
+                    <a:pt x="5768248" y="709014"/>
+                  </a:lnTo>
+                  <a:lnTo>
+                    <a:pt x="5838592" y="710435"/>
+                  </a:lnTo>
+                  <a:lnTo>
+                    <a:pt x="5908937" y="711848"/>
+                  </a:lnTo>
+                  <a:lnTo>
+                    <a:pt x="5979281" y="713252"/>
+                  </a:lnTo>
+                  <a:lnTo>
+                    <a:pt x="6049626" y="714647"/>
+                  </a:lnTo>
+                  <a:lnTo>
+                    <a:pt x="6119970" y="716034"/>
+                  </a:lnTo>
+                  <a:lnTo>
+                    <a:pt x="6190315" y="717413"/>
+                  </a:lnTo>
+                  <a:lnTo>
+                    <a:pt x="6260659" y="718783"/>
+                  </a:lnTo>
+                  <a:lnTo>
+                    <a:pt x="6331004" y="720145"/>
+                  </a:lnTo>
+                  <a:lnTo>
+                    <a:pt x="6401348" y="721499"/>
+                  </a:lnTo>
+                  <a:lnTo>
+                    <a:pt x="6471693" y="722845"/>
+                  </a:lnTo>
+                  <a:lnTo>
+                    <a:pt x="6542037" y="724182"/>
+                  </a:lnTo>
+                  <a:lnTo>
+                    <a:pt x="6612382" y="725512"/>
+                  </a:lnTo>
+                  <a:lnTo>
+                    <a:pt x="6682726" y="726833"/>
+                  </a:lnTo>
+                  <a:lnTo>
+                    <a:pt x="6753071" y="728146"/>
+                  </a:lnTo>
+                  <a:lnTo>
+                    <a:pt x="6823415" y="729452"/>
+                  </a:lnTo>
+                  <a:lnTo>
+                    <a:pt x="6893760" y="730750"/>
+                  </a:lnTo>
+                  <a:lnTo>
+                    <a:pt x="6964104" y="732039"/>
                   </a:lnTo>
                 </a:path>
               </a:pathLst>
@@ -4326,312 +4036,637 @@
           </p:nvSpPr>
           <p:spPr>
             <a:xfrm>
-              <a:off x="1172049" y="3882329"/>
-              <a:ext cx="7090630" cy="1350793"/>
+              <a:off x="1235312" y="3013477"/>
+              <a:ext cx="6964104" cy="322417"/>
             </a:xfrm>
             <a:custGeom>
               <a:avLst/>
               <a:pathLst>
-                <a:path w="7090630" h="1350793">
+                <a:path w="6964104" h="322417">
+                  <a:moveTo>
+                    <a:pt x="6964104" y="322417"/>
+                  </a:moveTo>
+                  <a:lnTo>
+                    <a:pt x="6893760" y="320647"/>
+                  </a:lnTo>
+                  <a:lnTo>
+                    <a:pt x="6823415" y="318827"/>
+                  </a:lnTo>
+                  <a:lnTo>
+                    <a:pt x="6753071" y="316958"/>
+                  </a:lnTo>
+                  <a:lnTo>
+                    <a:pt x="6682726" y="315037"/>
+                  </a:lnTo>
+                  <a:lnTo>
+                    <a:pt x="6612382" y="313063"/>
+                  </a:lnTo>
+                  <a:lnTo>
+                    <a:pt x="6542037" y="311035"/>
+                  </a:lnTo>
+                  <a:lnTo>
+                    <a:pt x="6471693" y="308951"/>
+                  </a:lnTo>
+                  <a:lnTo>
+                    <a:pt x="6401348" y="306810"/>
+                  </a:lnTo>
+                  <a:lnTo>
+                    <a:pt x="6331004" y="304610"/>
+                  </a:lnTo>
+                  <a:lnTo>
+                    <a:pt x="6260659" y="302349"/>
+                  </a:lnTo>
+                  <a:lnTo>
+                    <a:pt x="6190315" y="300026"/>
+                  </a:lnTo>
+                  <a:lnTo>
+                    <a:pt x="6119970" y="297640"/>
+                  </a:lnTo>
+                  <a:lnTo>
+                    <a:pt x="6049626" y="295188"/>
+                  </a:lnTo>
+                  <a:lnTo>
+                    <a:pt x="5979281" y="292668"/>
+                  </a:lnTo>
+                  <a:lnTo>
+                    <a:pt x="5908937" y="290079"/>
+                  </a:lnTo>
+                  <a:lnTo>
+                    <a:pt x="5838592" y="287419"/>
+                  </a:lnTo>
+                  <a:lnTo>
+                    <a:pt x="5768248" y="284686"/>
+                  </a:lnTo>
+                  <a:lnTo>
+                    <a:pt x="5697903" y="281877"/>
+                  </a:lnTo>
+                  <a:lnTo>
+                    <a:pt x="5627559" y="278992"/>
+                  </a:lnTo>
+                  <a:lnTo>
+                    <a:pt x="5557214" y="276027"/>
+                  </a:lnTo>
+                  <a:lnTo>
+                    <a:pt x="5486870" y="272980"/>
+                  </a:lnTo>
+                  <a:lnTo>
+                    <a:pt x="5416525" y="269850"/>
+                  </a:lnTo>
+                  <a:lnTo>
+                    <a:pt x="5346181" y="266634"/>
+                  </a:lnTo>
+                  <a:lnTo>
+                    <a:pt x="5275836" y="263329"/>
+                  </a:lnTo>
+                  <a:lnTo>
+                    <a:pt x="5205492" y="259933"/>
+                  </a:lnTo>
+                  <a:lnTo>
+                    <a:pt x="5135147" y="256444"/>
+                  </a:lnTo>
+                  <a:lnTo>
+                    <a:pt x="5064803" y="252859"/>
+                  </a:lnTo>
+                  <a:lnTo>
+                    <a:pt x="4994458" y="249176"/>
+                  </a:lnTo>
+                  <a:lnTo>
+                    <a:pt x="4924114" y="245391"/>
+                  </a:lnTo>
+                  <a:lnTo>
+                    <a:pt x="4853769" y="241502"/>
+                  </a:lnTo>
+                  <a:lnTo>
+                    <a:pt x="4783425" y="237506"/>
+                  </a:lnTo>
+                  <a:lnTo>
+                    <a:pt x="4713080" y="233400"/>
+                  </a:lnTo>
+                  <a:lnTo>
+                    <a:pt x="4642736" y="229182"/>
+                  </a:lnTo>
+                  <a:lnTo>
+                    <a:pt x="4572391" y="224847"/>
+                  </a:lnTo>
+                  <a:lnTo>
+                    <a:pt x="4502047" y="220393"/>
+                  </a:lnTo>
+                  <a:lnTo>
+                    <a:pt x="4431702" y="215817"/>
+                  </a:lnTo>
+                  <a:lnTo>
+                    <a:pt x="4361358" y="211115"/>
+                  </a:lnTo>
+                  <a:lnTo>
+                    <a:pt x="4291013" y="206283"/>
+                  </a:lnTo>
+                  <a:lnTo>
+                    <a:pt x="4220669" y="201319"/>
+                  </a:lnTo>
+                  <a:lnTo>
+                    <a:pt x="4150324" y="196218"/>
+                  </a:lnTo>
+                  <a:lnTo>
+                    <a:pt x="4079980" y="190977"/>
+                  </a:lnTo>
+                  <a:lnTo>
+                    <a:pt x="4009635" y="185592"/>
+                  </a:lnTo>
+                  <a:lnTo>
+                    <a:pt x="3939291" y="180058"/>
+                  </a:lnTo>
+                  <a:lnTo>
+                    <a:pt x="3868946" y="174373"/>
+                  </a:lnTo>
+                  <a:lnTo>
+                    <a:pt x="3798602" y="168531"/>
+                  </a:lnTo>
+                  <a:lnTo>
+                    <a:pt x="3728257" y="162529"/>
+                  </a:lnTo>
+                  <a:lnTo>
+                    <a:pt x="3657913" y="156361"/>
+                  </a:lnTo>
+                  <a:lnTo>
+                    <a:pt x="3587569" y="150024"/>
+                  </a:lnTo>
+                  <a:lnTo>
+                    <a:pt x="3517224" y="143513"/>
+                  </a:lnTo>
+                  <a:lnTo>
+                    <a:pt x="3446880" y="136822"/>
+                  </a:lnTo>
+                  <a:lnTo>
+                    <a:pt x="3376535" y="129948"/>
+                  </a:lnTo>
+                  <a:lnTo>
+                    <a:pt x="3306191" y="122885"/>
+                  </a:lnTo>
+                  <a:lnTo>
+                    <a:pt x="3235846" y="115627"/>
+                  </a:lnTo>
+                  <a:lnTo>
+                    <a:pt x="3165502" y="108170"/>
+                  </a:lnTo>
+                  <a:lnTo>
+                    <a:pt x="3095157" y="100508"/>
+                  </a:lnTo>
+                  <a:lnTo>
+                    <a:pt x="3024813" y="92635"/>
+                  </a:lnTo>
+                  <a:lnTo>
+                    <a:pt x="2954468" y="86829"/>
+                  </a:lnTo>
+                  <a:lnTo>
+                    <a:pt x="2884124" y="85008"/>
+                  </a:lnTo>
+                  <a:lnTo>
+                    <a:pt x="2813779" y="83176"/>
+                  </a:lnTo>
+                  <a:lnTo>
+                    <a:pt x="2743435" y="81332"/>
+                  </a:lnTo>
+                  <a:lnTo>
+                    <a:pt x="2673090" y="79478"/>
+                  </a:lnTo>
+                  <a:lnTo>
+                    <a:pt x="2602746" y="77612"/>
+                  </a:lnTo>
+                  <a:lnTo>
+                    <a:pt x="2532401" y="75735"/>
+                  </a:lnTo>
+                  <a:lnTo>
+                    <a:pt x="2462057" y="73846"/>
+                  </a:lnTo>
+                  <a:lnTo>
+                    <a:pt x="2391712" y="71946"/>
+                  </a:lnTo>
+                  <a:lnTo>
+                    <a:pt x="2321368" y="70035"/>
+                  </a:lnTo>
+                  <a:lnTo>
+                    <a:pt x="2251023" y="68111"/>
+                  </a:lnTo>
+                  <a:lnTo>
+                    <a:pt x="2180679" y="66177"/>
+                  </a:lnTo>
+                  <a:lnTo>
+                    <a:pt x="2110334" y="64230"/>
+                  </a:lnTo>
+                  <a:lnTo>
+                    <a:pt x="2039990" y="62272"/>
+                  </a:lnTo>
+                  <a:lnTo>
+                    <a:pt x="1969645" y="60301"/>
+                  </a:lnTo>
+                  <a:lnTo>
+                    <a:pt x="1899301" y="58319"/>
+                  </a:lnTo>
+                  <a:lnTo>
+                    <a:pt x="1828956" y="56325"/>
+                  </a:lnTo>
+                  <a:lnTo>
+                    <a:pt x="1758612" y="54318"/>
+                  </a:lnTo>
+                  <a:lnTo>
+                    <a:pt x="1688267" y="52300"/>
+                  </a:lnTo>
+                  <a:lnTo>
+                    <a:pt x="1617923" y="50269"/>
+                  </a:lnTo>
+                  <a:lnTo>
+                    <a:pt x="1547578" y="48225"/>
+                  </a:lnTo>
+                  <a:lnTo>
+                    <a:pt x="1477234" y="46170"/>
+                  </a:lnTo>
+                  <a:lnTo>
+                    <a:pt x="1406889" y="44102"/>
+                  </a:lnTo>
+                  <a:lnTo>
+                    <a:pt x="1336545" y="42021"/>
+                  </a:lnTo>
+                  <a:lnTo>
+                    <a:pt x="1266200" y="39928"/>
+                  </a:lnTo>
+                  <a:lnTo>
+                    <a:pt x="1195856" y="37822"/>
+                  </a:lnTo>
+                  <a:lnTo>
+                    <a:pt x="1125511" y="35703"/>
+                  </a:lnTo>
+                  <a:lnTo>
+                    <a:pt x="1055167" y="33572"/>
+                  </a:lnTo>
+                  <a:lnTo>
+                    <a:pt x="984822" y="31427"/>
+                  </a:lnTo>
+                  <a:lnTo>
+                    <a:pt x="914478" y="29269"/>
+                  </a:lnTo>
+                  <a:lnTo>
+                    <a:pt x="844133" y="27099"/>
+                  </a:lnTo>
+                  <a:lnTo>
+                    <a:pt x="773789" y="24915"/>
+                  </a:lnTo>
+                  <a:lnTo>
+                    <a:pt x="703444" y="22718"/>
+                  </a:lnTo>
+                  <a:lnTo>
+                    <a:pt x="633100" y="20507"/>
+                  </a:lnTo>
+                  <a:lnTo>
+                    <a:pt x="562755" y="18283"/>
+                  </a:lnTo>
+                  <a:lnTo>
+                    <a:pt x="492411" y="16046"/>
+                  </a:lnTo>
+                  <a:lnTo>
+                    <a:pt x="422066" y="13795"/>
+                  </a:lnTo>
+                  <a:lnTo>
+                    <a:pt x="351722" y="11531"/>
+                  </a:lnTo>
+                  <a:lnTo>
+                    <a:pt x="281377" y="9252"/>
+                  </a:lnTo>
+                  <a:lnTo>
+                    <a:pt x="211033" y="6960"/>
+                  </a:lnTo>
+                  <a:lnTo>
+                    <a:pt x="140688" y="4654"/>
+                  </a:lnTo>
+                  <a:lnTo>
+                    <a:pt x="70344" y="2334"/>
+                  </a:lnTo>
+                  <a:lnTo>
+                    <a:pt x="0" y="0"/>
+                  </a:lnTo>
+                </a:path>
+              </a:pathLst>
+            </a:custGeom>
+          </p:spPr>
+          <p:txBody>
+            <a:bodyPr/>
+            <a:lstStyle/>
+            <a:p/>
+          </p:txBody>
+        </p:sp>
+        <p:sp>
+          <p:nvSpPr>
+            <p:cNvPr id="26" name="pl26"/>
+            <p:cNvSpPr/>
+            <p:nvPr/>
+          </p:nvSpPr>
+          <p:spPr>
+            <a:xfrm>
+              <a:off x="1235312" y="2795855"/>
+              <a:ext cx="6964104" cy="487469"/>
+            </a:xfrm>
+            <a:custGeom>
+              <a:avLst/>
+              <a:pathLst>
+                <a:path w="6964104" h="487469">
                   <a:moveTo>
                     <a:pt x="0" y="0"/>
                   </a:moveTo>
                   <a:lnTo>
-                    <a:pt x="71622" y="27557"/>
-                  </a:lnTo>
-                  <a:lnTo>
-                    <a:pt x="143245" y="54661"/>
-                  </a:lnTo>
-                  <a:lnTo>
-                    <a:pt x="214867" y="81319"/>
-                  </a:lnTo>
-                  <a:lnTo>
-                    <a:pt x="286490" y="107538"/>
-                  </a:lnTo>
-                  <a:lnTo>
-                    <a:pt x="358112" y="133326"/>
-                  </a:lnTo>
-                  <a:lnTo>
-                    <a:pt x="429735" y="158690"/>
-                  </a:lnTo>
-                  <a:lnTo>
-                    <a:pt x="501357" y="183636"/>
-                  </a:lnTo>
-                  <a:lnTo>
-                    <a:pt x="572980" y="208172"/>
-                  </a:lnTo>
-                  <a:lnTo>
-                    <a:pt x="644602" y="232304"/>
-                  </a:lnTo>
-                  <a:lnTo>
-                    <a:pt x="716225" y="256040"/>
-                  </a:lnTo>
-                  <a:lnTo>
-                    <a:pt x="787847" y="279384"/>
-                  </a:lnTo>
-                  <a:lnTo>
-                    <a:pt x="859470" y="302345"/>
-                  </a:lnTo>
-                  <a:lnTo>
-                    <a:pt x="931092" y="324928"/>
-                  </a:lnTo>
-                  <a:lnTo>
-                    <a:pt x="1002715" y="347139"/>
-                  </a:lnTo>
-                  <a:lnTo>
-                    <a:pt x="1074337" y="368985"/>
-                  </a:lnTo>
-                  <a:lnTo>
-                    <a:pt x="1145960" y="390471"/>
-                  </a:lnTo>
-                  <a:lnTo>
-                    <a:pt x="1217582" y="411604"/>
-                  </a:lnTo>
-                  <a:lnTo>
-                    <a:pt x="1289205" y="432390"/>
-                  </a:lnTo>
-                  <a:lnTo>
-                    <a:pt x="1360827" y="452833"/>
-                  </a:lnTo>
-                  <a:lnTo>
-                    <a:pt x="1432450" y="472940"/>
-                  </a:lnTo>
-                  <a:lnTo>
-                    <a:pt x="1504073" y="492716"/>
-                  </a:lnTo>
-                  <a:lnTo>
-                    <a:pt x="1575695" y="512166"/>
-                  </a:lnTo>
-                  <a:lnTo>
-                    <a:pt x="1647318" y="531297"/>
-                  </a:lnTo>
-                  <a:lnTo>
-                    <a:pt x="1718940" y="550113"/>
-                  </a:lnTo>
-                  <a:lnTo>
-                    <a:pt x="1790563" y="568619"/>
-                  </a:lnTo>
-                  <a:lnTo>
-                    <a:pt x="1862185" y="586821"/>
-                  </a:lnTo>
-                  <a:lnTo>
-                    <a:pt x="1933808" y="604724"/>
-                  </a:lnTo>
-                  <a:lnTo>
-                    <a:pt x="2005430" y="622331"/>
-                  </a:lnTo>
-                  <a:lnTo>
-                    <a:pt x="2077053" y="639650"/>
-                  </a:lnTo>
-                  <a:lnTo>
-                    <a:pt x="2148675" y="656683"/>
-                  </a:lnTo>
-                  <a:lnTo>
-                    <a:pt x="2220298" y="673436"/>
-                  </a:lnTo>
-                  <a:lnTo>
-                    <a:pt x="2291920" y="689913"/>
-                  </a:lnTo>
-                  <a:lnTo>
-                    <a:pt x="2363543" y="706119"/>
-                  </a:lnTo>
-                  <a:lnTo>
-                    <a:pt x="2435165" y="722059"/>
-                  </a:lnTo>
-                  <a:lnTo>
-                    <a:pt x="2506788" y="737736"/>
-                  </a:lnTo>
-                  <a:lnTo>
-                    <a:pt x="2578410" y="753156"/>
-                  </a:lnTo>
-                  <a:lnTo>
-                    <a:pt x="2650033" y="768321"/>
-                  </a:lnTo>
-                  <a:lnTo>
-                    <a:pt x="2721655" y="783238"/>
-                  </a:lnTo>
-                  <a:lnTo>
-                    <a:pt x="2793278" y="797908"/>
-                  </a:lnTo>
-                  <a:lnTo>
-                    <a:pt x="2864901" y="812338"/>
-                  </a:lnTo>
-                  <a:lnTo>
-                    <a:pt x="2936523" y="826530"/>
-                  </a:lnTo>
-                  <a:lnTo>
-                    <a:pt x="3008146" y="840488"/>
-                  </a:lnTo>
-                  <a:lnTo>
-                    <a:pt x="3079768" y="854217"/>
-                  </a:lnTo>
-                  <a:lnTo>
-                    <a:pt x="3151391" y="867720"/>
-                  </a:lnTo>
-                  <a:lnTo>
-                    <a:pt x="3223013" y="881001"/>
-                  </a:lnTo>
-                  <a:lnTo>
-                    <a:pt x="3294636" y="894063"/>
-                  </a:lnTo>
-                  <a:lnTo>
-                    <a:pt x="3366258" y="906910"/>
-                  </a:lnTo>
-                  <a:lnTo>
-                    <a:pt x="3437881" y="919546"/>
-                  </a:lnTo>
-                  <a:lnTo>
-                    <a:pt x="3509503" y="931974"/>
-                  </a:lnTo>
-                  <a:lnTo>
-                    <a:pt x="3581126" y="944198"/>
-                  </a:lnTo>
-                  <a:lnTo>
-                    <a:pt x="3652748" y="956221"/>
-                  </a:lnTo>
-                  <a:lnTo>
-                    <a:pt x="3724371" y="968045"/>
-                  </a:lnTo>
-                  <a:lnTo>
-                    <a:pt x="3795993" y="979675"/>
-                  </a:lnTo>
-                  <a:lnTo>
-                    <a:pt x="3867616" y="991114"/>
-                  </a:lnTo>
-                  <a:lnTo>
-                    <a:pt x="3939238" y="1002365"/>
-                  </a:lnTo>
-                  <a:lnTo>
-                    <a:pt x="4010861" y="1013430"/>
-                  </a:lnTo>
-                  <a:lnTo>
-                    <a:pt x="4082483" y="1024314"/>
-                  </a:lnTo>
-                  <a:lnTo>
-                    <a:pt x="4154106" y="1035018"/>
-                  </a:lnTo>
-                  <a:lnTo>
-                    <a:pt x="4225729" y="1045546"/>
-                  </a:lnTo>
-                  <a:lnTo>
-                    <a:pt x="4297351" y="1055901"/>
-                  </a:lnTo>
-                  <a:lnTo>
-                    <a:pt x="4368974" y="1066086"/>
-                  </a:lnTo>
-                  <a:lnTo>
-                    <a:pt x="4440596" y="1076103"/>
-                  </a:lnTo>
-                  <a:lnTo>
-                    <a:pt x="4512219" y="1085955"/>
-                  </a:lnTo>
-                  <a:lnTo>
-                    <a:pt x="4583841" y="1095645"/>
-                  </a:lnTo>
-                  <a:lnTo>
-                    <a:pt x="4655464" y="1105176"/>
-                  </a:lnTo>
-                  <a:lnTo>
-                    <a:pt x="4727086" y="1114550"/>
-                  </a:lnTo>
-                  <a:lnTo>
-                    <a:pt x="4798709" y="1123770"/>
-                  </a:lnTo>
-                  <a:lnTo>
-                    <a:pt x="4870331" y="1132838"/>
-                  </a:lnTo>
-                  <a:lnTo>
-                    <a:pt x="4941954" y="1141757"/>
-                  </a:lnTo>
-                  <a:lnTo>
-                    <a:pt x="5013576" y="1150529"/>
-                  </a:lnTo>
-                  <a:lnTo>
-                    <a:pt x="5085199" y="1159157"/>
-                  </a:lnTo>
-                  <a:lnTo>
-                    <a:pt x="5156821" y="1167642"/>
-                  </a:lnTo>
-                  <a:lnTo>
-                    <a:pt x="5228444" y="1175989"/>
-                  </a:lnTo>
-                  <a:lnTo>
-                    <a:pt x="5300066" y="1184197"/>
-                  </a:lnTo>
-                  <a:lnTo>
-                    <a:pt x="5371689" y="1192271"/>
-                  </a:lnTo>
-                  <a:lnTo>
-                    <a:pt x="5443311" y="1200212"/>
-                  </a:lnTo>
-                  <a:lnTo>
-                    <a:pt x="5514934" y="1208023"/>
-                  </a:lnTo>
-                  <a:lnTo>
-                    <a:pt x="5586557" y="1215704"/>
-                  </a:lnTo>
-                  <a:lnTo>
-                    <a:pt x="5658179" y="1223260"/>
-                  </a:lnTo>
-                  <a:lnTo>
-                    <a:pt x="5729802" y="1230691"/>
-                  </a:lnTo>
-                  <a:lnTo>
-                    <a:pt x="5801424" y="1238000"/>
-                  </a:lnTo>
-                  <a:lnTo>
-                    <a:pt x="5873047" y="1245188"/>
-                  </a:lnTo>
-                  <a:lnTo>
-                    <a:pt x="5944669" y="1252259"/>
-                  </a:lnTo>
-                  <a:lnTo>
-                    <a:pt x="6016292" y="1259213"/>
-                  </a:lnTo>
-                  <a:lnTo>
-                    <a:pt x="6087914" y="1266052"/>
-                  </a:lnTo>
-                  <a:lnTo>
-                    <a:pt x="6159537" y="1272779"/>
-                  </a:lnTo>
-                  <a:lnTo>
-                    <a:pt x="6231159" y="1279396"/>
-                  </a:lnTo>
-                  <a:lnTo>
-                    <a:pt x="6302782" y="1285903"/>
-                  </a:lnTo>
-                  <a:lnTo>
-                    <a:pt x="6374404" y="1292304"/>
-                  </a:lnTo>
-                  <a:lnTo>
-                    <a:pt x="6446027" y="1298599"/>
-                  </a:lnTo>
-                  <a:lnTo>
-                    <a:pt x="6517649" y="1304790"/>
-                  </a:lnTo>
-                  <a:lnTo>
-                    <a:pt x="6589272" y="1310880"/>
-                  </a:lnTo>
-                  <a:lnTo>
-                    <a:pt x="6660894" y="1316870"/>
-                  </a:lnTo>
-                  <a:lnTo>
-                    <a:pt x="6732517" y="1322761"/>
-                  </a:lnTo>
-                  <a:lnTo>
-                    <a:pt x="6804139" y="1328555"/>
-                  </a:lnTo>
-                  <a:lnTo>
-                    <a:pt x="6875762" y="1334253"/>
-                  </a:lnTo>
-                  <a:lnTo>
-                    <a:pt x="6947385" y="1339858"/>
-                  </a:lnTo>
-                  <a:lnTo>
-                    <a:pt x="7019007" y="1345371"/>
-                  </a:lnTo>
-                  <a:lnTo>
-                    <a:pt x="7090630" y="1350793"/>
+                    <a:pt x="70344" y="9944"/>
+                  </a:lnTo>
+                  <a:lnTo>
+                    <a:pt x="140688" y="19725"/>
+                  </a:lnTo>
+                  <a:lnTo>
+                    <a:pt x="211033" y="29346"/>
+                  </a:lnTo>
+                  <a:lnTo>
+                    <a:pt x="281377" y="38808"/>
+                  </a:lnTo>
+                  <a:lnTo>
+                    <a:pt x="351722" y="48114"/>
+                  </a:lnTo>
+                  <a:lnTo>
+                    <a:pt x="422066" y="57267"/>
+                  </a:lnTo>
+                  <a:lnTo>
+                    <a:pt x="492411" y="66270"/>
+                  </a:lnTo>
+                  <a:lnTo>
+                    <a:pt x="562755" y="75124"/>
+                  </a:lnTo>
+                  <a:lnTo>
+                    <a:pt x="633100" y="83833"/>
+                  </a:lnTo>
+                  <a:lnTo>
+                    <a:pt x="703444" y="92398"/>
+                  </a:lnTo>
+                  <a:lnTo>
+                    <a:pt x="773789" y="100823"/>
+                  </a:lnTo>
+                  <a:lnTo>
+                    <a:pt x="844133" y="109109"/>
+                  </a:lnTo>
+                  <a:lnTo>
+                    <a:pt x="914478" y="117258"/>
+                  </a:lnTo>
+                  <a:lnTo>
+                    <a:pt x="984822" y="125274"/>
+                  </a:lnTo>
+                  <a:lnTo>
+                    <a:pt x="1055167" y="133158"/>
+                  </a:lnTo>
+                  <a:lnTo>
+                    <a:pt x="1125511" y="140912"/>
+                  </a:lnTo>
+                  <a:lnTo>
+                    <a:pt x="1195856" y="148538"/>
+                  </a:lnTo>
+                  <a:lnTo>
+                    <a:pt x="1266200" y="156039"/>
+                  </a:lnTo>
+                  <a:lnTo>
+                    <a:pt x="1336545" y="163416"/>
+                  </a:lnTo>
+                  <a:lnTo>
+                    <a:pt x="1406889" y="170672"/>
+                  </a:lnTo>
+                  <a:lnTo>
+                    <a:pt x="1477234" y="177809"/>
+                  </a:lnTo>
+                  <a:lnTo>
+                    <a:pt x="1547578" y="184828"/>
+                  </a:lnTo>
+                  <a:lnTo>
+                    <a:pt x="1617923" y="191732"/>
+                  </a:lnTo>
+                  <a:lnTo>
+                    <a:pt x="1688267" y="198523"/>
+                  </a:lnTo>
+                  <a:lnTo>
+                    <a:pt x="1758612" y="205201"/>
+                  </a:lnTo>
+                  <a:lnTo>
+                    <a:pt x="1828956" y="211770"/>
+                  </a:lnTo>
+                  <a:lnTo>
+                    <a:pt x="1899301" y="218230"/>
+                  </a:lnTo>
+                  <a:lnTo>
+                    <a:pt x="1969645" y="224584"/>
+                  </a:lnTo>
+                  <a:lnTo>
+                    <a:pt x="2039990" y="230834"/>
+                  </a:lnTo>
+                  <a:lnTo>
+                    <a:pt x="2110334" y="236981"/>
+                  </a:lnTo>
+                  <a:lnTo>
+                    <a:pt x="2180679" y="243027"/>
+                  </a:lnTo>
+                  <a:lnTo>
+                    <a:pt x="2251023" y="248973"/>
+                  </a:lnTo>
+                  <a:lnTo>
+                    <a:pt x="2321368" y="254822"/>
+                  </a:lnTo>
+                  <a:lnTo>
+                    <a:pt x="2391712" y="260574"/>
+                  </a:lnTo>
+                  <a:lnTo>
+                    <a:pt x="2462057" y="266231"/>
+                  </a:lnTo>
+                  <a:lnTo>
+                    <a:pt x="2532401" y="271796"/>
+                  </a:lnTo>
+                  <a:lnTo>
+                    <a:pt x="2602746" y="277269"/>
+                  </a:lnTo>
+                  <a:lnTo>
+                    <a:pt x="2673090" y="282652"/>
+                  </a:lnTo>
+                  <a:lnTo>
+                    <a:pt x="2743435" y="287946"/>
+                  </a:lnTo>
+                  <a:lnTo>
+                    <a:pt x="2813779" y="293153"/>
+                  </a:lnTo>
+                  <a:lnTo>
+                    <a:pt x="2884124" y="298275"/>
+                  </a:lnTo>
+                  <a:lnTo>
+                    <a:pt x="2954468" y="303312"/>
+                  </a:lnTo>
+                  <a:lnTo>
+                    <a:pt x="3024813" y="308266"/>
+                  </a:lnTo>
+                  <a:lnTo>
+                    <a:pt x="3095157" y="313139"/>
+                  </a:lnTo>
+                  <a:lnTo>
+                    <a:pt x="3165502" y="317932"/>
+                  </a:lnTo>
+                  <a:lnTo>
+                    <a:pt x="3235846" y="322646"/>
+                  </a:lnTo>
+                  <a:lnTo>
+                    <a:pt x="3306191" y="327282"/>
+                  </a:lnTo>
+                  <a:lnTo>
+                    <a:pt x="3376535" y="331842"/>
+                  </a:lnTo>
+                  <a:lnTo>
+                    <a:pt x="3446880" y="336327"/>
+                  </a:lnTo>
+                  <a:lnTo>
+                    <a:pt x="3517224" y="340739"/>
+                  </a:lnTo>
+                  <a:lnTo>
+                    <a:pt x="3587569" y="345077"/>
+                  </a:lnTo>
+                  <a:lnTo>
+                    <a:pt x="3657913" y="349344"/>
+                  </a:lnTo>
+                  <a:lnTo>
+                    <a:pt x="3728257" y="353541"/>
+                  </a:lnTo>
+                  <a:lnTo>
+                    <a:pt x="3798602" y="357669"/>
+                  </a:lnTo>
+                  <a:lnTo>
+                    <a:pt x="3868946" y="361730"/>
+                  </a:lnTo>
+                  <a:lnTo>
+                    <a:pt x="3939291" y="365723"/>
+                  </a:lnTo>
+                  <a:lnTo>
+                    <a:pt x="4009635" y="369650"/>
+                  </a:lnTo>
+                  <a:lnTo>
+                    <a:pt x="4079980" y="373513"/>
+                  </a:lnTo>
+                  <a:lnTo>
+                    <a:pt x="4150324" y="377313"/>
+                  </a:lnTo>
+                  <a:lnTo>
+                    <a:pt x="4220669" y="381050"/>
+                  </a:lnTo>
+                  <a:lnTo>
+                    <a:pt x="4291013" y="384725"/>
+                  </a:lnTo>
+                  <a:lnTo>
+                    <a:pt x="4361358" y="388340"/>
+                  </a:lnTo>
+                  <a:lnTo>
+                    <a:pt x="4431702" y="391895"/>
+                  </a:lnTo>
+                  <a:lnTo>
+                    <a:pt x="4502047" y="395392"/>
+                  </a:lnTo>
+                  <a:lnTo>
+                    <a:pt x="4572391" y="398832"/>
+                  </a:lnTo>
+                  <a:lnTo>
+                    <a:pt x="4642736" y="402215"/>
+                  </a:lnTo>
+                  <a:lnTo>
+                    <a:pt x="4713080" y="405542"/>
+                  </a:lnTo>
+                  <a:lnTo>
+                    <a:pt x="4783425" y="408814"/>
+                  </a:lnTo>
+                  <a:lnTo>
+                    <a:pt x="4853769" y="412033"/>
+                  </a:lnTo>
+                  <a:lnTo>
+                    <a:pt x="4924114" y="415198"/>
+                  </a:lnTo>
+                  <a:lnTo>
+                    <a:pt x="4994458" y="418312"/>
+                  </a:lnTo>
+                  <a:lnTo>
+                    <a:pt x="5064803" y="421374"/>
+                  </a:lnTo>
+                  <a:lnTo>
+                    <a:pt x="5135147" y="424386"/>
+                  </a:lnTo>
+                  <a:lnTo>
+                    <a:pt x="5205492" y="427349"/>
+                  </a:lnTo>
+                  <a:lnTo>
+                    <a:pt x="5275836" y="430262"/>
+                  </a:lnTo>
+                  <a:lnTo>
+                    <a:pt x="5346181" y="433128"/>
+                  </a:lnTo>
+                  <a:lnTo>
+                    <a:pt x="5416525" y="435947"/>
+                  </a:lnTo>
+                  <a:lnTo>
+                    <a:pt x="5486870" y="438719"/>
+                  </a:lnTo>
+                  <a:lnTo>
+                    <a:pt x="5557214" y="441445"/>
+                  </a:lnTo>
+                  <a:lnTo>
+                    <a:pt x="5627559" y="444127"/>
+                  </a:lnTo>
+                  <a:lnTo>
+                    <a:pt x="5697903" y="446765"/>
+                  </a:lnTo>
+                  <a:lnTo>
+                    <a:pt x="5768248" y="449359"/>
+                  </a:lnTo>
+                  <a:lnTo>
+                    <a:pt x="5838592" y="451910"/>
+                  </a:lnTo>
+                  <a:lnTo>
+                    <a:pt x="5908937" y="454420"/>
+                  </a:lnTo>
+                  <a:lnTo>
+                    <a:pt x="5979281" y="456888"/>
+                  </a:lnTo>
+                  <a:lnTo>
+                    <a:pt x="6049626" y="459316"/>
+                  </a:lnTo>
+                  <a:lnTo>
+                    <a:pt x="6119970" y="461703"/>
+                  </a:lnTo>
+                  <a:lnTo>
+                    <a:pt x="6190315" y="464052"/>
+                  </a:lnTo>
+                  <a:lnTo>
+                    <a:pt x="6260659" y="466362"/>
+                  </a:lnTo>
+                  <a:lnTo>
+                    <a:pt x="6331004" y="468633"/>
+                  </a:lnTo>
+                  <a:lnTo>
+                    <a:pt x="6401348" y="470868"/>
+                  </a:lnTo>
+                  <a:lnTo>
+                    <a:pt x="6471693" y="473065"/>
+                  </a:lnTo>
+                  <a:lnTo>
+                    <a:pt x="6542037" y="475227"/>
+                  </a:lnTo>
+                  <a:lnTo>
+                    <a:pt x="6612382" y="477353"/>
+                  </a:lnTo>
+                  <a:lnTo>
+                    <a:pt x="6682726" y="479444"/>
+                  </a:lnTo>
+                  <a:lnTo>
+                    <a:pt x="6753071" y="481500"/>
+                  </a:lnTo>
+                  <a:lnTo>
+                    <a:pt x="6823415" y="483523"/>
+                  </a:lnTo>
+                  <a:lnTo>
+                    <a:pt x="6893760" y="485512"/>
+                  </a:lnTo>
+                  <a:lnTo>
+                    <a:pt x="6964104" y="487469"/>
                   </a:lnTo>
                 </a:path>
               </a:pathLst>
@@ -4654,27 +4689,27 @@
         </p:sp>
         <p:sp>
           <p:nvSpPr>
-            <p:cNvPr id="26" name="pl26"/>
+            <p:cNvPr id="27" name="pl27"/>
             <p:cNvSpPr/>
             <p:nvPr/>
           </p:nvSpPr>
           <p:spPr>
             <a:xfrm>
-              <a:off x="817517" y="4727786"/>
-              <a:ext cx="7799693" cy="0"/>
+              <a:off x="887106" y="3100960"/>
+              <a:ext cx="7660515" cy="0"/>
             </a:xfrm>
             <a:custGeom>
               <a:avLst/>
               <a:pathLst>
-                <a:path w="7799693" h="0">
+                <a:path w="7660515" h="0">
                   <a:moveTo>
                     <a:pt x="0" y="0"/>
                   </a:moveTo>
                   <a:lnTo>
-                    <a:pt x="7799693" y="0"/>
-                  </a:lnTo>
-                  <a:lnTo>
-                    <a:pt x="7799693" y="0"/>
+                    <a:pt x="7660515" y="0"/>
+                  </a:lnTo>
+                  <a:lnTo>
+                    <a:pt x="7660515" y="0"/>
                   </a:lnTo>
                 </a:path>
               </a:pathLst>
@@ -4697,21 +4732,21 @@
         </p:sp>
         <p:sp>
           <p:nvSpPr>
-            <p:cNvPr id="27" name="pl27"/>
+            <p:cNvPr id="28" name="pl28"/>
             <p:cNvSpPr/>
             <p:nvPr/>
           </p:nvSpPr>
           <p:spPr>
             <a:xfrm>
-              <a:off x="4205975" y="2073503"/>
-              <a:ext cx="0" cy="3649639"/>
+              <a:off x="4215100" y="2143092"/>
+              <a:ext cx="0" cy="1317069"/>
             </a:xfrm>
             <a:custGeom>
               <a:avLst/>
               <a:pathLst>
-                <a:path w="0" h="3649639">
+                <a:path w="0" h="1317069">
                   <a:moveTo>
-                    <a:pt x="0" y="3649639"/>
+                    <a:pt x="0" y="1317069"/>
                   </a:moveTo>
                   <a:lnTo>
                     <a:pt x="0" y="0"/>
@@ -4740,21 +4775,21 @@
         </p:sp>
         <p:sp>
           <p:nvSpPr>
-            <p:cNvPr id="28" name="pl28"/>
+            <p:cNvPr id="29" name="pl29"/>
             <p:cNvSpPr/>
             <p:nvPr/>
           </p:nvSpPr>
           <p:spPr>
             <a:xfrm>
-              <a:off x="3016442" y="2073503"/>
-              <a:ext cx="0" cy="3649639"/>
+              <a:off x="3046793" y="2143092"/>
+              <a:ext cx="0" cy="1317069"/>
             </a:xfrm>
             <a:custGeom>
               <a:avLst/>
               <a:pathLst>
-                <a:path w="0" h="3649639">
+                <a:path w="0" h="1317069">
                   <a:moveTo>
-                    <a:pt x="0" y="3649639"/>
+                    <a:pt x="0" y="1317069"/>
                   </a:moveTo>
                   <a:lnTo>
                     <a:pt x="0" y="0"/>
@@ -4783,21 +4818,21 @@
         </p:sp>
         <p:sp>
           <p:nvSpPr>
-            <p:cNvPr id="29" name="pl29"/>
+            <p:cNvPr id="30" name="pl30"/>
             <p:cNvSpPr/>
             <p:nvPr/>
           </p:nvSpPr>
           <p:spPr>
             <a:xfrm>
-              <a:off x="5421760" y="2073503"/>
-              <a:ext cx="0" cy="3649639"/>
+              <a:off x="5409191" y="2143092"/>
+              <a:ext cx="0" cy="1317069"/>
             </a:xfrm>
             <a:custGeom>
               <a:avLst/>
               <a:pathLst>
-                <a:path w="0" h="3649639">
+                <a:path w="0" h="1317069">
                   <a:moveTo>
-                    <a:pt x="0" y="3649639"/>
+                    <a:pt x="0" y="1317069"/>
                   </a:moveTo>
                   <a:lnTo>
                     <a:pt x="0" y="0"/>
@@ -4826,13 +4861,13 @@
         </p:sp>
         <p:sp>
           <p:nvSpPr>
-            <p:cNvPr id="30" name="tx30"/>
+            <p:cNvPr id="31" name="tx31"/>
             <p:cNvSpPr/>
             <p:nvPr/>
           </p:nvSpPr>
           <p:spPr>
             <a:xfrm>
-              <a:off x="692708" y="5517199"/>
+              <a:off x="762297" y="3360243"/>
               <a:ext cx="62179" cy="80101"/>
             </a:xfrm>
             <a:prstGeom prst="rect">
@@ -4872,13 +4907,13 @@
         </p:sp>
         <p:sp>
           <p:nvSpPr>
-            <p:cNvPr id="31" name="tx31"/>
+            <p:cNvPr id="32" name="tx32"/>
             <p:cNvSpPr/>
             <p:nvPr/>
           </p:nvSpPr>
           <p:spPr>
             <a:xfrm>
-              <a:off x="692708" y="4687735"/>
+              <a:off x="762297" y="3060909"/>
               <a:ext cx="62179" cy="80101"/>
             </a:xfrm>
             <a:prstGeom prst="rect">
@@ -4918,13 +4953,13 @@
         </p:sp>
         <p:sp>
           <p:nvSpPr>
-            <p:cNvPr id="32" name="tx32"/>
+            <p:cNvPr id="33" name="tx33"/>
             <p:cNvSpPr/>
             <p:nvPr/>
           </p:nvSpPr>
           <p:spPr>
             <a:xfrm>
-              <a:off x="692708" y="3858272"/>
+              <a:off x="762297" y="2761575"/>
               <a:ext cx="62179" cy="80101"/>
             </a:xfrm>
             <a:prstGeom prst="rect">
@@ -4964,13 +4999,13 @@
         </p:sp>
         <p:sp>
           <p:nvSpPr>
-            <p:cNvPr id="33" name="tx33"/>
+            <p:cNvPr id="34" name="tx34"/>
             <p:cNvSpPr/>
             <p:nvPr/>
           </p:nvSpPr>
           <p:spPr>
             <a:xfrm>
-              <a:off x="692708" y="3028808"/>
+              <a:off x="762297" y="2462242"/>
               <a:ext cx="62179" cy="80101"/>
             </a:xfrm>
             <a:prstGeom prst="rect">
@@ -5010,13 +5045,13 @@
         </p:sp>
         <p:sp>
           <p:nvSpPr>
-            <p:cNvPr id="34" name="tx34"/>
+            <p:cNvPr id="35" name="tx35"/>
             <p:cNvSpPr/>
             <p:nvPr/>
           </p:nvSpPr>
           <p:spPr>
             <a:xfrm>
-              <a:off x="692708" y="2199345"/>
+              <a:off x="762297" y="2162908"/>
               <a:ext cx="62179" cy="80101"/>
             </a:xfrm>
             <a:prstGeom prst="rect">
@@ -5056,13 +5091,13 @@
         </p:sp>
         <p:sp>
           <p:nvSpPr>
-            <p:cNvPr id="35" name="tx35"/>
+            <p:cNvPr id="36" name="tx36"/>
             <p:cNvSpPr/>
             <p:nvPr/>
           </p:nvSpPr>
           <p:spPr>
             <a:xfrm>
-              <a:off x="1977028" y="5785772"/>
+              <a:off x="2024485" y="3522791"/>
               <a:ext cx="161574" cy="80101"/>
             </a:xfrm>
             <a:prstGeom prst="rect">
@@ -5102,13 +5137,13 @@
         </p:sp>
         <p:sp>
           <p:nvSpPr>
-            <p:cNvPr id="36" name="tx36"/>
+            <p:cNvPr id="37" name="tx37"/>
             <p:cNvSpPr/>
             <p:nvPr/>
           </p:nvSpPr>
           <p:spPr>
             <a:xfrm>
-              <a:off x="3728813" y="5785772"/>
+              <a:off x="3745012" y="3522791"/>
               <a:ext cx="161574" cy="80101"/>
             </a:xfrm>
             <a:prstGeom prst="rect">
@@ -5148,13 +5183,13 @@
         </p:sp>
         <p:sp>
           <p:nvSpPr>
-            <p:cNvPr id="37" name="tx37"/>
+            <p:cNvPr id="38" name="tx38"/>
             <p:cNvSpPr/>
             <p:nvPr/>
           </p:nvSpPr>
           <p:spPr>
             <a:xfrm>
-              <a:off x="5530296" y="5785772"/>
+              <a:off x="5515235" y="3522791"/>
               <a:ext cx="62179" cy="80101"/>
             </a:xfrm>
             <a:prstGeom prst="rect">
@@ -5194,13 +5229,13 @@
         </p:sp>
         <p:sp>
           <p:nvSpPr>
-            <p:cNvPr id="38" name="tx38"/>
+            <p:cNvPr id="39" name="tx39"/>
             <p:cNvSpPr/>
             <p:nvPr/>
           </p:nvSpPr>
           <p:spPr>
             <a:xfrm>
-              <a:off x="7250992" y="5785772"/>
+              <a:off x="7204672" y="3522791"/>
               <a:ext cx="124358" cy="80101"/>
             </a:xfrm>
             <a:prstGeom prst="rect">
@@ -5240,13 +5275,13 @@
         </p:sp>
         <p:sp>
           <p:nvSpPr>
-            <p:cNvPr id="39" name="tx39"/>
+            <p:cNvPr id="40" name="tx40"/>
             <p:cNvSpPr/>
             <p:nvPr/>
           </p:nvSpPr>
           <p:spPr>
             <a:xfrm>
-              <a:off x="1561815" y="5925448"/>
+              <a:off x="1561815" y="3662467"/>
               <a:ext cx="6311097" cy="100218"/>
             </a:xfrm>
             <a:prstGeom prst="rect">
@@ -5286,13 +5321,13 @@
         </p:sp>
         <p:sp>
           <p:nvSpPr>
-            <p:cNvPr id="40" name="tx40"/>
+            <p:cNvPr id="41" name="tx41"/>
             <p:cNvSpPr/>
             <p:nvPr/>
           </p:nvSpPr>
           <p:spPr>
             <a:xfrm rot="-5400000">
-              <a:off x="68446" y="3848213"/>
+              <a:off x="138035" y="2751517"/>
               <a:ext cx="1016904" cy="100218"/>
             </a:xfrm>
             <a:prstGeom prst="rect">
@@ -5332,13 +5367,13 @@
         </p:sp>
         <p:sp>
           <p:nvSpPr>
-            <p:cNvPr id="41" name="tx41"/>
+            <p:cNvPr id="42" name="tx42"/>
             <p:cNvSpPr/>
             <p:nvPr/>
           </p:nvSpPr>
           <p:spPr>
             <a:xfrm>
-              <a:off x="817517" y="1896563"/>
+              <a:off x="887106" y="1966152"/>
               <a:ext cx="6959864" cy="82021"/>
             </a:xfrm>
             <a:prstGeom prst="rect">
@@ -5378,13 +5413,3746 @@
         </p:sp>
         <p:sp>
           <p:nvSpPr>
-            <p:cNvPr id="42" name="tx42"/>
+            <p:cNvPr id="43" name="tx43"/>
             <p:cNvSpPr/>
             <p:nvPr/>
           </p:nvSpPr>
           <p:spPr>
             <a:xfrm>
-              <a:off x="817517" y="1669789"/>
+              <a:off x="887106" y="1739378"/>
+              <a:ext cx="1880189" cy="120152"/>
+            </a:xfrm>
+            <a:prstGeom prst="rect">
+              <a:avLst/>
+            </a:prstGeom>
+            <a:noFill/>
+          </p:spPr>
+          <p:txBody>
+            <a:bodyPr lIns="0" rIns="0" tIns="0" bIns="0" anchorCtr="1" anchor="ctr" wrap="none"/>
+            <a:lstStyle/>
+            <a:p>
+              <a:pPr algn="l" marL="0" marR="0" indent="0">
+                <a:lnSpc>
+                  <a:spcPts val="1320"/>
+                </a:lnSpc>
+                <a:spcBef>
+                  <a:spcPts val="0"/>
+                </a:spcBef>
+                <a:spcAft>
+                  <a:spcPts val="0"/>
+                </a:spcAft>
+              </a:pPr>
+              <a:r>
+                <a:rPr sz="1320">
+                  <a:solidFill>
+                    <a:srgbClr val="000000">
+                      <a:alpha val="100000"/>
+                    </a:srgbClr>
+                  </a:solidFill>
+                  <a:latin typeface="Helvetica"/>
+                  <a:cs typeface="Helvetica"/>
+                </a:rPr>
+                <a:t>AKI (KDIGO) (Sensitivity)</a:t>
+              </a:r>
+            </a:p>
+          </p:txBody>
+        </p:sp>
+        <p:sp>
+          <p:nvSpPr>
+            <p:cNvPr id="44" name="pl44"/>
+            <p:cNvSpPr/>
+            <p:nvPr/>
+          </p:nvSpPr>
+          <p:spPr>
+            <a:xfrm>
+              <a:off x="887106" y="5444019"/>
+              <a:ext cx="7660515" cy="0"/>
+            </a:xfrm>
+            <a:custGeom>
+              <a:avLst/>
+              <a:pathLst>
+                <a:path w="7660515" h="0">
+                  <a:moveTo>
+                    <a:pt x="0" y="0"/>
+                  </a:moveTo>
+                  <a:lnTo>
+                    <a:pt x="7660515" y="0"/>
+                  </a:lnTo>
+                  <a:lnTo>
+                    <a:pt x="7660515" y="0"/>
+                  </a:lnTo>
+                </a:path>
+              </a:pathLst>
+            </a:custGeom>
+            <a:ln w="6775" cap="flat">
+              <a:solidFill>
+                <a:srgbClr val="EBEBEB">
+                  <a:alpha val="100000"/>
+                </a:srgbClr>
+              </a:solidFill>
+              <a:prstDash val="solid"/>
+              <a:round/>
+            </a:ln>
+          </p:spPr>
+          <p:txBody>
+            <a:bodyPr/>
+            <a:lstStyle/>
+            <a:p/>
+          </p:txBody>
+        </p:sp>
+        <p:sp>
+          <p:nvSpPr>
+            <p:cNvPr id="45" name="pl45"/>
+            <p:cNvSpPr/>
+            <p:nvPr/>
+          </p:nvSpPr>
+          <p:spPr>
+            <a:xfrm>
+              <a:off x="887106" y="5144686"/>
+              <a:ext cx="7660515" cy="0"/>
+            </a:xfrm>
+            <a:custGeom>
+              <a:avLst/>
+              <a:pathLst>
+                <a:path w="7660515" h="0">
+                  <a:moveTo>
+                    <a:pt x="0" y="0"/>
+                  </a:moveTo>
+                  <a:lnTo>
+                    <a:pt x="7660515" y="0"/>
+                  </a:lnTo>
+                  <a:lnTo>
+                    <a:pt x="7660515" y="0"/>
+                  </a:lnTo>
+                </a:path>
+              </a:pathLst>
+            </a:custGeom>
+            <a:ln w="6775" cap="flat">
+              <a:solidFill>
+                <a:srgbClr val="EBEBEB">
+                  <a:alpha val="100000"/>
+                </a:srgbClr>
+              </a:solidFill>
+              <a:prstDash val="solid"/>
+              <a:round/>
+            </a:ln>
+          </p:spPr>
+          <p:txBody>
+            <a:bodyPr/>
+            <a:lstStyle/>
+            <a:p/>
+          </p:txBody>
+        </p:sp>
+        <p:sp>
+          <p:nvSpPr>
+            <p:cNvPr id="46" name="pl46"/>
+            <p:cNvSpPr/>
+            <p:nvPr/>
+          </p:nvSpPr>
+          <p:spPr>
+            <a:xfrm>
+              <a:off x="887106" y="4845352"/>
+              <a:ext cx="7660515" cy="0"/>
+            </a:xfrm>
+            <a:custGeom>
+              <a:avLst/>
+              <a:pathLst>
+                <a:path w="7660515" h="0">
+                  <a:moveTo>
+                    <a:pt x="0" y="0"/>
+                  </a:moveTo>
+                  <a:lnTo>
+                    <a:pt x="7660515" y="0"/>
+                  </a:lnTo>
+                  <a:lnTo>
+                    <a:pt x="7660515" y="0"/>
+                  </a:lnTo>
+                </a:path>
+              </a:pathLst>
+            </a:custGeom>
+            <a:ln w="6775" cap="flat">
+              <a:solidFill>
+                <a:srgbClr val="EBEBEB">
+                  <a:alpha val="100000"/>
+                </a:srgbClr>
+              </a:solidFill>
+              <a:prstDash val="solid"/>
+              <a:round/>
+            </a:ln>
+          </p:spPr>
+          <p:txBody>
+            <a:bodyPr/>
+            <a:lstStyle/>
+            <a:p/>
+          </p:txBody>
+        </p:sp>
+        <p:sp>
+          <p:nvSpPr>
+            <p:cNvPr id="47" name="pl47"/>
+            <p:cNvSpPr/>
+            <p:nvPr/>
+          </p:nvSpPr>
+          <p:spPr>
+            <a:xfrm>
+              <a:off x="887106" y="4546018"/>
+              <a:ext cx="7660515" cy="0"/>
+            </a:xfrm>
+            <a:custGeom>
+              <a:avLst/>
+              <a:pathLst>
+                <a:path w="7660515" h="0">
+                  <a:moveTo>
+                    <a:pt x="0" y="0"/>
+                  </a:moveTo>
+                  <a:lnTo>
+                    <a:pt x="7660515" y="0"/>
+                  </a:lnTo>
+                  <a:lnTo>
+                    <a:pt x="7660515" y="0"/>
+                  </a:lnTo>
+                </a:path>
+              </a:pathLst>
+            </a:custGeom>
+            <a:ln w="6775" cap="flat">
+              <a:solidFill>
+                <a:srgbClr val="EBEBEB">
+                  <a:alpha val="100000"/>
+                </a:srgbClr>
+              </a:solidFill>
+              <a:prstDash val="solid"/>
+              <a:round/>
+            </a:ln>
+          </p:spPr>
+          <p:txBody>
+            <a:bodyPr/>
+            <a:lstStyle/>
+            <a:p/>
+          </p:txBody>
+        </p:sp>
+        <p:sp>
+          <p:nvSpPr>
+            <p:cNvPr id="48" name="pl48"/>
+            <p:cNvSpPr/>
+            <p:nvPr/>
+          </p:nvSpPr>
+          <p:spPr>
+            <a:xfrm>
+              <a:off x="1675141" y="4336484"/>
+              <a:ext cx="0" cy="1317069"/>
+            </a:xfrm>
+            <a:custGeom>
+              <a:avLst/>
+              <a:pathLst>
+                <a:path w="0" h="1317069">
+                  <a:moveTo>
+                    <a:pt x="0" y="1317069"/>
+                  </a:moveTo>
+                  <a:lnTo>
+                    <a:pt x="0" y="0"/>
+                  </a:lnTo>
+                  <a:lnTo>
+                    <a:pt x="0" y="0"/>
+                  </a:lnTo>
+                </a:path>
+              </a:pathLst>
+            </a:custGeom>
+            <a:ln w="6775" cap="flat">
+              <a:solidFill>
+                <a:srgbClr val="EBEBEB">
+                  <a:alpha val="100000"/>
+                </a:srgbClr>
+              </a:solidFill>
+              <a:prstDash val="solid"/>
+              <a:round/>
+            </a:ln>
+          </p:spPr>
+          <p:txBody>
+            <a:bodyPr/>
+            <a:lstStyle/>
+            <a:p/>
+          </p:txBody>
+        </p:sp>
+        <p:sp>
+          <p:nvSpPr>
+            <p:cNvPr id="49" name="pl49"/>
+            <p:cNvSpPr/>
+            <p:nvPr/>
+          </p:nvSpPr>
+          <p:spPr>
+            <a:xfrm>
+              <a:off x="2535404" y="4336484"/>
+              <a:ext cx="0" cy="1317069"/>
+            </a:xfrm>
+            <a:custGeom>
+              <a:avLst/>
+              <a:pathLst>
+                <a:path w="0" h="1317069">
+                  <a:moveTo>
+                    <a:pt x="0" y="1317069"/>
+                  </a:moveTo>
+                  <a:lnTo>
+                    <a:pt x="0" y="0"/>
+                  </a:lnTo>
+                  <a:lnTo>
+                    <a:pt x="0" y="0"/>
+                  </a:lnTo>
+                </a:path>
+              </a:pathLst>
+            </a:custGeom>
+            <a:ln w="6775" cap="flat">
+              <a:solidFill>
+                <a:srgbClr val="EBEBEB">
+                  <a:alpha val="100000"/>
+                </a:srgbClr>
+              </a:solidFill>
+              <a:prstDash val="solid"/>
+              <a:round/>
+            </a:ln>
+          </p:spPr>
+          <p:txBody>
+            <a:bodyPr/>
+            <a:lstStyle/>
+            <a:p/>
+          </p:txBody>
+        </p:sp>
+        <p:sp>
+          <p:nvSpPr>
+            <p:cNvPr id="50" name="pl50"/>
+            <p:cNvSpPr/>
+            <p:nvPr/>
+          </p:nvSpPr>
+          <p:spPr>
+            <a:xfrm>
+              <a:off x="3395667" y="4336484"/>
+              <a:ext cx="0" cy="1317069"/>
+            </a:xfrm>
+            <a:custGeom>
+              <a:avLst/>
+              <a:pathLst>
+                <a:path w="0" h="1317069">
+                  <a:moveTo>
+                    <a:pt x="0" y="1317069"/>
+                  </a:moveTo>
+                  <a:lnTo>
+                    <a:pt x="0" y="0"/>
+                  </a:lnTo>
+                  <a:lnTo>
+                    <a:pt x="0" y="0"/>
+                  </a:lnTo>
+                </a:path>
+              </a:pathLst>
+            </a:custGeom>
+            <a:ln w="6775" cap="flat">
+              <a:solidFill>
+                <a:srgbClr val="EBEBEB">
+                  <a:alpha val="100000"/>
+                </a:srgbClr>
+              </a:solidFill>
+              <a:prstDash val="solid"/>
+              <a:round/>
+            </a:ln>
+          </p:spPr>
+          <p:txBody>
+            <a:bodyPr/>
+            <a:lstStyle/>
+            <a:p/>
+          </p:txBody>
+        </p:sp>
+        <p:sp>
+          <p:nvSpPr>
+            <p:cNvPr id="51" name="pl51"/>
+            <p:cNvSpPr/>
+            <p:nvPr/>
+          </p:nvSpPr>
+          <p:spPr>
+            <a:xfrm>
+              <a:off x="4255930" y="4336484"/>
+              <a:ext cx="0" cy="1317069"/>
+            </a:xfrm>
+            <a:custGeom>
+              <a:avLst/>
+              <a:pathLst>
+                <a:path w="0" h="1317069">
+                  <a:moveTo>
+                    <a:pt x="0" y="1317069"/>
+                  </a:moveTo>
+                  <a:lnTo>
+                    <a:pt x="0" y="0"/>
+                  </a:lnTo>
+                  <a:lnTo>
+                    <a:pt x="0" y="0"/>
+                  </a:lnTo>
+                </a:path>
+              </a:pathLst>
+            </a:custGeom>
+            <a:ln w="6775" cap="flat">
+              <a:solidFill>
+                <a:srgbClr val="EBEBEB">
+                  <a:alpha val="100000"/>
+                </a:srgbClr>
+              </a:solidFill>
+              <a:prstDash val="solid"/>
+              <a:round/>
+            </a:ln>
+          </p:spPr>
+          <p:txBody>
+            <a:bodyPr/>
+            <a:lstStyle/>
+            <a:p/>
+          </p:txBody>
+        </p:sp>
+        <p:sp>
+          <p:nvSpPr>
+            <p:cNvPr id="52" name="pl52"/>
+            <p:cNvSpPr/>
+            <p:nvPr/>
+          </p:nvSpPr>
+          <p:spPr>
+            <a:xfrm>
+              <a:off x="5116193" y="4336484"/>
+              <a:ext cx="0" cy="1317069"/>
+            </a:xfrm>
+            <a:custGeom>
+              <a:avLst/>
+              <a:pathLst>
+                <a:path w="0" h="1317069">
+                  <a:moveTo>
+                    <a:pt x="0" y="1317069"/>
+                  </a:moveTo>
+                  <a:lnTo>
+                    <a:pt x="0" y="0"/>
+                  </a:lnTo>
+                  <a:lnTo>
+                    <a:pt x="0" y="0"/>
+                  </a:lnTo>
+                </a:path>
+              </a:pathLst>
+            </a:custGeom>
+            <a:ln w="6775" cap="flat">
+              <a:solidFill>
+                <a:srgbClr val="EBEBEB">
+                  <a:alpha val="100000"/>
+                </a:srgbClr>
+              </a:solidFill>
+              <a:prstDash val="solid"/>
+              <a:round/>
+            </a:ln>
+          </p:spPr>
+          <p:txBody>
+            <a:bodyPr/>
+            <a:lstStyle/>
+            <a:p/>
+          </p:txBody>
+        </p:sp>
+        <p:sp>
+          <p:nvSpPr>
+            <p:cNvPr id="53" name="pl53"/>
+            <p:cNvSpPr/>
+            <p:nvPr/>
+          </p:nvSpPr>
+          <p:spPr>
+            <a:xfrm>
+              <a:off x="5976457" y="4336484"/>
+              <a:ext cx="0" cy="1317069"/>
+            </a:xfrm>
+            <a:custGeom>
+              <a:avLst/>
+              <a:pathLst>
+                <a:path w="0" h="1317069">
+                  <a:moveTo>
+                    <a:pt x="0" y="1317069"/>
+                  </a:moveTo>
+                  <a:lnTo>
+                    <a:pt x="0" y="0"/>
+                  </a:lnTo>
+                  <a:lnTo>
+                    <a:pt x="0" y="0"/>
+                  </a:lnTo>
+                </a:path>
+              </a:pathLst>
+            </a:custGeom>
+            <a:ln w="6775" cap="flat">
+              <a:solidFill>
+                <a:srgbClr val="EBEBEB">
+                  <a:alpha val="100000"/>
+                </a:srgbClr>
+              </a:solidFill>
+              <a:prstDash val="solid"/>
+              <a:round/>
+            </a:ln>
+          </p:spPr>
+          <p:txBody>
+            <a:bodyPr/>
+            <a:lstStyle/>
+            <a:p/>
+          </p:txBody>
+        </p:sp>
+        <p:sp>
+          <p:nvSpPr>
+            <p:cNvPr id="54" name="pl54"/>
+            <p:cNvSpPr/>
+            <p:nvPr/>
+          </p:nvSpPr>
+          <p:spPr>
+            <a:xfrm>
+              <a:off x="6836720" y="4336484"/>
+              <a:ext cx="0" cy="1317069"/>
+            </a:xfrm>
+            <a:custGeom>
+              <a:avLst/>
+              <a:pathLst>
+                <a:path w="0" h="1317069">
+                  <a:moveTo>
+                    <a:pt x="0" y="1317069"/>
+                  </a:moveTo>
+                  <a:lnTo>
+                    <a:pt x="0" y="0"/>
+                  </a:lnTo>
+                  <a:lnTo>
+                    <a:pt x="0" y="0"/>
+                  </a:lnTo>
+                </a:path>
+              </a:pathLst>
+            </a:custGeom>
+            <a:ln w="6775" cap="flat">
+              <a:solidFill>
+                <a:srgbClr val="EBEBEB">
+                  <a:alpha val="100000"/>
+                </a:srgbClr>
+              </a:solidFill>
+              <a:prstDash val="solid"/>
+              <a:round/>
+            </a:ln>
+          </p:spPr>
+          <p:txBody>
+            <a:bodyPr/>
+            <a:lstStyle/>
+            <a:p/>
+          </p:txBody>
+        </p:sp>
+        <p:sp>
+          <p:nvSpPr>
+            <p:cNvPr id="55" name="pl55"/>
+            <p:cNvSpPr/>
+            <p:nvPr/>
+          </p:nvSpPr>
+          <p:spPr>
+            <a:xfrm>
+              <a:off x="7696983" y="4336484"/>
+              <a:ext cx="0" cy="1317069"/>
+            </a:xfrm>
+            <a:custGeom>
+              <a:avLst/>
+              <a:pathLst>
+                <a:path w="0" h="1317069">
+                  <a:moveTo>
+                    <a:pt x="0" y="1317069"/>
+                  </a:moveTo>
+                  <a:lnTo>
+                    <a:pt x="0" y="0"/>
+                  </a:lnTo>
+                  <a:lnTo>
+                    <a:pt x="0" y="0"/>
+                  </a:lnTo>
+                </a:path>
+              </a:pathLst>
+            </a:custGeom>
+            <a:ln w="6775" cap="flat">
+              <a:solidFill>
+                <a:srgbClr val="EBEBEB">
+                  <a:alpha val="100000"/>
+                </a:srgbClr>
+              </a:solidFill>
+              <a:prstDash val="solid"/>
+              <a:round/>
+            </a:ln>
+          </p:spPr>
+          <p:txBody>
+            <a:bodyPr/>
+            <a:lstStyle/>
+            <a:p/>
+          </p:txBody>
+        </p:sp>
+        <p:sp>
+          <p:nvSpPr>
+            <p:cNvPr id="56" name="pl56"/>
+            <p:cNvSpPr/>
+            <p:nvPr/>
+          </p:nvSpPr>
+          <p:spPr>
+            <a:xfrm>
+              <a:off x="887106" y="5593686"/>
+              <a:ext cx="7660515" cy="0"/>
+            </a:xfrm>
+            <a:custGeom>
+              <a:avLst/>
+              <a:pathLst>
+                <a:path w="7660515" h="0">
+                  <a:moveTo>
+                    <a:pt x="0" y="0"/>
+                  </a:moveTo>
+                  <a:lnTo>
+                    <a:pt x="7660515" y="0"/>
+                  </a:lnTo>
+                  <a:lnTo>
+                    <a:pt x="7660515" y="0"/>
+                  </a:lnTo>
+                </a:path>
+              </a:pathLst>
+            </a:custGeom>
+            <a:ln w="13550" cap="flat">
+              <a:solidFill>
+                <a:srgbClr val="EBEBEB">
+                  <a:alpha val="100000"/>
+                </a:srgbClr>
+              </a:solidFill>
+              <a:prstDash val="solid"/>
+              <a:round/>
+            </a:ln>
+          </p:spPr>
+          <p:txBody>
+            <a:bodyPr/>
+            <a:lstStyle/>
+            <a:p/>
+          </p:txBody>
+        </p:sp>
+        <p:sp>
+          <p:nvSpPr>
+            <p:cNvPr id="57" name="pl57"/>
+            <p:cNvSpPr/>
+            <p:nvPr/>
+          </p:nvSpPr>
+          <p:spPr>
+            <a:xfrm>
+              <a:off x="887106" y="5294352"/>
+              <a:ext cx="7660515" cy="0"/>
+            </a:xfrm>
+            <a:custGeom>
+              <a:avLst/>
+              <a:pathLst>
+                <a:path w="7660515" h="0">
+                  <a:moveTo>
+                    <a:pt x="0" y="0"/>
+                  </a:moveTo>
+                  <a:lnTo>
+                    <a:pt x="7660515" y="0"/>
+                  </a:lnTo>
+                  <a:lnTo>
+                    <a:pt x="7660515" y="0"/>
+                  </a:lnTo>
+                </a:path>
+              </a:pathLst>
+            </a:custGeom>
+            <a:ln w="13550" cap="flat">
+              <a:solidFill>
+                <a:srgbClr val="EBEBEB">
+                  <a:alpha val="100000"/>
+                </a:srgbClr>
+              </a:solidFill>
+              <a:prstDash val="solid"/>
+              <a:round/>
+            </a:ln>
+          </p:spPr>
+          <p:txBody>
+            <a:bodyPr/>
+            <a:lstStyle/>
+            <a:p/>
+          </p:txBody>
+        </p:sp>
+        <p:sp>
+          <p:nvSpPr>
+            <p:cNvPr id="58" name="pl58"/>
+            <p:cNvSpPr/>
+            <p:nvPr/>
+          </p:nvSpPr>
+          <p:spPr>
+            <a:xfrm>
+              <a:off x="887106" y="4995019"/>
+              <a:ext cx="7660515" cy="0"/>
+            </a:xfrm>
+            <a:custGeom>
+              <a:avLst/>
+              <a:pathLst>
+                <a:path w="7660515" h="0">
+                  <a:moveTo>
+                    <a:pt x="0" y="0"/>
+                  </a:moveTo>
+                  <a:lnTo>
+                    <a:pt x="7660515" y="0"/>
+                  </a:lnTo>
+                  <a:lnTo>
+                    <a:pt x="7660515" y="0"/>
+                  </a:lnTo>
+                </a:path>
+              </a:pathLst>
+            </a:custGeom>
+            <a:ln w="13550" cap="flat">
+              <a:solidFill>
+                <a:srgbClr val="EBEBEB">
+                  <a:alpha val="100000"/>
+                </a:srgbClr>
+              </a:solidFill>
+              <a:prstDash val="solid"/>
+              <a:round/>
+            </a:ln>
+          </p:spPr>
+          <p:txBody>
+            <a:bodyPr/>
+            <a:lstStyle/>
+            <a:p/>
+          </p:txBody>
+        </p:sp>
+        <p:sp>
+          <p:nvSpPr>
+            <p:cNvPr id="59" name="pl59"/>
+            <p:cNvSpPr/>
+            <p:nvPr/>
+          </p:nvSpPr>
+          <p:spPr>
+            <a:xfrm>
+              <a:off x="887106" y="4695685"/>
+              <a:ext cx="7660515" cy="0"/>
+            </a:xfrm>
+            <a:custGeom>
+              <a:avLst/>
+              <a:pathLst>
+                <a:path w="7660515" h="0">
+                  <a:moveTo>
+                    <a:pt x="0" y="0"/>
+                  </a:moveTo>
+                  <a:lnTo>
+                    <a:pt x="7660515" y="0"/>
+                  </a:lnTo>
+                  <a:lnTo>
+                    <a:pt x="7660515" y="0"/>
+                  </a:lnTo>
+                </a:path>
+              </a:pathLst>
+            </a:custGeom>
+            <a:ln w="13550" cap="flat">
+              <a:solidFill>
+                <a:srgbClr val="EBEBEB">
+                  <a:alpha val="100000"/>
+                </a:srgbClr>
+              </a:solidFill>
+              <a:prstDash val="solid"/>
+              <a:round/>
+            </a:ln>
+          </p:spPr>
+          <p:txBody>
+            <a:bodyPr/>
+            <a:lstStyle/>
+            <a:p/>
+          </p:txBody>
+        </p:sp>
+        <p:sp>
+          <p:nvSpPr>
+            <p:cNvPr id="60" name="pl60"/>
+            <p:cNvSpPr/>
+            <p:nvPr/>
+          </p:nvSpPr>
+          <p:spPr>
+            <a:xfrm>
+              <a:off x="887106" y="4396351"/>
+              <a:ext cx="7660515" cy="0"/>
+            </a:xfrm>
+            <a:custGeom>
+              <a:avLst/>
+              <a:pathLst>
+                <a:path w="7660515" h="0">
+                  <a:moveTo>
+                    <a:pt x="0" y="0"/>
+                  </a:moveTo>
+                  <a:lnTo>
+                    <a:pt x="7660515" y="0"/>
+                  </a:lnTo>
+                  <a:lnTo>
+                    <a:pt x="7660515" y="0"/>
+                  </a:lnTo>
+                </a:path>
+              </a:pathLst>
+            </a:custGeom>
+            <a:ln w="13550" cap="flat">
+              <a:solidFill>
+                <a:srgbClr val="EBEBEB">
+                  <a:alpha val="100000"/>
+                </a:srgbClr>
+              </a:solidFill>
+              <a:prstDash val="solid"/>
+              <a:round/>
+            </a:ln>
+          </p:spPr>
+          <p:txBody>
+            <a:bodyPr/>
+            <a:lstStyle/>
+            <a:p/>
+          </p:txBody>
+        </p:sp>
+        <p:sp>
+          <p:nvSpPr>
+            <p:cNvPr id="61" name="pl61"/>
+            <p:cNvSpPr/>
+            <p:nvPr/>
+          </p:nvSpPr>
+          <p:spPr>
+            <a:xfrm>
+              <a:off x="1245010" y="4336484"/>
+              <a:ext cx="0" cy="1317069"/>
+            </a:xfrm>
+            <a:custGeom>
+              <a:avLst/>
+              <a:pathLst>
+                <a:path w="0" h="1317069">
+                  <a:moveTo>
+                    <a:pt x="0" y="1317069"/>
+                  </a:moveTo>
+                  <a:lnTo>
+                    <a:pt x="0" y="0"/>
+                  </a:lnTo>
+                  <a:lnTo>
+                    <a:pt x="0" y="0"/>
+                  </a:lnTo>
+                </a:path>
+              </a:pathLst>
+            </a:custGeom>
+            <a:ln w="13550" cap="flat">
+              <a:solidFill>
+                <a:srgbClr val="EBEBEB">
+                  <a:alpha val="100000"/>
+                </a:srgbClr>
+              </a:solidFill>
+              <a:prstDash val="solid"/>
+              <a:round/>
+            </a:ln>
+          </p:spPr>
+          <p:txBody>
+            <a:bodyPr/>
+            <a:lstStyle/>
+            <a:p/>
+          </p:txBody>
+        </p:sp>
+        <p:sp>
+          <p:nvSpPr>
+            <p:cNvPr id="62" name="pl62"/>
+            <p:cNvSpPr/>
+            <p:nvPr/>
+          </p:nvSpPr>
+          <p:spPr>
+            <a:xfrm>
+              <a:off x="2105273" y="4336484"/>
+              <a:ext cx="0" cy="1317069"/>
+            </a:xfrm>
+            <a:custGeom>
+              <a:avLst/>
+              <a:pathLst>
+                <a:path w="0" h="1317069">
+                  <a:moveTo>
+                    <a:pt x="0" y="1317069"/>
+                  </a:moveTo>
+                  <a:lnTo>
+                    <a:pt x="0" y="0"/>
+                  </a:lnTo>
+                  <a:lnTo>
+                    <a:pt x="0" y="0"/>
+                  </a:lnTo>
+                </a:path>
+              </a:pathLst>
+            </a:custGeom>
+            <a:ln w="13550" cap="flat">
+              <a:solidFill>
+                <a:srgbClr val="EBEBEB">
+                  <a:alpha val="100000"/>
+                </a:srgbClr>
+              </a:solidFill>
+              <a:prstDash val="solid"/>
+              <a:round/>
+            </a:ln>
+          </p:spPr>
+          <p:txBody>
+            <a:bodyPr/>
+            <a:lstStyle/>
+            <a:p/>
+          </p:txBody>
+        </p:sp>
+        <p:sp>
+          <p:nvSpPr>
+            <p:cNvPr id="63" name="pl63"/>
+            <p:cNvSpPr/>
+            <p:nvPr/>
+          </p:nvSpPr>
+          <p:spPr>
+            <a:xfrm>
+              <a:off x="2965536" y="4336484"/>
+              <a:ext cx="0" cy="1317069"/>
+            </a:xfrm>
+            <a:custGeom>
+              <a:avLst/>
+              <a:pathLst>
+                <a:path w="0" h="1317069">
+                  <a:moveTo>
+                    <a:pt x="0" y="1317069"/>
+                  </a:moveTo>
+                  <a:lnTo>
+                    <a:pt x="0" y="0"/>
+                  </a:lnTo>
+                  <a:lnTo>
+                    <a:pt x="0" y="0"/>
+                  </a:lnTo>
+                </a:path>
+              </a:pathLst>
+            </a:custGeom>
+            <a:ln w="13550" cap="flat">
+              <a:solidFill>
+                <a:srgbClr val="EBEBEB">
+                  <a:alpha val="100000"/>
+                </a:srgbClr>
+              </a:solidFill>
+              <a:prstDash val="solid"/>
+              <a:round/>
+            </a:ln>
+          </p:spPr>
+          <p:txBody>
+            <a:bodyPr/>
+            <a:lstStyle/>
+            <a:p/>
+          </p:txBody>
+        </p:sp>
+        <p:sp>
+          <p:nvSpPr>
+            <p:cNvPr id="64" name="pl64"/>
+            <p:cNvSpPr/>
+            <p:nvPr/>
+          </p:nvSpPr>
+          <p:spPr>
+            <a:xfrm>
+              <a:off x="3825799" y="4336484"/>
+              <a:ext cx="0" cy="1317069"/>
+            </a:xfrm>
+            <a:custGeom>
+              <a:avLst/>
+              <a:pathLst>
+                <a:path w="0" h="1317069">
+                  <a:moveTo>
+                    <a:pt x="0" y="1317069"/>
+                  </a:moveTo>
+                  <a:lnTo>
+                    <a:pt x="0" y="0"/>
+                  </a:lnTo>
+                  <a:lnTo>
+                    <a:pt x="0" y="0"/>
+                  </a:lnTo>
+                </a:path>
+              </a:pathLst>
+            </a:custGeom>
+            <a:ln w="13550" cap="flat">
+              <a:solidFill>
+                <a:srgbClr val="EBEBEB">
+                  <a:alpha val="100000"/>
+                </a:srgbClr>
+              </a:solidFill>
+              <a:prstDash val="solid"/>
+              <a:round/>
+            </a:ln>
+          </p:spPr>
+          <p:txBody>
+            <a:bodyPr/>
+            <a:lstStyle/>
+            <a:p/>
+          </p:txBody>
+        </p:sp>
+        <p:sp>
+          <p:nvSpPr>
+            <p:cNvPr id="65" name="pl65"/>
+            <p:cNvSpPr/>
+            <p:nvPr/>
+          </p:nvSpPr>
+          <p:spPr>
+            <a:xfrm>
+              <a:off x="4686062" y="4336484"/>
+              <a:ext cx="0" cy="1317069"/>
+            </a:xfrm>
+            <a:custGeom>
+              <a:avLst/>
+              <a:pathLst>
+                <a:path w="0" h="1317069">
+                  <a:moveTo>
+                    <a:pt x="0" y="1317069"/>
+                  </a:moveTo>
+                  <a:lnTo>
+                    <a:pt x="0" y="0"/>
+                  </a:lnTo>
+                  <a:lnTo>
+                    <a:pt x="0" y="0"/>
+                  </a:lnTo>
+                </a:path>
+              </a:pathLst>
+            </a:custGeom>
+            <a:ln w="13550" cap="flat">
+              <a:solidFill>
+                <a:srgbClr val="EBEBEB">
+                  <a:alpha val="100000"/>
+                </a:srgbClr>
+              </a:solidFill>
+              <a:prstDash val="solid"/>
+              <a:round/>
+            </a:ln>
+          </p:spPr>
+          <p:txBody>
+            <a:bodyPr/>
+            <a:lstStyle/>
+            <a:p/>
+          </p:txBody>
+        </p:sp>
+        <p:sp>
+          <p:nvSpPr>
+            <p:cNvPr id="66" name="pl66"/>
+            <p:cNvSpPr/>
+            <p:nvPr/>
+          </p:nvSpPr>
+          <p:spPr>
+            <a:xfrm>
+              <a:off x="5546325" y="4336484"/>
+              <a:ext cx="0" cy="1317069"/>
+            </a:xfrm>
+            <a:custGeom>
+              <a:avLst/>
+              <a:pathLst>
+                <a:path w="0" h="1317069">
+                  <a:moveTo>
+                    <a:pt x="0" y="1317069"/>
+                  </a:moveTo>
+                  <a:lnTo>
+                    <a:pt x="0" y="0"/>
+                  </a:lnTo>
+                  <a:lnTo>
+                    <a:pt x="0" y="0"/>
+                  </a:lnTo>
+                </a:path>
+              </a:pathLst>
+            </a:custGeom>
+            <a:ln w="13550" cap="flat">
+              <a:solidFill>
+                <a:srgbClr val="EBEBEB">
+                  <a:alpha val="100000"/>
+                </a:srgbClr>
+              </a:solidFill>
+              <a:prstDash val="solid"/>
+              <a:round/>
+            </a:ln>
+          </p:spPr>
+          <p:txBody>
+            <a:bodyPr/>
+            <a:lstStyle/>
+            <a:p/>
+          </p:txBody>
+        </p:sp>
+        <p:sp>
+          <p:nvSpPr>
+            <p:cNvPr id="67" name="pl67"/>
+            <p:cNvSpPr/>
+            <p:nvPr/>
+          </p:nvSpPr>
+          <p:spPr>
+            <a:xfrm>
+              <a:off x="6406588" y="4336484"/>
+              <a:ext cx="0" cy="1317069"/>
+            </a:xfrm>
+            <a:custGeom>
+              <a:avLst/>
+              <a:pathLst>
+                <a:path w="0" h="1317069">
+                  <a:moveTo>
+                    <a:pt x="0" y="1317069"/>
+                  </a:moveTo>
+                  <a:lnTo>
+                    <a:pt x="0" y="0"/>
+                  </a:lnTo>
+                  <a:lnTo>
+                    <a:pt x="0" y="0"/>
+                  </a:lnTo>
+                </a:path>
+              </a:pathLst>
+            </a:custGeom>
+            <a:ln w="13550" cap="flat">
+              <a:solidFill>
+                <a:srgbClr val="EBEBEB">
+                  <a:alpha val="100000"/>
+                </a:srgbClr>
+              </a:solidFill>
+              <a:prstDash val="solid"/>
+              <a:round/>
+            </a:ln>
+          </p:spPr>
+          <p:txBody>
+            <a:bodyPr/>
+            <a:lstStyle/>
+            <a:p/>
+          </p:txBody>
+        </p:sp>
+        <p:sp>
+          <p:nvSpPr>
+            <p:cNvPr id="68" name="pl68"/>
+            <p:cNvSpPr/>
+            <p:nvPr/>
+          </p:nvSpPr>
+          <p:spPr>
+            <a:xfrm>
+              <a:off x="7266851" y="4336484"/>
+              <a:ext cx="0" cy="1317069"/>
+            </a:xfrm>
+            <a:custGeom>
+              <a:avLst/>
+              <a:pathLst>
+                <a:path w="0" h="1317069">
+                  <a:moveTo>
+                    <a:pt x="0" y="1317069"/>
+                  </a:moveTo>
+                  <a:lnTo>
+                    <a:pt x="0" y="0"/>
+                  </a:lnTo>
+                  <a:lnTo>
+                    <a:pt x="0" y="0"/>
+                  </a:lnTo>
+                </a:path>
+              </a:pathLst>
+            </a:custGeom>
+            <a:ln w="13550" cap="flat">
+              <a:solidFill>
+                <a:srgbClr val="EBEBEB">
+                  <a:alpha val="100000"/>
+                </a:srgbClr>
+              </a:solidFill>
+              <a:prstDash val="solid"/>
+              <a:round/>
+            </a:ln>
+          </p:spPr>
+          <p:txBody>
+            <a:bodyPr/>
+            <a:lstStyle/>
+            <a:p/>
+          </p:txBody>
+        </p:sp>
+        <p:sp>
+          <p:nvSpPr>
+            <p:cNvPr id="69" name="pl69"/>
+            <p:cNvSpPr/>
+            <p:nvPr/>
+          </p:nvSpPr>
+          <p:spPr>
+            <a:xfrm>
+              <a:off x="8127114" y="4336484"/>
+              <a:ext cx="0" cy="1317069"/>
+            </a:xfrm>
+            <a:custGeom>
+              <a:avLst/>
+              <a:pathLst>
+                <a:path w="0" h="1317069">
+                  <a:moveTo>
+                    <a:pt x="0" y="1317069"/>
+                  </a:moveTo>
+                  <a:lnTo>
+                    <a:pt x="0" y="0"/>
+                  </a:lnTo>
+                  <a:lnTo>
+                    <a:pt x="0" y="0"/>
+                  </a:lnTo>
+                </a:path>
+              </a:pathLst>
+            </a:custGeom>
+            <a:ln w="13550" cap="flat">
+              <a:solidFill>
+                <a:srgbClr val="EBEBEB">
+                  <a:alpha val="100000"/>
+                </a:srgbClr>
+              </a:solidFill>
+              <a:prstDash val="solid"/>
+              <a:round/>
+            </a:ln>
+          </p:spPr>
+          <p:txBody>
+            <a:bodyPr/>
+            <a:lstStyle/>
+            <a:p/>
+          </p:txBody>
+        </p:sp>
+        <p:sp>
+          <p:nvSpPr>
+            <p:cNvPr id="70" name="pg70"/>
+            <p:cNvSpPr/>
+            <p:nvPr/>
+          </p:nvSpPr>
+          <p:spPr>
+            <a:xfrm>
+              <a:off x="1235312" y="4649190"/>
+              <a:ext cx="6964104" cy="880097"/>
+            </a:xfrm>
+            <a:custGeom>
+              <a:avLst/>
+              <a:pathLst>
+                <a:path w="6964104" h="880097">
+                  <a:moveTo>
+                    <a:pt x="0" y="0"/>
+                  </a:moveTo>
+                  <a:lnTo>
+                    <a:pt x="70344" y="25276"/>
+                  </a:lnTo>
+                  <a:lnTo>
+                    <a:pt x="140688" y="49877"/>
+                  </a:lnTo>
+                  <a:lnTo>
+                    <a:pt x="211033" y="73819"/>
+                  </a:lnTo>
+                  <a:lnTo>
+                    <a:pt x="281377" y="97120"/>
+                  </a:lnTo>
+                  <a:lnTo>
+                    <a:pt x="351722" y="119798"/>
+                  </a:lnTo>
+                  <a:lnTo>
+                    <a:pt x="422066" y="141868"/>
+                  </a:lnTo>
+                  <a:lnTo>
+                    <a:pt x="492411" y="163348"/>
+                  </a:lnTo>
+                  <a:lnTo>
+                    <a:pt x="562755" y="184254"/>
+                  </a:lnTo>
+                  <a:lnTo>
+                    <a:pt x="633100" y="204599"/>
+                  </a:lnTo>
+                  <a:lnTo>
+                    <a:pt x="703444" y="224401"/>
+                  </a:lnTo>
+                  <a:lnTo>
+                    <a:pt x="773789" y="243672"/>
+                  </a:lnTo>
+                  <a:lnTo>
+                    <a:pt x="844133" y="262428"/>
+                  </a:lnTo>
+                  <a:lnTo>
+                    <a:pt x="914478" y="280681"/>
+                  </a:lnTo>
+                  <a:lnTo>
+                    <a:pt x="984822" y="298446"/>
+                  </a:lnTo>
+                  <a:lnTo>
+                    <a:pt x="1055167" y="315736"/>
+                  </a:lnTo>
+                  <a:lnTo>
+                    <a:pt x="1125511" y="332563"/>
+                  </a:lnTo>
+                  <a:lnTo>
+                    <a:pt x="1195856" y="348940"/>
+                  </a:lnTo>
+                  <a:lnTo>
+                    <a:pt x="1266200" y="364878"/>
+                  </a:lnTo>
+                  <a:lnTo>
+                    <a:pt x="1336545" y="380390"/>
+                  </a:lnTo>
+                  <a:lnTo>
+                    <a:pt x="1406889" y="395487"/>
+                  </a:lnTo>
+                  <a:lnTo>
+                    <a:pt x="1477234" y="410179"/>
+                  </a:lnTo>
+                  <a:lnTo>
+                    <a:pt x="1547578" y="424479"/>
+                  </a:lnTo>
+                  <a:lnTo>
+                    <a:pt x="1617923" y="438396"/>
+                  </a:lnTo>
+                  <a:lnTo>
+                    <a:pt x="1688267" y="451940"/>
+                  </a:lnTo>
+                  <a:lnTo>
+                    <a:pt x="1758612" y="465122"/>
+                  </a:lnTo>
+                  <a:lnTo>
+                    <a:pt x="1828956" y="477951"/>
+                  </a:lnTo>
+                  <a:lnTo>
+                    <a:pt x="1899301" y="490437"/>
+                  </a:lnTo>
+                  <a:lnTo>
+                    <a:pt x="1969645" y="502588"/>
+                  </a:lnTo>
+                  <a:lnTo>
+                    <a:pt x="2039990" y="514415"/>
+                  </a:lnTo>
+                  <a:lnTo>
+                    <a:pt x="2110334" y="525925"/>
+                  </a:lnTo>
+                  <a:lnTo>
+                    <a:pt x="2180679" y="537127"/>
+                  </a:lnTo>
+                  <a:lnTo>
+                    <a:pt x="2251023" y="548029"/>
+                  </a:lnTo>
+                  <a:lnTo>
+                    <a:pt x="2321368" y="558639"/>
+                  </a:lnTo>
+                  <a:lnTo>
+                    <a:pt x="2391712" y="568966"/>
+                  </a:lnTo>
+                  <a:lnTo>
+                    <a:pt x="2462057" y="579016"/>
+                  </a:lnTo>
+                  <a:lnTo>
+                    <a:pt x="2532401" y="588797"/>
+                  </a:lnTo>
+                  <a:lnTo>
+                    <a:pt x="2602746" y="598316"/>
+                  </a:lnTo>
+                  <a:lnTo>
+                    <a:pt x="2673090" y="607580"/>
+                  </a:lnTo>
+                  <a:lnTo>
+                    <a:pt x="2743435" y="616597"/>
+                  </a:lnTo>
+                  <a:lnTo>
+                    <a:pt x="2813779" y="625372"/>
+                  </a:lnTo>
+                  <a:lnTo>
+                    <a:pt x="2884124" y="633913"/>
+                  </a:lnTo>
+                  <a:lnTo>
+                    <a:pt x="2954468" y="642225"/>
+                  </a:lnTo>
+                  <a:lnTo>
+                    <a:pt x="3024813" y="646319"/>
+                  </a:lnTo>
+                  <a:lnTo>
+                    <a:pt x="3095157" y="648118"/>
+                  </a:lnTo>
+                  <a:lnTo>
+                    <a:pt x="3165502" y="649907"/>
+                  </a:lnTo>
+                  <a:lnTo>
+                    <a:pt x="3235846" y="651685"/>
+                  </a:lnTo>
+                  <a:lnTo>
+                    <a:pt x="3306191" y="653451"/>
+                  </a:lnTo>
+                  <a:lnTo>
+                    <a:pt x="3376535" y="655208"/>
+                  </a:lnTo>
+                  <a:lnTo>
+                    <a:pt x="3446880" y="656953"/>
+                  </a:lnTo>
+                  <a:lnTo>
+                    <a:pt x="3517224" y="658689"/>
+                  </a:lnTo>
+                  <a:lnTo>
+                    <a:pt x="3587569" y="660413"/>
+                  </a:lnTo>
+                  <a:lnTo>
+                    <a:pt x="3657913" y="662127"/>
+                  </a:lnTo>
+                  <a:lnTo>
+                    <a:pt x="3728257" y="663831"/>
+                  </a:lnTo>
+                  <a:lnTo>
+                    <a:pt x="3798602" y="665525"/>
+                  </a:lnTo>
+                  <a:lnTo>
+                    <a:pt x="3868946" y="667208"/>
+                  </a:lnTo>
+                  <a:lnTo>
+                    <a:pt x="3939291" y="668882"/>
+                  </a:lnTo>
+                  <a:lnTo>
+                    <a:pt x="4009635" y="670545"/>
+                  </a:lnTo>
+                  <a:lnTo>
+                    <a:pt x="4079980" y="672198"/>
+                  </a:lnTo>
+                  <a:lnTo>
+                    <a:pt x="4150324" y="673841"/>
+                  </a:lnTo>
+                  <a:lnTo>
+                    <a:pt x="4220669" y="675474"/>
+                  </a:lnTo>
+                  <a:lnTo>
+                    <a:pt x="4291013" y="677098"/>
+                  </a:lnTo>
+                  <a:lnTo>
+                    <a:pt x="4361358" y="678711"/>
+                  </a:lnTo>
+                  <a:lnTo>
+                    <a:pt x="4431702" y="680315"/>
+                  </a:lnTo>
+                  <a:lnTo>
+                    <a:pt x="4502047" y="681909"/>
+                  </a:lnTo>
+                  <a:lnTo>
+                    <a:pt x="4572391" y="683494"/>
+                  </a:lnTo>
+                  <a:lnTo>
+                    <a:pt x="4642736" y="685069"/>
+                  </a:lnTo>
+                  <a:lnTo>
+                    <a:pt x="4713080" y="686634"/>
+                  </a:lnTo>
+                  <a:lnTo>
+                    <a:pt x="4783425" y="688190"/>
+                  </a:lnTo>
+                  <a:lnTo>
+                    <a:pt x="4853769" y="689737"/>
+                  </a:lnTo>
+                  <a:lnTo>
+                    <a:pt x="4924114" y="691274"/>
+                  </a:lnTo>
+                  <a:lnTo>
+                    <a:pt x="4994458" y="692802"/>
+                  </a:lnTo>
+                  <a:lnTo>
+                    <a:pt x="5064803" y="694321"/>
+                  </a:lnTo>
+                  <a:lnTo>
+                    <a:pt x="5135147" y="695831"/>
+                  </a:lnTo>
+                  <a:lnTo>
+                    <a:pt x="5205492" y="697331"/>
+                  </a:lnTo>
+                  <a:lnTo>
+                    <a:pt x="5275836" y="698823"/>
+                  </a:lnTo>
+                  <a:lnTo>
+                    <a:pt x="5346181" y="700305"/>
+                  </a:lnTo>
+                  <a:lnTo>
+                    <a:pt x="5416525" y="701779"/>
+                  </a:lnTo>
+                  <a:lnTo>
+                    <a:pt x="5486870" y="703244"/>
+                  </a:lnTo>
+                  <a:lnTo>
+                    <a:pt x="5557214" y="704699"/>
+                  </a:lnTo>
+                  <a:lnTo>
+                    <a:pt x="5627559" y="706146"/>
+                  </a:lnTo>
+                  <a:lnTo>
+                    <a:pt x="5697903" y="707585"/>
+                  </a:lnTo>
+                  <a:lnTo>
+                    <a:pt x="5768248" y="709014"/>
+                  </a:lnTo>
+                  <a:lnTo>
+                    <a:pt x="5838592" y="710435"/>
+                  </a:lnTo>
+                  <a:lnTo>
+                    <a:pt x="5908937" y="711848"/>
+                  </a:lnTo>
+                  <a:lnTo>
+                    <a:pt x="5979281" y="713252"/>
+                  </a:lnTo>
+                  <a:lnTo>
+                    <a:pt x="6049626" y="714647"/>
+                  </a:lnTo>
+                  <a:lnTo>
+                    <a:pt x="6119970" y="716034"/>
+                  </a:lnTo>
+                  <a:lnTo>
+                    <a:pt x="6190315" y="717413"/>
+                  </a:lnTo>
+                  <a:lnTo>
+                    <a:pt x="6260659" y="718783"/>
+                  </a:lnTo>
+                  <a:lnTo>
+                    <a:pt x="6331004" y="720145"/>
+                  </a:lnTo>
+                  <a:lnTo>
+                    <a:pt x="6401348" y="721499"/>
+                  </a:lnTo>
+                  <a:lnTo>
+                    <a:pt x="6471693" y="722845"/>
+                  </a:lnTo>
+                  <a:lnTo>
+                    <a:pt x="6542037" y="724182"/>
+                  </a:lnTo>
+                  <a:lnTo>
+                    <a:pt x="6612382" y="725512"/>
+                  </a:lnTo>
+                  <a:lnTo>
+                    <a:pt x="6682726" y="726833"/>
+                  </a:lnTo>
+                  <a:lnTo>
+                    <a:pt x="6753071" y="728146"/>
+                  </a:lnTo>
+                  <a:lnTo>
+                    <a:pt x="6823415" y="729452"/>
+                  </a:lnTo>
+                  <a:lnTo>
+                    <a:pt x="6893760" y="730750"/>
+                  </a:lnTo>
+                  <a:lnTo>
+                    <a:pt x="6964104" y="732039"/>
+                  </a:lnTo>
+                  <a:lnTo>
+                    <a:pt x="6964104" y="880097"/>
+                  </a:lnTo>
+                  <a:lnTo>
+                    <a:pt x="6893760" y="878326"/>
+                  </a:lnTo>
+                  <a:lnTo>
+                    <a:pt x="6823415" y="876506"/>
+                  </a:lnTo>
+                  <a:lnTo>
+                    <a:pt x="6753071" y="874637"/>
+                  </a:lnTo>
+                  <a:lnTo>
+                    <a:pt x="6682726" y="872716"/>
+                  </a:lnTo>
+                  <a:lnTo>
+                    <a:pt x="6612382" y="870742"/>
+                  </a:lnTo>
+                  <a:lnTo>
+                    <a:pt x="6542037" y="868714"/>
+                  </a:lnTo>
+                  <a:lnTo>
+                    <a:pt x="6471693" y="866630"/>
+                  </a:lnTo>
+                  <a:lnTo>
+                    <a:pt x="6401348" y="864489"/>
+                  </a:lnTo>
+                  <a:lnTo>
+                    <a:pt x="6331004" y="862289"/>
+                  </a:lnTo>
+                  <a:lnTo>
+                    <a:pt x="6260659" y="860028"/>
+                  </a:lnTo>
+                  <a:lnTo>
+                    <a:pt x="6190315" y="857706"/>
+                  </a:lnTo>
+                  <a:lnTo>
+                    <a:pt x="6119970" y="855319"/>
+                  </a:lnTo>
+                  <a:lnTo>
+                    <a:pt x="6049626" y="852867"/>
+                  </a:lnTo>
+                  <a:lnTo>
+                    <a:pt x="5979281" y="850347"/>
+                  </a:lnTo>
+                  <a:lnTo>
+                    <a:pt x="5908937" y="847759"/>
+                  </a:lnTo>
+                  <a:lnTo>
+                    <a:pt x="5838592" y="845098"/>
+                  </a:lnTo>
+                  <a:lnTo>
+                    <a:pt x="5768248" y="842365"/>
+                  </a:lnTo>
+                  <a:lnTo>
+                    <a:pt x="5697903" y="839557"/>
+                  </a:lnTo>
+                  <a:lnTo>
+                    <a:pt x="5627559" y="836671"/>
+                  </a:lnTo>
+                  <a:lnTo>
+                    <a:pt x="5557214" y="833706"/>
+                  </a:lnTo>
+                  <a:lnTo>
+                    <a:pt x="5486870" y="830660"/>
+                  </a:lnTo>
+                  <a:lnTo>
+                    <a:pt x="5416525" y="827529"/>
+                  </a:lnTo>
+                  <a:lnTo>
+                    <a:pt x="5346181" y="824313"/>
+                  </a:lnTo>
+                  <a:lnTo>
+                    <a:pt x="5275836" y="821008"/>
+                  </a:lnTo>
+                  <a:lnTo>
+                    <a:pt x="5205492" y="817613"/>
+                  </a:lnTo>
+                  <a:lnTo>
+                    <a:pt x="5135147" y="814124"/>
+                  </a:lnTo>
+                  <a:lnTo>
+                    <a:pt x="5064803" y="810539"/>
+                  </a:lnTo>
+                  <a:lnTo>
+                    <a:pt x="4994458" y="806855"/>
+                  </a:lnTo>
+                  <a:lnTo>
+                    <a:pt x="4924114" y="803070"/>
+                  </a:lnTo>
+                  <a:lnTo>
+                    <a:pt x="4853769" y="799181"/>
+                  </a:lnTo>
+                  <a:lnTo>
+                    <a:pt x="4783425" y="795185"/>
+                  </a:lnTo>
+                  <a:lnTo>
+                    <a:pt x="4713080" y="791080"/>
+                  </a:lnTo>
+                  <a:lnTo>
+                    <a:pt x="4642736" y="786861"/>
+                  </a:lnTo>
+                  <a:lnTo>
+                    <a:pt x="4572391" y="782526"/>
+                  </a:lnTo>
+                  <a:lnTo>
+                    <a:pt x="4502047" y="778073"/>
+                  </a:lnTo>
+                  <a:lnTo>
+                    <a:pt x="4431702" y="773496"/>
+                  </a:lnTo>
+                  <a:lnTo>
+                    <a:pt x="4361358" y="768794"/>
+                  </a:lnTo>
+                  <a:lnTo>
+                    <a:pt x="4291013" y="763963"/>
+                  </a:lnTo>
+                  <a:lnTo>
+                    <a:pt x="4220669" y="758998"/>
+                  </a:lnTo>
+                  <a:lnTo>
+                    <a:pt x="4150324" y="753897"/>
+                  </a:lnTo>
+                  <a:lnTo>
+                    <a:pt x="4079980" y="748656"/>
+                  </a:lnTo>
+                  <a:lnTo>
+                    <a:pt x="4009635" y="743271"/>
+                  </a:lnTo>
+                  <a:lnTo>
+                    <a:pt x="3939291" y="737738"/>
+                  </a:lnTo>
+                  <a:lnTo>
+                    <a:pt x="3868946" y="732052"/>
+                  </a:lnTo>
+                  <a:lnTo>
+                    <a:pt x="3798602" y="726211"/>
+                  </a:lnTo>
+                  <a:lnTo>
+                    <a:pt x="3728257" y="720208"/>
+                  </a:lnTo>
+                  <a:lnTo>
+                    <a:pt x="3657913" y="714041"/>
+                  </a:lnTo>
+                  <a:lnTo>
+                    <a:pt x="3587569" y="707704"/>
+                  </a:lnTo>
+                  <a:lnTo>
+                    <a:pt x="3517224" y="701192"/>
+                  </a:lnTo>
+                  <a:lnTo>
+                    <a:pt x="3446880" y="694502"/>
+                  </a:lnTo>
+                  <a:lnTo>
+                    <a:pt x="3376535" y="687627"/>
+                  </a:lnTo>
+                  <a:lnTo>
+                    <a:pt x="3306191" y="680564"/>
+                  </a:lnTo>
+                  <a:lnTo>
+                    <a:pt x="3235846" y="673306"/>
+                  </a:lnTo>
+                  <a:lnTo>
+                    <a:pt x="3165502" y="665849"/>
+                  </a:lnTo>
+                  <a:lnTo>
+                    <a:pt x="3095157" y="658187"/>
+                  </a:lnTo>
+                  <a:lnTo>
+                    <a:pt x="3024813" y="650314"/>
+                  </a:lnTo>
+                  <a:lnTo>
+                    <a:pt x="2954468" y="644509"/>
+                  </a:lnTo>
+                  <a:lnTo>
+                    <a:pt x="2884124" y="642688"/>
+                  </a:lnTo>
+                  <a:lnTo>
+                    <a:pt x="2813779" y="640855"/>
+                  </a:lnTo>
+                  <a:lnTo>
+                    <a:pt x="2743435" y="639012"/>
+                  </a:lnTo>
+                  <a:lnTo>
+                    <a:pt x="2673090" y="637157"/>
+                  </a:lnTo>
+                  <a:lnTo>
+                    <a:pt x="2602746" y="635291"/>
+                  </a:lnTo>
+                  <a:lnTo>
+                    <a:pt x="2532401" y="633414"/>
+                  </a:lnTo>
+                  <a:lnTo>
+                    <a:pt x="2462057" y="631526"/>
+                  </a:lnTo>
+                  <a:lnTo>
+                    <a:pt x="2391712" y="629626"/>
+                  </a:lnTo>
+                  <a:lnTo>
+                    <a:pt x="2321368" y="627714"/>
+                  </a:lnTo>
+                  <a:lnTo>
+                    <a:pt x="2251023" y="625791"/>
+                  </a:lnTo>
+                  <a:lnTo>
+                    <a:pt x="2180679" y="623856"/>
+                  </a:lnTo>
+                  <a:lnTo>
+                    <a:pt x="2110334" y="621909"/>
+                  </a:lnTo>
+                  <a:lnTo>
+                    <a:pt x="2039990" y="619951"/>
+                  </a:lnTo>
+                  <a:lnTo>
+                    <a:pt x="1969645" y="617981"/>
+                  </a:lnTo>
+                  <a:lnTo>
+                    <a:pt x="1899301" y="615998"/>
+                  </a:lnTo>
+                  <a:lnTo>
+                    <a:pt x="1828956" y="614004"/>
+                  </a:lnTo>
+                  <a:lnTo>
+                    <a:pt x="1758612" y="611998"/>
+                  </a:lnTo>
+                  <a:lnTo>
+                    <a:pt x="1688267" y="609979"/>
+                  </a:lnTo>
+                  <a:lnTo>
+                    <a:pt x="1617923" y="607948"/>
+                  </a:lnTo>
+                  <a:lnTo>
+                    <a:pt x="1547578" y="605905"/>
+                  </a:lnTo>
+                  <a:lnTo>
+                    <a:pt x="1477234" y="603849"/>
+                  </a:lnTo>
+                  <a:lnTo>
+                    <a:pt x="1406889" y="601781"/>
+                  </a:lnTo>
+                  <a:lnTo>
+                    <a:pt x="1336545" y="599701"/>
+                  </a:lnTo>
+                  <a:lnTo>
+                    <a:pt x="1266200" y="597607"/>
+                  </a:lnTo>
+                  <a:lnTo>
+                    <a:pt x="1195856" y="595501"/>
+                  </a:lnTo>
+                  <a:lnTo>
+                    <a:pt x="1125511" y="593383"/>
+                  </a:lnTo>
+                  <a:lnTo>
+                    <a:pt x="1055167" y="591251"/>
+                  </a:lnTo>
+                  <a:lnTo>
+                    <a:pt x="984822" y="589106"/>
+                  </a:lnTo>
+                  <a:lnTo>
+                    <a:pt x="914478" y="586949"/>
+                  </a:lnTo>
+                  <a:lnTo>
+                    <a:pt x="844133" y="584778"/>
+                  </a:lnTo>
+                  <a:lnTo>
+                    <a:pt x="773789" y="582594"/>
+                  </a:lnTo>
+                  <a:lnTo>
+                    <a:pt x="703444" y="580397"/>
+                  </a:lnTo>
+                  <a:lnTo>
+                    <a:pt x="633100" y="578187"/>
+                  </a:lnTo>
+                  <a:lnTo>
+                    <a:pt x="562755" y="575963"/>
+                  </a:lnTo>
+                  <a:lnTo>
+                    <a:pt x="492411" y="573726"/>
+                  </a:lnTo>
+                  <a:lnTo>
+                    <a:pt x="422066" y="571475"/>
+                  </a:lnTo>
+                  <a:lnTo>
+                    <a:pt x="351722" y="569210"/>
+                  </a:lnTo>
+                  <a:lnTo>
+                    <a:pt x="281377" y="566932"/>
+                  </a:lnTo>
+                  <a:lnTo>
+                    <a:pt x="211033" y="564639"/>
+                  </a:lnTo>
+                  <a:lnTo>
+                    <a:pt x="140688" y="562333"/>
+                  </a:lnTo>
+                  <a:lnTo>
+                    <a:pt x="70344" y="560013"/>
+                  </a:lnTo>
+                  <a:lnTo>
+                    <a:pt x="0" y="557679"/>
+                  </a:lnTo>
+                  <a:close/>
+                </a:path>
+              </a:pathLst>
+            </a:custGeom>
+            <a:solidFill>
+              <a:srgbClr val="FF8C00">
+                <a:alpha val="20000"/>
+              </a:srgbClr>
+            </a:solidFill>
+          </p:spPr>
+          <p:txBody>
+            <a:bodyPr/>
+            <a:lstStyle/>
+            <a:p/>
+          </p:txBody>
+        </p:sp>
+        <p:sp>
+          <p:nvSpPr>
+            <p:cNvPr id="71" name="pl71"/>
+            <p:cNvSpPr/>
+            <p:nvPr/>
+          </p:nvSpPr>
+          <p:spPr>
+            <a:xfrm>
+              <a:off x="1235312" y="4649190"/>
+              <a:ext cx="6964104" cy="732039"/>
+            </a:xfrm>
+            <a:custGeom>
+              <a:avLst/>
+              <a:pathLst>
+                <a:path w="6964104" h="732039">
+                  <a:moveTo>
+                    <a:pt x="0" y="0"/>
+                  </a:moveTo>
+                  <a:lnTo>
+                    <a:pt x="70344" y="25276"/>
+                  </a:lnTo>
+                  <a:lnTo>
+                    <a:pt x="140688" y="49877"/>
+                  </a:lnTo>
+                  <a:lnTo>
+                    <a:pt x="211033" y="73819"/>
+                  </a:lnTo>
+                  <a:lnTo>
+                    <a:pt x="281377" y="97120"/>
+                  </a:lnTo>
+                  <a:lnTo>
+                    <a:pt x="351722" y="119798"/>
+                  </a:lnTo>
+                  <a:lnTo>
+                    <a:pt x="422066" y="141868"/>
+                  </a:lnTo>
+                  <a:lnTo>
+                    <a:pt x="492411" y="163348"/>
+                  </a:lnTo>
+                  <a:lnTo>
+                    <a:pt x="562755" y="184254"/>
+                  </a:lnTo>
+                  <a:lnTo>
+                    <a:pt x="633100" y="204599"/>
+                  </a:lnTo>
+                  <a:lnTo>
+                    <a:pt x="703444" y="224401"/>
+                  </a:lnTo>
+                  <a:lnTo>
+                    <a:pt x="773789" y="243672"/>
+                  </a:lnTo>
+                  <a:lnTo>
+                    <a:pt x="844133" y="262428"/>
+                  </a:lnTo>
+                  <a:lnTo>
+                    <a:pt x="914478" y="280681"/>
+                  </a:lnTo>
+                  <a:lnTo>
+                    <a:pt x="984822" y="298446"/>
+                  </a:lnTo>
+                  <a:lnTo>
+                    <a:pt x="1055167" y="315736"/>
+                  </a:lnTo>
+                  <a:lnTo>
+                    <a:pt x="1125511" y="332563"/>
+                  </a:lnTo>
+                  <a:lnTo>
+                    <a:pt x="1195856" y="348940"/>
+                  </a:lnTo>
+                  <a:lnTo>
+                    <a:pt x="1266200" y="364878"/>
+                  </a:lnTo>
+                  <a:lnTo>
+                    <a:pt x="1336545" y="380390"/>
+                  </a:lnTo>
+                  <a:lnTo>
+                    <a:pt x="1406889" y="395487"/>
+                  </a:lnTo>
+                  <a:lnTo>
+                    <a:pt x="1477234" y="410179"/>
+                  </a:lnTo>
+                  <a:lnTo>
+                    <a:pt x="1547578" y="424479"/>
+                  </a:lnTo>
+                  <a:lnTo>
+                    <a:pt x="1617923" y="438396"/>
+                  </a:lnTo>
+                  <a:lnTo>
+                    <a:pt x="1688267" y="451940"/>
+                  </a:lnTo>
+                  <a:lnTo>
+                    <a:pt x="1758612" y="465122"/>
+                  </a:lnTo>
+                  <a:lnTo>
+                    <a:pt x="1828956" y="477951"/>
+                  </a:lnTo>
+                  <a:lnTo>
+                    <a:pt x="1899301" y="490437"/>
+                  </a:lnTo>
+                  <a:lnTo>
+                    <a:pt x="1969645" y="502588"/>
+                  </a:lnTo>
+                  <a:lnTo>
+                    <a:pt x="2039990" y="514415"/>
+                  </a:lnTo>
+                  <a:lnTo>
+                    <a:pt x="2110334" y="525925"/>
+                  </a:lnTo>
+                  <a:lnTo>
+                    <a:pt x="2180679" y="537127"/>
+                  </a:lnTo>
+                  <a:lnTo>
+                    <a:pt x="2251023" y="548029"/>
+                  </a:lnTo>
+                  <a:lnTo>
+                    <a:pt x="2321368" y="558639"/>
+                  </a:lnTo>
+                  <a:lnTo>
+                    <a:pt x="2391712" y="568966"/>
+                  </a:lnTo>
+                  <a:lnTo>
+                    <a:pt x="2462057" y="579016"/>
+                  </a:lnTo>
+                  <a:lnTo>
+                    <a:pt x="2532401" y="588797"/>
+                  </a:lnTo>
+                  <a:lnTo>
+                    <a:pt x="2602746" y="598316"/>
+                  </a:lnTo>
+                  <a:lnTo>
+                    <a:pt x="2673090" y="607580"/>
+                  </a:lnTo>
+                  <a:lnTo>
+                    <a:pt x="2743435" y="616597"/>
+                  </a:lnTo>
+                  <a:lnTo>
+                    <a:pt x="2813779" y="625372"/>
+                  </a:lnTo>
+                  <a:lnTo>
+                    <a:pt x="2884124" y="633913"/>
+                  </a:lnTo>
+                  <a:lnTo>
+                    <a:pt x="2954468" y="642225"/>
+                  </a:lnTo>
+                  <a:lnTo>
+                    <a:pt x="3024813" y="646319"/>
+                  </a:lnTo>
+                  <a:lnTo>
+                    <a:pt x="3095157" y="648118"/>
+                  </a:lnTo>
+                  <a:lnTo>
+                    <a:pt x="3165502" y="649907"/>
+                  </a:lnTo>
+                  <a:lnTo>
+                    <a:pt x="3235846" y="651685"/>
+                  </a:lnTo>
+                  <a:lnTo>
+                    <a:pt x="3306191" y="653451"/>
+                  </a:lnTo>
+                  <a:lnTo>
+                    <a:pt x="3376535" y="655208"/>
+                  </a:lnTo>
+                  <a:lnTo>
+                    <a:pt x="3446880" y="656953"/>
+                  </a:lnTo>
+                  <a:lnTo>
+                    <a:pt x="3517224" y="658689"/>
+                  </a:lnTo>
+                  <a:lnTo>
+                    <a:pt x="3587569" y="660413"/>
+                  </a:lnTo>
+                  <a:lnTo>
+                    <a:pt x="3657913" y="662127"/>
+                  </a:lnTo>
+                  <a:lnTo>
+                    <a:pt x="3728257" y="663831"/>
+                  </a:lnTo>
+                  <a:lnTo>
+                    <a:pt x="3798602" y="665525"/>
+                  </a:lnTo>
+                  <a:lnTo>
+                    <a:pt x="3868946" y="667208"/>
+                  </a:lnTo>
+                  <a:lnTo>
+                    <a:pt x="3939291" y="668882"/>
+                  </a:lnTo>
+                  <a:lnTo>
+                    <a:pt x="4009635" y="670545"/>
+                  </a:lnTo>
+                  <a:lnTo>
+                    <a:pt x="4079980" y="672198"/>
+                  </a:lnTo>
+                  <a:lnTo>
+                    <a:pt x="4150324" y="673841"/>
+                  </a:lnTo>
+                  <a:lnTo>
+                    <a:pt x="4220669" y="675474"/>
+                  </a:lnTo>
+                  <a:lnTo>
+                    <a:pt x="4291013" y="677098"/>
+                  </a:lnTo>
+                  <a:lnTo>
+                    <a:pt x="4361358" y="678711"/>
+                  </a:lnTo>
+                  <a:lnTo>
+                    <a:pt x="4431702" y="680315"/>
+                  </a:lnTo>
+                  <a:lnTo>
+                    <a:pt x="4502047" y="681909"/>
+                  </a:lnTo>
+                  <a:lnTo>
+                    <a:pt x="4572391" y="683494"/>
+                  </a:lnTo>
+                  <a:lnTo>
+                    <a:pt x="4642736" y="685069"/>
+                  </a:lnTo>
+                  <a:lnTo>
+                    <a:pt x="4713080" y="686634"/>
+                  </a:lnTo>
+                  <a:lnTo>
+                    <a:pt x="4783425" y="688190"/>
+                  </a:lnTo>
+                  <a:lnTo>
+                    <a:pt x="4853769" y="689737"/>
+                  </a:lnTo>
+                  <a:lnTo>
+                    <a:pt x="4924114" y="691274"/>
+                  </a:lnTo>
+                  <a:lnTo>
+                    <a:pt x="4994458" y="692802"/>
+                  </a:lnTo>
+                  <a:lnTo>
+                    <a:pt x="5064803" y="694321"/>
+                  </a:lnTo>
+                  <a:lnTo>
+                    <a:pt x="5135147" y="695831"/>
+                  </a:lnTo>
+                  <a:lnTo>
+                    <a:pt x="5205492" y="697331"/>
+                  </a:lnTo>
+                  <a:lnTo>
+                    <a:pt x="5275836" y="698823"/>
+                  </a:lnTo>
+                  <a:lnTo>
+                    <a:pt x="5346181" y="700305"/>
+                  </a:lnTo>
+                  <a:lnTo>
+                    <a:pt x="5416525" y="701779"/>
+                  </a:lnTo>
+                  <a:lnTo>
+                    <a:pt x="5486870" y="703244"/>
+                  </a:lnTo>
+                  <a:lnTo>
+                    <a:pt x="5557214" y="704699"/>
+                  </a:lnTo>
+                  <a:lnTo>
+                    <a:pt x="5627559" y="706146"/>
+                  </a:lnTo>
+                  <a:lnTo>
+                    <a:pt x="5697903" y="707585"/>
+                  </a:lnTo>
+                  <a:lnTo>
+                    <a:pt x="5768248" y="709014"/>
+                  </a:lnTo>
+                  <a:lnTo>
+                    <a:pt x="5838592" y="710435"/>
+                  </a:lnTo>
+                  <a:lnTo>
+                    <a:pt x="5908937" y="711848"/>
+                  </a:lnTo>
+                  <a:lnTo>
+                    <a:pt x="5979281" y="713252"/>
+                  </a:lnTo>
+                  <a:lnTo>
+                    <a:pt x="6049626" y="714647"/>
+                  </a:lnTo>
+                  <a:lnTo>
+                    <a:pt x="6119970" y="716034"/>
+                  </a:lnTo>
+                  <a:lnTo>
+                    <a:pt x="6190315" y="717413"/>
+                  </a:lnTo>
+                  <a:lnTo>
+                    <a:pt x="6260659" y="718783"/>
+                  </a:lnTo>
+                  <a:lnTo>
+                    <a:pt x="6331004" y="720145"/>
+                  </a:lnTo>
+                  <a:lnTo>
+                    <a:pt x="6401348" y="721499"/>
+                  </a:lnTo>
+                  <a:lnTo>
+                    <a:pt x="6471693" y="722845"/>
+                  </a:lnTo>
+                  <a:lnTo>
+                    <a:pt x="6542037" y="724182"/>
+                  </a:lnTo>
+                  <a:lnTo>
+                    <a:pt x="6612382" y="725512"/>
+                  </a:lnTo>
+                  <a:lnTo>
+                    <a:pt x="6682726" y="726833"/>
+                  </a:lnTo>
+                  <a:lnTo>
+                    <a:pt x="6753071" y="728146"/>
+                  </a:lnTo>
+                  <a:lnTo>
+                    <a:pt x="6823415" y="729452"/>
+                  </a:lnTo>
+                  <a:lnTo>
+                    <a:pt x="6893760" y="730750"/>
+                  </a:lnTo>
+                  <a:lnTo>
+                    <a:pt x="6964104" y="732039"/>
+                  </a:lnTo>
+                </a:path>
+              </a:pathLst>
+            </a:custGeom>
+          </p:spPr>
+          <p:txBody>
+            <a:bodyPr/>
+            <a:lstStyle/>
+            <a:p/>
+          </p:txBody>
+        </p:sp>
+        <p:sp>
+          <p:nvSpPr>
+            <p:cNvPr id="72" name="pl72"/>
+            <p:cNvSpPr/>
+            <p:nvPr/>
+          </p:nvSpPr>
+          <p:spPr>
+            <a:xfrm>
+              <a:off x="1235312" y="5206870"/>
+              <a:ext cx="6964104" cy="322417"/>
+            </a:xfrm>
+            <a:custGeom>
+              <a:avLst/>
+              <a:pathLst>
+                <a:path w="6964104" h="322417">
+                  <a:moveTo>
+                    <a:pt x="6964104" y="322417"/>
+                  </a:moveTo>
+                  <a:lnTo>
+                    <a:pt x="6893760" y="320647"/>
+                  </a:lnTo>
+                  <a:lnTo>
+                    <a:pt x="6823415" y="318827"/>
+                  </a:lnTo>
+                  <a:lnTo>
+                    <a:pt x="6753071" y="316958"/>
+                  </a:lnTo>
+                  <a:lnTo>
+                    <a:pt x="6682726" y="315037"/>
+                  </a:lnTo>
+                  <a:lnTo>
+                    <a:pt x="6612382" y="313063"/>
+                  </a:lnTo>
+                  <a:lnTo>
+                    <a:pt x="6542037" y="311035"/>
+                  </a:lnTo>
+                  <a:lnTo>
+                    <a:pt x="6471693" y="308951"/>
+                  </a:lnTo>
+                  <a:lnTo>
+                    <a:pt x="6401348" y="306810"/>
+                  </a:lnTo>
+                  <a:lnTo>
+                    <a:pt x="6331004" y="304610"/>
+                  </a:lnTo>
+                  <a:lnTo>
+                    <a:pt x="6260659" y="302349"/>
+                  </a:lnTo>
+                  <a:lnTo>
+                    <a:pt x="6190315" y="300026"/>
+                  </a:lnTo>
+                  <a:lnTo>
+                    <a:pt x="6119970" y="297640"/>
+                  </a:lnTo>
+                  <a:lnTo>
+                    <a:pt x="6049626" y="295188"/>
+                  </a:lnTo>
+                  <a:lnTo>
+                    <a:pt x="5979281" y="292668"/>
+                  </a:lnTo>
+                  <a:lnTo>
+                    <a:pt x="5908937" y="290079"/>
+                  </a:lnTo>
+                  <a:lnTo>
+                    <a:pt x="5838592" y="287419"/>
+                  </a:lnTo>
+                  <a:lnTo>
+                    <a:pt x="5768248" y="284686"/>
+                  </a:lnTo>
+                  <a:lnTo>
+                    <a:pt x="5697903" y="281877"/>
+                  </a:lnTo>
+                  <a:lnTo>
+                    <a:pt x="5627559" y="278992"/>
+                  </a:lnTo>
+                  <a:lnTo>
+                    <a:pt x="5557214" y="276027"/>
+                  </a:lnTo>
+                  <a:lnTo>
+                    <a:pt x="5486870" y="272980"/>
+                  </a:lnTo>
+                  <a:lnTo>
+                    <a:pt x="5416525" y="269850"/>
+                  </a:lnTo>
+                  <a:lnTo>
+                    <a:pt x="5346181" y="266634"/>
+                  </a:lnTo>
+                  <a:lnTo>
+                    <a:pt x="5275836" y="263329"/>
+                  </a:lnTo>
+                  <a:lnTo>
+                    <a:pt x="5205492" y="259933"/>
+                  </a:lnTo>
+                  <a:lnTo>
+                    <a:pt x="5135147" y="256444"/>
+                  </a:lnTo>
+                  <a:lnTo>
+                    <a:pt x="5064803" y="252859"/>
+                  </a:lnTo>
+                  <a:lnTo>
+                    <a:pt x="4994458" y="249176"/>
+                  </a:lnTo>
+                  <a:lnTo>
+                    <a:pt x="4924114" y="245391"/>
+                  </a:lnTo>
+                  <a:lnTo>
+                    <a:pt x="4853769" y="241502"/>
+                  </a:lnTo>
+                  <a:lnTo>
+                    <a:pt x="4783425" y="237506"/>
+                  </a:lnTo>
+                  <a:lnTo>
+                    <a:pt x="4713080" y="233400"/>
+                  </a:lnTo>
+                  <a:lnTo>
+                    <a:pt x="4642736" y="229182"/>
+                  </a:lnTo>
+                  <a:lnTo>
+                    <a:pt x="4572391" y="224847"/>
+                  </a:lnTo>
+                  <a:lnTo>
+                    <a:pt x="4502047" y="220393"/>
+                  </a:lnTo>
+                  <a:lnTo>
+                    <a:pt x="4431702" y="215817"/>
+                  </a:lnTo>
+                  <a:lnTo>
+                    <a:pt x="4361358" y="211115"/>
+                  </a:lnTo>
+                  <a:lnTo>
+                    <a:pt x="4291013" y="206283"/>
+                  </a:lnTo>
+                  <a:lnTo>
+                    <a:pt x="4220669" y="201319"/>
+                  </a:lnTo>
+                  <a:lnTo>
+                    <a:pt x="4150324" y="196218"/>
+                  </a:lnTo>
+                  <a:lnTo>
+                    <a:pt x="4079980" y="190977"/>
+                  </a:lnTo>
+                  <a:lnTo>
+                    <a:pt x="4009635" y="185592"/>
+                  </a:lnTo>
+                  <a:lnTo>
+                    <a:pt x="3939291" y="180058"/>
+                  </a:lnTo>
+                  <a:lnTo>
+                    <a:pt x="3868946" y="174373"/>
+                  </a:lnTo>
+                  <a:lnTo>
+                    <a:pt x="3798602" y="168531"/>
+                  </a:lnTo>
+                  <a:lnTo>
+                    <a:pt x="3728257" y="162529"/>
+                  </a:lnTo>
+                  <a:lnTo>
+                    <a:pt x="3657913" y="156361"/>
+                  </a:lnTo>
+                  <a:lnTo>
+                    <a:pt x="3587569" y="150024"/>
+                  </a:lnTo>
+                  <a:lnTo>
+                    <a:pt x="3517224" y="143513"/>
+                  </a:lnTo>
+                  <a:lnTo>
+                    <a:pt x="3446880" y="136822"/>
+                  </a:lnTo>
+                  <a:lnTo>
+                    <a:pt x="3376535" y="129948"/>
+                  </a:lnTo>
+                  <a:lnTo>
+                    <a:pt x="3306191" y="122885"/>
+                  </a:lnTo>
+                  <a:lnTo>
+                    <a:pt x="3235846" y="115627"/>
+                  </a:lnTo>
+                  <a:lnTo>
+                    <a:pt x="3165502" y="108170"/>
+                  </a:lnTo>
+                  <a:lnTo>
+                    <a:pt x="3095157" y="100508"/>
+                  </a:lnTo>
+                  <a:lnTo>
+                    <a:pt x="3024813" y="92635"/>
+                  </a:lnTo>
+                  <a:lnTo>
+                    <a:pt x="2954468" y="86829"/>
+                  </a:lnTo>
+                  <a:lnTo>
+                    <a:pt x="2884124" y="85008"/>
+                  </a:lnTo>
+                  <a:lnTo>
+                    <a:pt x="2813779" y="83176"/>
+                  </a:lnTo>
+                  <a:lnTo>
+                    <a:pt x="2743435" y="81332"/>
+                  </a:lnTo>
+                  <a:lnTo>
+                    <a:pt x="2673090" y="79478"/>
+                  </a:lnTo>
+                  <a:lnTo>
+                    <a:pt x="2602746" y="77612"/>
+                  </a:lnTo>
+                  <a:lnTo>
+                    <a:pt x="2532401" y="75735"/>
+                  </a:lnTo>
+                  <a:lnTo>
+                    <a:pt x="2462057" y="73846"/>
+                  </a:lnTo>
+                  <a:lnTo>
+                    <a:pt x="2391712" y="71946"/>
+                  </a:lnTo>
+                  <a:lnTo>
+                    <a:pt x="2321368" y="70035"/>
+                  </a:lnTo>
+                  <a:lnTo>
+                    <a:pt x="2251023" y="68111"/>
+                  </a:lnTo>
+                  <a:lnTo>
+                    <a:pt x="2180679" y="66177"/>
+                  </a:lnTo>
+                  <a:lnTo>
+                    <a:pt x="2110334" y="64230"/>
+                  </a:lnTo>
+                  <a:lnTo>
+                    <a:pt x="2039990" y="62272"/>
+                  </a:lnTo>
+                  <a:lnTo>
+                    <a:pt x="1969645" y="60301"/>
+                  </a:lnTo>
+                  <a:lnTo>
+                    <a:pt x="1899301" y="58319"/>
+                  </a:lnTo>
+                  <a:lnTo>
+                    <a:pt x="1828956" y="56325"/>
+                  </a:lnTo>
+                  <a:lnTo>
+                    <a:pt x="1758612" y="54318"/>
+                  </a:lnTo>
+                  <a:lnTo>
+                    <a:pt x="1688267" y="52300"/>
+                  </a:lnTo>
+                  <a:lnTo>
+                    <a:pt x="1617923" y="50269"/>
+                  </a:lnTo>
+                  <a:lnTo>
+                    <a:pt x="1547578" y="48225"/>
+                  </a:lnTo>
+                  <a:lnTo>
+                    <a:pt x="1477234" y="46170"/>
+                  </a:lnTo>
+                  <a:lnTo>
+                    <a:pt x="1406889" y="44102"/>
+                  </a:lnTo>
+                  <a:lnTo>
+                    <a:pt x="1336545" y="42021"/>
+                  </a:lnTo>
+                  <a:lnTo>
+                    <a:pt x="1266200" y="39928"/>
+                  </a:lnTo>
+                  <a:lnTo>
+                    <a:pt x="1195856" y="37822"/>
+                  </a:lnTo>
+                  <a:lnTo>
+                    <a:pt x="1125511" y="35703"/>
+                  </a:lnTo>
+                  <a:lnTo>
+                    <a:pt x="1055167" y="33572"/>
+                  </a:lnTo>
+                  <a:lnTo>
+                    <a:pt x="984822" y="31427"/>
+                  </a:lnTo>
+                  <a:lnTo>
+                    <a:pt x="914478" y="29269"/>
+                  </a:lnTo>
+                  <a:lnTo>
+                    <a:pt x="844133" y="27099"/>
+                  </a:lnTo>
+                  <a:lnTo>
+                    <a:pt x="773789" y="24915"/>
+                  </a:lnTo>
+                  <a:lnTo>
+                    <a:pt x="703444" y="22718"/>
+                  </a:lnTo>
+                  <a:lnTo>
+                    <a:pt x="633100" y="20507"/>
+                  </a:lnTo>
+                  <a:lnTo>
+                    <a:pt x="562755" y="18283"/>
+                  </a:lnTo>
+                  <a:lnTo>
+                    <a:pt x="492411" y="16046"/>
+                  </a:lnTo>
+                  <a:lnTo>
+                    <a:pt x="422066" y="13795"/>
+                  </a:lnTo>
+                  <a:lnTo>
+                    <a:pt x="351722" y="11531"/>
+                  </a:lnTo>
+                  <a:lnTo>
+                    <a:pt x="281377" y="9252"/>
+                  </a:lnTo>
+                  <a:lnTo>
+                    <a:pt x="211033" y="6960"/>
+                  </a:lnTo>
+                  <a:lnTo>
+                    <a:pt x="140688" y="4654"/>
+                  </a:lnTo>
+                  <a:lnTo>
+                    <a:pt x="70344" y="2334"/>
+                  </a:lnTo>
+                  <a:lnTo>
+                    <a:pt x="0" y="0"/>
+                  </a:lnTo>
+                </a:path>
+              </a:pathLst>
+            </a:custGeom>
+          </p:spPr>
+          <p:txBody>
+            <a:bodyPr/>
+            <a:lstStyle/>
+            <a:p/>
+          </p:txBody>
+        </p:sp>
+        <p:sp>
+          <p:nvSpPr>
+            <p:cNvPr id="73" name="pl73"/>
+            <p:cNvSpPr/>
+            <p:nvPr/>
+          </p:nvSpPr>
+          <p:spPr>
+            <a:xfrm>
+              <a:off x="1235312" y="4989247"/>
+              <a:ext cx="6964104" cy="487469"/>
+            </a:xfrm>
+            <a:custGeom>
+              <a:avLst/>
+              <a:pathLst>
+                <a:path w="6964104" h="487469">
+                  <a:moveTo>
+                    <a:pt x="0" y="0"/>
+                  </a:moveTo>
+                  <a:lnTo>
+                    <a:pt x="70344" y="9944"/>
+                  </a:lnTo>
+                  <a:lnTo>
+                    <a:pt x="140688" y="19725"/>
+                  </a:lnTo>
+                  <a:lnTo>
+                    <a:pt x="211033" y="29346"/>
+                  </a:lnTo>
+                  <a:lnTo>
+                    <a:pt x="281377" y="38808"/>
+                  </a:lnTo>
+                  <a:lnTo>
+                    <a:pt x="351722" y="48114"/>
+                  </a:lnTo>
+                  <a:lnTo>
+                    <a:pt x="422066" y="57267"/>
+                  </a:lnTo>
+                  <a:lnTo>
+                    <a:pt x="492411" y="66270"/>
+                  </a:lnTo>
+                  <a:lnTo>
+                    <a:pt x="562755" y="75124"/>
+                  </a:lnTo>
+                  <a:lnTo>
+                    <a:pt x="633100" y="83833"/>
+                  </a:lnTo>
+                  <a:lnTo>
+                    <a:pt x="703444" y="92398"/>
+                  </a:lnTo>
+                  <a:lnTo>
+                    <a:pt x="773789" y="100823"/>
+                  </a:lnTo>
+                  <a:lnTo>
+                    <a:pt x="844133" y="109109"/>
+                  </a:lnTo>
+                  <a:lnTo>
+                    <a:pt x="914478" y="117258"/>
+                  </a:lnTo>
+                  <a:lnTo>
+                    <a:pt x="984822" y="125274"/>
+                  </a:lnTo>
+                  <a:lnTo>
+                    <a:pt x="1055167" y="133158"/>
+                  </a:lnTo>
+                  <a:lnTo>
+                    <a:pt x="1125511" y="140912"/>
+                  </a:lnTo>
+                  <a:lnTo>
+                    <a:pt x="1195856" y="148538"/>
+                  </a:lnTo>
+                  <a:lnTo>
+                    <a:pt x="1266200" y="156039"/>
+                  </a:lnTo>
+                  <a:lnTo>
+                    <a:pt x="1336545" y="163416"/>
+                  </a:lnTo>
+                  <a:lnTo>
+                    <a:pt x="1406889" y="170672"/>
+                  </a:lnTo>
+                  <a:lnTo>
+                    <a:pt x="1477234" y="177809"/>
+                  </a:lnTo>
+                  <a:lnTo>
+                    <a:pt x="1547578" y="184828"/>
+                  </a:lnTo>
+                  <a:lnTo>
+                    <a:pt x="1617923" y="191732"/>
+                  </a:lnTo>
+                  <a:lnTo>
+                    <a:pt x="1688267" y="198523"/>
+                  </a:lnTo>
+                  <a:lnTo>
+                    <a:pt x="1758612" y="205201"/>
+                  </a:lnTo>
+                  <a:lnTo>
+                    <a:pt x="1828956" y="211770"/>
+                  </a:lnTo>
+                  <a:lnTo>
+                    <a:pt x="1899301" y="218230"/>
+                  </a:lnTo>
+                  <a:lnTo>
+                    <a:pt x="1969645" y="224584"/>
+                  </a:lnTo>
+                  <a:lnTo>
+                    <a:pt x="2039990" y="230834"/>
+                  </a:lnTo>
+                  <a:lnTo>
+                    <a:pt x="2110334" y="236981"/>
+                  </a:lnTo>
+                  <a:lnTo>
+                    <a:pt x="2180679" y="243027"/>
+                  </a:lnTo>
+                  <a:lnTo>
+                    <a:pt x="2251023" y="248973"/>
+                  </a:lnTo>
+                  <a:lnTo>
+                    <a:pt x="2321368" y="254822"/>
+                  </a:lnTo>
+                  <a:lnTo>
+                    <a:pt x="2391712" y="260574"/>
+                  </a:lnTo>
+                  <a:lnTo>
+                    <a:pt x="2462057" y="266231"/>
+                  </a:lnTo>
+                  <a:lnTo>
+                    <a:pt x="2532401" y="271796"/>
+                  </a:lnTo>
+                  <a:lnTo>
+                    <a:pt x="2602746" y="277269"/>
+                  </a:lnTo>
+                  <a:lnTo>
+                    <a:pt x="2673090" y="282652"/>
+                  </a:lnTo>
+                  <a:lnTo>
+                    <a:pt x="2743435" y="287946"/>
+                  </a:lnTo>
+                  <a:lnTo>
+                    <a:pt x="2813779" y="293153"/>
+                  </a:lnTo>
+                  <a:lnTo>
+                    <a:pt x="2884124" y="298275"/>
+                  </a:lnTo>
+                  <a:lnTo>
+                    <a:pt x="2954468" y="303312"/>
+                  </a:lnTo>
+                  <a:lnTo>
+                    <a:pt x="3024813" y="308266"/>
+                  </a:lnTo>
+                  <a:lnTo>
+                    <a:pt x="3095157" y="313139"/>
+                  </a:lnTo>
+                  <a:lnTo>
+                    <a:pt x="3165502" y="317932"/>
+                  </a:lnTo>
+                  <a:lnTo>
+                    <a:pt x="3235846" y="322646"/>
+                  </a:lnTo>
+                  <a:lnTo>
+                    <a:pt x="3306191" y="327282"/>
+                  </a:lnTo>
+                  <a:lnTo>
+                    <a:pt x="3376535" y="331842"/>
+                  </a:lnTo>
+                  <a:lnTo>
+                    <a:pt x="3446880" y="336327"/>
+                  </a:lnTo>
+                  <a:lnTo>
+                    <a:pt x="3517224" y="340739"/>
+                  </a:lnTo>
+                  <a:lnTo>
+                    <a:pt x="3587569" y="345077"/>
+                  </a:lnTo>
+                  <a:lnTo>
+                    <a:pt x="3657913" y="349344"/>
+                  </a:lnTo>
+                  <a:lnTo>
+                    <a:pt x="3728257" y="353541"/>
+                  </a:lnTo>
+                  <a:lnTo>
+                    <a:pt x="3798602" y="357669"/>
+                  </a:lnTo>
+                  <a:lnTo>
+                    <a:pt x="3868946" y="361730"/>
+                  </a:lnTo>
+                  <a:lnTo>
+                    <a:pt x="3939291" y="365723"/>
+                  </a:lnTo>
+                  <a:lnTo>
+                    <a:pt x="4009635" y="369650"/>
+                  </a:lnTo>
+                  <a:lnTo>
+                    <a:pt x="4079980" y="373513"/>
+                  </a:lnTo>
+                  <a:lnTo>
+                    <a:pt x="4150324" y="377313"/>
+                  </a:lnTo>
+                  <a:lnTo>
+                    <a:pt x="4220669" y="381050"/>
+                  </a:lnTo>
+                  <a:lnTo>
+                    <a:pt x="4291013" y="384725"/>
+                  </a:lnTo>
+                  <a:lnTo>
+                    <a:pt x="4361358" y="388340"/>
+                  </a:lnTo>
+                  <a:lnTo>
+                    <a:pt x="4431702" y="391895"/>
+                  </a:lnTo>
+                  <a:lnTo>
+                    <a:pt x="4502047" y="395392"/>
+                  </a:lnTo>
+                  <a:lnTo>
+                    <a:pt x="4572391" y="398832"/>
+                  </a:lnTo>
+                  <a:lnTo>
+                    <a:pt x="4642736" y="402215"/>
+                  </a:lnTo>
+                  <a:lnTo>
+                    <a:pt x="4713080" y="405542"/>
+                  </a:lnTo>
+                  <a:lnTo>
+                    <a:pt x="4783425" y="408814"/>
+                  </a:lnTo>
+                  <a:lnTo>
+                    <a:pt x="4853769" y="412033"/>
+                  </a:lnTo>
+                  <a:lnTo>
+                    <a:pt x="4924114" y="415198"/>
+                  </a:lnTo>
+                  <a:lnTo>
+                    <a:pt x="4994458" y="418312"/>
+                  </a:lnTo>
+                  <a:lnTo>
+                    <a:pt x="5064803" y="421374"/>
+                  </a:lnTo>
+                  <a:lnTo>
+                    <a:pt x="5135147" y="424386"/>
+                  </a:lnTo>
+                  <a:lnTo>
+                    <a:pt x="5205492" y="427349"/>
+                  </a:lnTo>
+                  <a:lnTo>
+                    <a:pt x="5275836" y="430262"/>
+                  </a:lnTo>
+                  <a:lnTo>
+                    <a:pt x="5346181" y="433128"/>
+                  </a:lnTo>
+                  <a:lnTo>
+                    <a:pt x="5416525" y="435947"/>
+                  </a:lnTo>
+                  <a:lnTo>
+                    <a:pt x="5486870" y="438719"/>
+                  </a:lnTo>
+                  <a:lnTo>
+                    <a:pt x="5557214" y="441445"/>
+                  </a:lnTo>
+                  <a:lnTo>
+                    <a:pt x="5627559" y="444127"/>
+                  </a:lnTo>
+                  <a:lnTo>
+                    <a:pt x="5697903" y="446765"/>
+                  </a:lnTo>
+                  <a:lnTo>
+                    <a:pt x="5768248" y="449359"/>
+                  </a:lnTo>
+                  <a:lnTo>
+                    <a:pt x="5838592" y="451910"/>
+                  </a:lnTo>
+                  <a:lnTo>
+                    <a:pt x="5908937" y="454420"/>
+                  </a:lnTo>
+                  <a:lnTo>
+                    <a:pt x="5979281" y="456888"/>
+                  </a:lnTo>
+                  <a:lnTo>
+                    <a:pt x="6049626" y="459316"/>
+                  </a:lnTo>
+                  <a:lnTo>
+                    <a:pt x="6119970" y="461703"/>
+                  </a:lnTo>
+                  <a:lnTo>
+                    <a:pt x="6190315" y="464052"/>
+                  </a:lnTo>
+                  <a:lnTo>
+                    <a:pt x="6260659" y="466362"/>
+                  </a:lnTo>
+                  <a:lnTo>
+                    <a:pt x="6331004" y="468633"/>
+                  </a:lnTo>
+                  <a:lnTo>
+                    <a:pt x="6401348" y="470868"/>
+                  </a:lnTo>
+                  <a:lnTo>
+                    <a:pt x="6471693" y="473065"/>
+                  </a:lnTo>
+                  <a:lnTo>
+                    <a:pt x="6542037" y="475227"/>
+                  </a:lnTo>
+                  <a:lnTo>
+                    <a:pt x="6612382" y="477353"/>
+                  </a:lnTo>
+                  <a:lnTo>
+                    <a:pt x="6682726" y="479444"/>
+                  </a:lnTo>
+                  <a:lnTo>
+                    <a:pt x="6753071" y="481500"/>
+                  </a:lnTo>
+                  <a:lnTo>
+                    <a:pt x="6823415" y="483523"/>
+                  </a:lnTo>
+                  <a:lnTo>
+                    <a:pt x="6893760" y="485512"/>
+                  </a:lnTo>
+                  <a:lnTo>
+                    <a:pt x="6964104" y="487469"/>
+                  </a:lnTo>
+                </a:path>
+              </a:pathLst>
+            </a:custGeom>
+            <a:ln w="27101" cap="flat">
+              <a:solidFill>
+                <a:srgbClr val="FF8C00">
+                  <a:alpha val="100000"/>
+                </a:srgbClr>
+              </a:solidFill>
+              <a:prstDash val="solid"/>
+              <a:round/>
+            </a:ln>
+          </p:spPr>
+          <p:txBody>
+            <a:bodyPr/>
+            <a:lstStyle/>
+            <a:p/>
+          </p:txBody>
+        </p:sp>
+        <p:sp>
+          <p:nvSpPr>
+            <p:cNvPr id="74" name="pl74"/>
+            <p:cNvSpPr/>
+            <p:nvPr/>
+          </p:nvSpPr>
+          <p:spPr>
+            <a:xfrm>
+              <a:off x="887106" y="5294352"/>
+              <a:ext cx="7660515" cy="0"/>
+            </a:xfrm>
+            <a:custGeom>
+              <a:avLst/>
+              <a:pathLst>
+                <a:path w="7660515" h="0">
+                  <a:moveTo>
+                    <a:pt x="0" y="0"/>
+                  </a:moveTo>
+                  <a:lnTo>
+                    <a:pt x="7660515" y="0"/>
+                  </a:lnTo>
+                  <a:lnTo>
+                    <a:pt x="7660515" y="0"/>
+                  </a:lnTo>
+                </a:path>
+              </a:pathLst>
+            </a:custGeom>
+            <a:ln w="13550" cap="flat">
+              <a:solidFill>
+                <a:srgbClr val="7F7F7F">
+                  <a:alpha val="100000"/>
+                </a:srgbClr>
+              </a:solidFill>
+              <a:prstDash val="dash"/>
+              <a:round/>
+            </a:ln>
+          </p:spPr>
+          <p:txBody>
+            <a:bodyPr/>
+            <a:lstStyle/>
+            <a:p/>
+          </p:txBody>
+        </p:sp>
+        <p:sp>
+          <p:nvSpPr>
+            <p:cNvPr id="75" name="pl75"/>
+            <p:cNvSpPr/>
+            <p:nvPr/>
+          </p:nvSpPr>
+          <p:spPr>
+            <a:xfrm>
+              <a:off x="4215100" y="4336484"/>
+              <a:ext cx="0" cy="1317069"/>
+            </a:xfrm>
+            <a:custGeom>
+              <a:avLst/>
+              <a:pathLst>
+                <a:path w="0" h="1317069">
+                  <a:moveTo>
+                    <a:pt x="0" y="1317069"/>
+                  </a:moveTo>
+                  <a:lnTo>
+                    <a:pt x="0" y="0"/>
+                  </a:lnTo>
+                  <a:lnTo>
+                    <a:pt x="0" y="0"/>
+                  </a:lnTo>
+                </a:path>
+              </a:pathLst>
+            </a:custGeom>
+            <a:ln w="13550" cap="flat">
+              <a:solidFill>
+                <a:srgbClr val="666666">
+                  <a:alpha val="100000"/>
+                </a:srgbClr>
+              </a:solidFill>
+              <a:prstDash val="dot"/>
+              <a:round/>
+            </a:ln>
+          </p:spPr>
+          <p:txBody>
+            <a:bodyPr/>
+            <a:lstStyle/>
+            <a:p/>
+          </p:txBody>
+        </p:sp>
+        <p:sp>
+          <p:nvSpPr>
+            <p:cNvPr id="76" name="pl76"/>
+            <p:cNvSpPr/>
+            <p:nvPr/>
+          </p:nvSpPr>
+          <p:spPr>
+            <a:xfrm>
+              <a:off x="3046793" y="4336484"/>
+              <a:ext cx="0" cy="1317069"/>
+            </a:xfrm>
+            <a:custGeom>
+              <a:avLst/>
+              <a:pathLst>
+                <a:path w="0" h="1317069">
+                  <a:moveTo>
+                    <a:pt x="0" y="1317069"/>
+                  </a:moveTo>
+                  <a:lnTo>
+                    <a:pt x="0" y="0"/>
+                  </a:lnTo>
+                  <a:lnTo>
+                    <a:pt x="0" y="0"/>
+                  </a:lnTo>
+                </a:path>
+              </a:pathLst>
+            </a:custGeom>
+            <a:ln w="13550" cap="flat">
+              <a:solidFill>
+                <a:srgbClr val="4682B4">
+                  <a:alpha val="69803"/>
+                </a:srgbClr>
+              </a:solidFill>
+              <a:prstDash val="dash"/>
+              <a:round/>
+            </a:ln>
+          </p:spPr>
+          <p:txBody>
+            <a:bodyPr/>
+            <a:lstStyle/>
+            <a:p/>
+          </p:txBody>
+        </p:sp>
+        <p:sp>
+          <p:nvSpPr>
+            <p:cNvPr id="77" name="pl77"/>
+            <p:cNvSpPr/>
+            <p:nvPr/>
+          </p:nvSpPr>
+          <p:spPr>
+            <a:xfrm>
+              <a:off x="5409191" y="4336484"/>
+              <a:ext cx="0" cy="1317069"/>
+            </a:xfrm>
+            <a:custGeom>
+              <a:avLst/>
+              <a:pathLst>
+                <a:path w="0" h="1317069">
+                  <a:moveTo>
+                    <a:pt x="0" y="1317069"/>
+                  </a:moveTo>
+                  <a:lnTo>
+                    <a:pt x="0" y="0"/>
+                  </a:lnTo>
+                  <a:lnTo>
+                    <a:pt x="0" y="0"/>
+                  </a:lnTo>
+                </a:path>
+              </a:pathLst>
+            </a:custGeom>
+            <a:ln w="13550" cap="flat">
+              <a:solidFill>
+                <a:srgbClr val="4682B4">
+                  <a:alpha val="69803"/>
+                </a:srgbClr>
+              </a:solidFill>
+              <a:prstDash val="dash"/>
+              <a:round/>
+            </a:ln>
+          </p:spPr>
+          <p:txBody>
+            <a:bodyPr/>
+            <a:lstStyle/>
+            <a:p/>
+          </p:txBody>
+        </p:sp>
+        <p:sp>
+          <p:nvSpPr>
+            <p:cNvPr id="78" name="tx78"/>
+            <p:cNvSpPr/>
+            <p:nvPr/>
+          </p:nvSpPr>
+          <p:spPr>
+            <a:xfrm>
+              <a:off x="762297" y="5553636"/>
+              <a:ext cx="62179" cy="80101"/>
+            </a:xfrm>
+            <a:prstGeom prst="rect">
+              <a:avLst/>
+            </a:prstGeom>
+            <a:noFill/>
+          </p:spPr>
+          <p:txBody>
+            <a:bodyPr lIns="0" rIns="0" tIns="0" bIns="0" anchorCtr="1" anchor="ctr" wrap="none"/>
+            <a:lstStyle/>
+            <a:p>
+              <a:pPr algn="l" marL="0" marR="0" indent="0">
+                <a:lnSpc>
+                  <a:spcPts val="880"/>
+                </a:lnSpc>
+                <a:spcBef>
+                  <a:spcPts val="0"/>
+                </a:spcBef>
+                <a:spcAft>
+                  <a:spcPts val="0"/>
+                </a:spcAft>
+              </a:pPr>
+              <a:r>
+                <a:rPr sz="880">
+                  <a:solidFill>
+                    <a:srgbClr val="4D4D4D">
+                      <a:alpha val="100000"/>
+                    </a:srgbClr>
+                  </a:solidFill>
+                  <a:latin typeface="Helvetica"/>
+                  <a:cs typeface="Helvetica"/>
+                </a:rPr>
+                <a:t>0</a:t>
+              </a:r>
+            </a:p>
+          </p:txBody>
+        </p:sp>
+        <p:sp>
+          <p:nvSpPr>
+            <p:cNvPr id="79" name="tx79"/>
+            <p:cNvSpPr/>
+            <p:nvPr/>
+          </p:nvSpPr>
+          <p:spPr>
+            <a:xfrm>
+              <a:off x="762297" y="5254302"/>
+              <a:ext cx="62179" cy="80101"/>
+            </a:xfrm>
+            <a:prstGeom prst="rect">
+              <a:avLst/>
+            </a:prstGeom>
+            <a:noFill/>
+          </p:spPr>
+          <p:txBody>
+            <a:bodyPr lIns="0" rIns="0" tIns="0" bIns="0" anchorCtr="1" anchor="ctr" wrap="none"/>
+            <a:lstStyle/>
+            <a:p>
+              <a:pPr algn="l" marL="0" marR="0" indent="0">
+                <a:lnSpc>
+                  <a:spcPts val="880"/>
+                </a:lnSpc>
+                <a:spcBef>
+                  <a:spcPts val="0"/>
+                </a:spcBef>
+                <a:spcAft>
+                  <a:spcPts val="0"/>
+                </a:spcAft>
+              </a:pPr>
+              <a:r>
+                <a:rPr sz="880">
+                  <a:solidFill>
+                    <a:srgbClr val="4D4D4D">
+                      <a:alpha val="100000"/>
+                    </a:srgbClr>
+                  </a:solidFill>
+                  <a:latin typeface="Helvetica"/>
+                  <a:cs typeface="Helvetica"/>
+                </a:rPr>
+                <a:t>1</a:t>
+              </a:r>
+            </a:p>
+          </p:txBody>
+        </p:sp>
+        <p:sp>
+          <p:nvSpPr>
+            <p:cNvPr id="80" name="tx80"/>
+            <p:cNvSpPr/>
+            <p:nvPr/>
+          </p:nvSpPr>
+          <p:spPr>
+            <a:xfrm>
+              <a:off x="762297" y="4954968"/>
+              <a:ext cx="62179" cy="80101"/>
+            </a:xfrm>
+            <a:prstGeom prst="rect">
+              <a:avLst/>
+            </a:prstGeom>
+            <a:noFill/>
+          </p:spPr>
+          <p:txBody>
+            <a:bodyPr lIns="0" rIns="0" tIns="0" bIns="0" anchorCtr="1" anchor="ctr" wrap="none"/>
+            <a:lstStyle/>
+            <a:p>
+              <a:pPr algn="l" marL="0" marR="0" indent="0">
+                <a:lnSpc>
+                  <a:spcPts val="880"/>
+                </a:lnSpc>
+                <a:spcBef>
+                  <a:spcPts val="0"/>
+                </a:spcBef>
+                <a:spcAft>
+                  <a:spcPts val="0"/>
+                </a:spcAft>
+              </a:pPr>
+              <a:r>
+                <a:rPr sz="880">
+                  <a:solidFill>
+                    <a:srgbClr val="4D4D4D">
+                      <a:alpha val="100000"/>
+                    </a:srgbClr>
+                  </a:solidFill>
+                  <a:latin typeface="Helvetica"/>
+                  <a:cs typeface="Helvetica"/>
+                </a:rPr>
+                <a:t>2</a:t>
+              </a:r>
+            </a:p>
+          </p:txBody>
+        </p:sp>
+        <p:sp>
+          <p:nvSpPr>
+            <p:cNvPr id="81" name="tx81"/>
+            <p:cNvSpPr/>
+            <p:nvPr/>
+          </p:nvSpPr>
+          <p:spPr>
+            <a:xfrm>
+              <a:off x="762297" y="4655634"/>
+              <a:ext cx="62179" cy="80101"/>
+            </a:xfrm>
+            <a:prstGeom prst="rect">
+              <a:avLst/>
+            </a:prstGeom>
+            <a:noFill/>
+          </p:spPr>
+          <p:txBody>
+            <a:bodyPr lIns="0" rIns="0" tIns="0" bIns="0" anchorCtr="1" anchor="ctr" wrap="none"/>
+            <a:lstStyle/>
+            <a:p>
+              <a:pPr algn="l" marL="0" marR="0" indent="0">
+                <a:lnSpc>
+                  <a:spcPts val="880"/>
+                </a:lnSpc>
+                <a:spcBef>
+                  <a:spcPts val="0"/>
+                </a:spcBef>
+                <a:spcAft>
+                  <a:spcPts val="0"/>
+                </a:spcAft>
+              </a:pPr>
+              <a:r>
+                <a:rPr sz="880">
+                  <a:solidFill>
+                    <a:srgbClr val="4D4D4D">
+                      <a:alpha val="100000"/>
+                    </a:srgbClr>
+                  </a:solidFill>
+                  <a:latin typeface="Helvetica"/>
+                  <a:cs typeface="Helvetica"/>
+                </a:rPr>
+                <a:t>3</a:t>
+              </a:r>
+            </a:p>
+          </p:txBody>
+        </p:sp>
+        <p:sp>
+          <p:nvSpPr>
+            <p:cNvPr id="82" name="tx82"/>
+            <p:cNvSpPr/>
+            <p:nvPr/>
+          </p:nvSpPr>
+          <p:spPr>
+            <a:xfrm>
+              <a:off x="762297" y="4356300"/>
+              <a:ext cx="62179" cy="80101"/>
+            </a:xfrm>
+            <a:prstGeom prst="rect">
+              <a:avLst/>
+            </a:prstGeom>
+            <a:noFill/>
+          </p:spPr>
+          <p:txBody>
+            <a:bodyPr lIns="0" rIns="0" tIns="0" bIns="0" anchorCtr="1" anchor="ctr" wrap="none"/>
+            <a:lstStyle/>
+            <a:p>
+              <a:pPr algn="l" marL="0" marR="0" indent="0">
+                <a:lnSpc>
+                  <a:spcPts val="880"/>
+                </a:lnSpc>
+                <a:spcBef>
+                  <a:spcPts val="0"/>
+                </a:spcBef>
+                <a:spcAft>
+                  <a:spcPts val="0"/>
+                </a:spcAft>
+              </a:pPr>
+              <a:r>
+                <a:rPr sz="880">
+                  <a:solidFill>
+                    <a:srgbClr val="4D4D4D">
+                      <a:alpha val="100000"/>
+                    </a:srgbClr>
+                  </a:solidFill>
+                  <a:latin typeface="Helvetica"/>
+                  <a:cs typeface="Helvetica"/>
+                </a:rPr>
+                <a:t>4</a:t>
+              </a:r>
+            </a:p>
+          </p:txBody>
+        </p:sp>
+        <p:sp>
+          <p:nvSpPr>
+            <p:cNvPr id="83" name="tx83"/>
+            <p:cNvSpPr/>
+            <p:nvPr/>
+          </p:nvSpPr>
+          <p:spPr>
+            <a:xfrm>
+              <a:off x="1164222" y="5716183"/>
+              <a:ext cx="161574" cy="80101"/>
+            </a:xfrm>
+            <a:prstGeom prst="rect">
+              <a:avLst/>
+            </a:prstGeom>
+            <a:noFill/>
+          </p:spPr>
+          <p:txBody>
+            <a:bodyPr lIns="0" rIns="0" tIns="0" bIns="0" anchorCtr="1" anchor="ctr" wrap="none"/>
+            <a:lstStyle/>
+            <a:p>
+              <a:pPr algn="l" marL="0" marR="0" indent="0">
+                <a:lnSpc>
+                  <a:spcPts val="880"/>
+                </a:lnSpc>
+                <a:spcBef>
+                  <a:spcPts val="0"/>
+                </a:spcBef>
+                <a:spcAft>
+                  <a:spcPts val="0"/>
+                </a:spcAft>
+              </a:pPr>
+              <a:r>
+                <a:rPr sz="880">
+                  <a:solidFill>
+                    <a:srgbClr val="4D4D4D">
+                      <a:alpha val="100000"/>
+                    </a:srgbClr>
+                  </a:solidFill>
+                  <a:latin typeface="Helvetica"/>
+                  <a:cs typeface="Helvetica"/>
+                </a:rPr>
+                <a:t>-50</a:t>
+              </a:r>
+            </a:p>
+          </p:txBody>
+        </p:sp>
+        <p:sp>
+          <p:nvSpPr>
+            <p:cNvPr id="84" name="tx84"/>
+            <p:cNvSpPr/>
+            <p:nvPr/>
+          </p:nvSpPr>
+          <p:spPr>
+            <a:xfrm>
+              <a:off x="2024485" y="5716183"/>
+              <a:ext cx="161574" cy="80101"/>
+            </a:xfrm>
+            <a:prstGeom prst="rect">
+              <a:avLst/>
+            </a:prstGeom>
+            <a:noFill/>
+          </p:spPr>
+          <p:txBody>
+            <a:bodyPr lIns="0" rIns="0" tIns="0" bIns="0" anchorCtr="1" anchor="ctr" wrap="none"/>
+            <a:lstStyle/>
+            <a:p>
+              <a:pPr algn="l" marL="0" marR="0" indent="0">
+                <a:lnSpc>
+                  <a:spcPts val="880"/>
+                </a:lnSpc>
+                <a:spcBef>
+                  <a:spcPts val="0"/>
+                </a:spcBef>
+                <a:spcAft>
+                  <a:spcPts val="0"/>
+                </a:spcAft>
+              </a:pPr>
+              <a:r>
+                <a:rPr sz="880">
+                  <a:solidFill>
+                    <a:srgbClr val="4D4D4D">
+                      <a:alpha val="100000"/>
+                    </a:srgbClr>
+                  </a:solidFill>
+                  <a:latin typeface="Helvetica"/>
+                  <a:cs typeface="Helvetica"/>
+                </a:rPr>
+                <a:t>-40</a:t>
+              </a:r>
+            </a:p>
+          </p:txBody>
+        </p:sp>
+        <p:sp>
+          <p:nvSpPr>
+            <p:cNvPr id="85" name="tx85"/>
+            <p:cNvSpPr/>
+            <p:nvPr/>
+          </p:nvSpPr>
+          <p:spPr>
+            <a:xfrm>
+              <a:off x="2884749" y="5716183"/>
+              <a:ext cx="161574" cy="80101"/>
+            </a:xfrm>
+            <a:prstGeom prst="rect">
+              <a:avLst/>
+            </a:prstGeom>
+            <a:noFill/>
+          </p:spPr>
+          <p:txBody>
+            <a:bodyPr lIns="0" rIns="0" tIns="0" bIns="0" anchorCtr="1" anchor="ctr" wrap="none"/>
+            <a:lstStyle/>
+            <a:p>
+              <a:pPr algn="l" marL="0" marR="0" indent="0">
+                <a:lnSpc>
+                  <a:spcPts val="880"/>
+                </a:lnSpc>
+                <a:spcBef>
+                  <a:spcPts val="0"/>
+                </a:spcBef>
+                <a:spcAft>
+                  <a:spcPts val="0"/>
+                </a:spcAft>
+              </a:pPr>
+              <a:r>
+                <a:rPr sz="880">
+                  <a:solidFill>
+                    <a:srgbClr val="4D4D4D">
+                      <a:alpha val="100000"/>
+                    </a:srgbClr>
+                  </a:solidFill>
+                  <a:latin typeface="Helvetica"/>
+                  <a:cs typeface="Helvetica"/>
+                </a:rPr>
+                <a:t>-30</a:t>
+              </a:r>
+            </a:p>
+          </p:txBody>
+        </p:sp>
+        <p:sp>
+          <p:nvSpPr>
+            <p:cNvPr id="86" name="tx86"/>
+            <p:cNvSpPr/>
+            <p:nvPr/>
+          </p:nvSpPr>
+          <p:spPr>
+            <a:xfrm>
+              <a:off x="3745012" y="5716183"/>
+              <a:ext cx="161574" cy="80101"/>
+            </a:xfrm>
+            <a:prstGeom prst="rect">
+              <a:avLst/>
+            </a:prstGeom>
+            <a:noFill/>
+          </p:spPr>
+          <p:txBody>
+            <a:bodyPr lIns="0" rIns="0" tIns="0" bIns="0" anchorCtr="1" anchor="ctr" wrap="none"/>
+            <a:lstStyle/>
+            <a:p>
+              <a:pPr algn="l" marL="0" marR="0" indent="0">
+                <a:lnSpc>
+                  <a:spcPts val="880"/>
+                </a:lnSpc>
+                <a:spcBef>
+                  <a:spcPts val="0"/>
+                </a:spcBef>
+                <a:spcAft>
+                  <a:spcPts val="0"/>
+                </a:spcAft>
+              </a:pPr>
+              <a:r>
+                <a:rPr sz="880">
+                  <a:solidFill>
+                    <a:srgbClr val="4D4D4D">
+                      <a:alpha val="100000"/>
+                    </a:srgbClr>
+                  </a:solidFill>
+                  <a:latin typeface="Helvetica"/>
+                  <a:cs typeface="Helvetica"/>
+                </a:rPr>
+                <a:t>-20</a:t>
+              </a:r>
+            </a:p>
+          </p:txBody>
+        </p:sp>
+        <p:sp>
+          <p:nvSpPr>
+            <p:cNvPr id="87" name="tx87"/>
+            <p:cNvSpPr/>
+            <p:nvPr/>
+          </p:nvSpPr>
+          <p:spPr>
+            <a:xfrm>
+              <a:off x="4605275" y="5716183"/>
+              <a:ext cx="161574" cy="80101"/>
+            </a:xfrm>
+            <a:prstGeom prst="rect">
+              <a:avLst/>
+            </a:prstGeom>
+            <a:noFill/>
+          </p:spPr>
+          <p:txBody>
+            <a:bodyPr lIns="0" rIns="0" tIns="0" bIns="0" anchorCtr="1" anchor="ctr" wrap="none"/>
+            <a:lstStyle/>
+            <a:p>
+              <a:pPr algn="l" marL="0" marR="0" indent="0">
+                <a:lnSpc>
+                  <a:spcPts val="880"/>
+                </a:lnSpc>
+                <a:spcBef>
+                  <a:spcPts val="0"/>
+                </a:spcBef>
+                <a:spcAft>
+                  <a:spcPts val="0"/>
+                </a:spcAft>
+              </a:pPr>
+              <a:r>
+                <a:rPr sz="880">
+                  <a:solidFill>
+                    <a:srgbClr val="4D4D4D">
+                      <a:alpha val="100000"/>
+                    </a:srgbClr>
+                  </a:solidFill>
+                  <a:latin typeface="Helvetica"/>
+                  <a:cs typeface="Helvetica"/>
+                </a:rPr>
+                <a:t>-10</a:t>
+              </a:r>
+            </a:p>
+          </p:txBody>
+        </p:sp>
+        <p:sp>
+          <p:nvSpPr>
+            <p:cNvPr id="88" name="tx88"/>
+            <p:cNvSpPr/>
+            <p:nvPr/>
+          </p:nvSpPr>
+          <p:spPr>
+            <a:xfrm>
+              <a:off x="5515235" y="5716183"/>
+              <a:ext cx="62179" cy="80101"/>
+            </a:xfrm>
+            <a:prstGeom prst="rect">
+              <a:avLst/>
+            </a:prstGeom>
+            <a:noFill/>
+          </p:spPr>
+          <p:txBody>
+            <a:bodyPr lIns="0" rIns="0" tIns="0" bIns="0" anchorCtr="1" anchor="ctr" wrap="none"/>
+            <a:lstStyle/>
+            <a:p>
+              <a:pPr algn="l" marL="0" marR="0" indent="0">
+                <a:lnSpc>
+                  <a:spcPts val="880"/>
+                </a:lnSpc>
+                <a:spcBef>
+                  <a:spcPts val="0"/>
+                </a:spcBef>
+                <a:spcAft>
+                  <a:spcPts val="0"/>
+                </a:spcAft>
+              </a:pPr>
+              <a:r>
+                <a:rPr sz="880">
+                  <a:solidFill>
+                    <a:srgbClr val="4D4D4D">
+                      <a:alpha val="100000"/>
+                    </a:srgbClr>
+                  </a:solidFill>
+                  <a:latin typeface="Helvetica"/>
+                  <a:cs typeface="Helvetica"/>
+                </a:rPr>
+                <a:t>0</a:t>
+              </a:r>
+            </a:p>
+          </p:txBody>
+        </p:sp>
+        <p:sp>
+          <p:nvSpPr>
+            <p:cNvPr id="89" name="tx89"/>
+            <p:cNvSpPr/>
+            <p:nvPr/>
+          </p:nvSpPr>
+          <p:spPr>
+            <a:xfrm>
+              <a:off x="6344409" y="5716183"/>
+              <a:ext cx="124358" cy="80101"/>
+            </a:xfrm>
+            <a:prstGeom prst="rect">
+              <a:avLst/>
+            </a:prstGeom>
+            <a:noFill/>
+          </p:spPr>
+          <p:txBody>
+            <a:bodyPr lIns="0" rIns="0" tIns="0" bIns="0" anchorCtr="1" anchor="ctr" wrap="none"/>
+            <a:lstStyle/>
+            <a:p>
+              <a:pPr algn="l" marL="0" marR="0" indent="0">
+                <a:lnSpc>
+                  <a:spcPts val="880"/>
+                </a:lnSpc>
+                <a:spcBef>
+                  <a:spcPts val="0"/>
+                </a:spcBef>
+                <a:spcAft>
+                  <a:spcPts val="0"/>
+                </a:spcAft>
+              </a:pPr>
+              <a:r>
+                <a:rPr sz="880">
+                  <a:solidFill>
+                    <a:srgbClr val="4D4D4D">
+                      <a:alpha val="100000"/>
+                    </a:srgbClr>
+                  </a:solidFill>
+                  <a:latin typeface="Helvetica"/>
+                  <a:cs typeface="Helvetica"/>
+                </a:rPr>
+                <a:t>10</a:t>
+              </a:r>
+            </a:p>
+          </p:txBody>
+        </p:sp>
+        <p:sp>
+          <p:nvSpPr>
+            <p:cNvPr id="90" name="tx90"/>
+            <p:cNvSpPr/>
+            <p:nvPr/>
+          </p:nvSpPr>
+          <p:spPr>
+            <a:xfrm>
+              <a:off x="7204672" y="5716183"/>
+              <a:ext cx="124358" cy="80101"/>
+            </a:xfrm>
+            <a:prstGeom prst="rect">
+              <a:avLst/>
+            </a:prstGeom>
+            <a:noFill/>
+          </p:spPr>
+          <p:txBody>
+            <a:bodyPr lIns="0" rIns="0" tIns="0" bIns="0" anchorCtr="1" anchor="ctr" wrap="none"/>
+            <a:lstStyle/>
+            <a:p>
+              <a:pPr algn="l" marL="0" marR="0" indent="0">
+                <a:lnSpc>
+                  <a:spcPts val="880"/>
+                </a:lnSpc>
+                <a:spcBef>
+                  <a:spcPts val="0"/>
+                </a:spcBef>
+                <a:spcAft>
+                  <a:spcPts val="0"/>
+                </a:spcAft>
+              </a:pPr>
+              <a:r>
+                <a:rPr sz="880">
+                  <a:solidFill>
+                    <a:srgbClr val="4D4D4D">
+                      <a:alpha val="100000"/>
+                    </a:srgbClr>
+                  </a:solidFill>
+                  <a:latin typeface="Helvetica"/>
+                  <a:cs typeface="Helvetica"/>
+                </a:rPr>
+                <a:t>20</a:t>
+              </a:r>
+            </a:p>
+          </p:txBody>
+        </p:sp>
+        <p:sp>
+          <p:nvSpPr>
+            <p:cNvPr id="91" name="tx91"/>
+            <p:cNvSpPr/>
+            <p:nvPr/>
+          </p:nvSpPr>
+          <p:spPr>
+            <a:xfrm>
+              <a:off x="8064935" y="5716183"/>
+              <a:ext cx="124358" cy="80101"/>
+            </a:xfrm>
+            <a:prstGeom prst="rect">
+              <a:avLst/>
+            </a:prstGeom>
+            <a:noFill/>
+          </p:spPr>
+          <p:txBody>
+            <a:bodyPr lIns="0" rIns="0" tIns="0" bIns="0" anchorCtr="1" anchor="ctr" wrap="none"/>
+            <a:lstStyle/>
+            <a:p>
+              <a:pPr algn="l" marL="0" marR="0" indent="0">
+                <a:lnSpc>
+                  <a:spcPts val="880"/>
+                </a:lnSpc>
+                <a:spcBef>
+                  <a:spcPts val="0"/>
+                </a:spcBef>
+                <a:spcAft>
+                  <a:spcPts val="0"/>
+                </a:spcAft>
+              </a:pPr>
+              <a:r>
+                <a:rPr sz="880">
+                  <a:solidFill>
+                    <a:srgbClr val="4D4D4D">
+                      <a:alpha val="100000"/>
+                    </a:srgbClr>
+                  </a:solidFill>
+                  <a:latin typeface="Helvetica"/>
+                  <a:cs typeface="Helvetica"/>
+                </a:rPr>
+                <a:t>30</a:t>
+              </a:r>
+            </a:p>
+          </p:txBody>
+        </p:sp>
+        <p:sp>
+          <p:nvSpPr>
+            <p:cNvPr id="92" name="tx92"/>
+            <p:cNvSpPr/>
+            <p:nvPr/>
+          </p:nvSpPr>
+          <p:spPr>
+            <a:xfrm>
+              <a:off x="1561815" y="5855859"/>
+              <a:ext cx="6311097" cy="100218"/>
+            </a:xfrm>
+            <a:prstGeom prst="rect">
+              <a:avLst/>
+            </a:prstGeom>
+            <a:noFill/>
+          </p:spPr>
+          <p:txBody>
+            <a:bodyPr lIns="0" rIns="0" tIns="0" bIns="0" anchorCtr="1" anchor="ctr" wrap="none"/>
+            <a:lstStyle/>
+            <a:p>
+              <a:pPr algn="l" marL="0" marR="0" indent="0">
+                <a:lnSpc>
+                  <a:spcPts val="1100"/>
+                </a:lnSpc>
+                <a:spcBef>
+                  <a:spcPts val="0"/>
+                </a:spcBef>
+                <a:spcAft>
+                  <a:spcPts val="0"/>
+                </a:spcAft>
+              </a:pPr>
+              <a:r>
+                <a:rPr sz="1100">
+                  <a:solidFill>
+                    <a:srgbClr val="000000">
+                      <a:alpha val="100000"/>
+                    </a:srgbClr>
+                  </a:solidFill>
+                  <a:latin typeface="Helvetica"/>
+                  <a:cs typeface="Helvetica"/>
+                </a:rPr>
+                <a:t>Sensitivity eGFR Difference (%): 100 × (CKD-EPI 2012 CysC − CKD-EPI 2021 Cr) / CKD-EPI 2021 Cr</a:t>
+              </a:r>
+            </a:p>
+          </p:txBody>
+        </p:sp>
+        <p:sp>
+          <p:nvSpPr>
+            <p:cNvPr id="93" name="tx93"/>
+            <p:cNvSpPr/>
+            <p:nvPr/>
+          </p:nvSpPr>
+          <p:spPr>
+            <a:xfrm rot="-5400000">
+              <a:off x="138035" y="4944909"/>
+              <a:ext cx="1016904" cy="100218"/>
+            </a:xfrm>
+            <a:prstGeom prst="rect">
+              <a:avLst/>
+            </a:prstGeom>
+            <a:noFill/>
+          </p:spPr>
+          <p:txBody>
+            <a:bodyPr lIns="0" rIns="0" tIns="0" bIns="0" anchorCtr="1" anchor="ctr" wrap="none"/>
+            <a:lstStyle/>
+            <a:p>
+              <a:pPr algn="l" marL="0" marR="0" indent="0">
+                <a:lnSpc>
+                  <a:spcPts val="1100"/>
+                </a:lnSpc>
+                <a:spcBef>
+                  <a:spcPts val="0"/>
+                </a:spcBef>
+                <a:spcAft>
+                  <a:spcPts val="0"/>
+                </a:spcAft>
+              </a:pPr>
+              <a:r>
+                <a:rPr sz="1100">
+                  <a:solidFill>
+                    <a:srgbClr val="000000">
+                      <a:alpha val="100000"/>
+                    </a:srgbClr>
+                  </a:solidFill>
+                  <a:latin typeface="Helvetica"/>
+                  <a:cs typeface="Helvetica"/>
+                </a:rPr>
+                <a:t>subHR (95% CI)</a:t>
+              </a:r>
+            </a:p>
+          </p:txBody>
+        </p:sp>
+        <p:sp>
+          <p:nvSpPr>
+            <p:cNvPr id="94" name="tx94"/>
+            <p:cNvSpPr/>
+            <p:nvPr/>
+          </p:nvSpPr>
+          <p:spPr>
+            <a:xfrm>
+              <a:off x="887106" y="4159544"/>
+              <a:ext cx="6959864" cy="82021"/>
+            </a:xfrm>
+            <a:prstGeom prst="rect">
+              <a:avLst/>
+            </a:prstGeom>
+            <a:noFill/>
+          </p:spPr>
+          <p:txBody>
+            <a:bodyPr lIns="0" rIns="0" tIns="0" bIns="0" anchorCtr="1" anchor="ctr" wrap="none"/>
+            <a:lstStyle/>
+            <a:p>
+              <a:pPr algn="l" marL="0" marR="0" indent="0">
+                <a:lnSpc>
+                  <a:spcPts val="900"/>
+                </a:lnSpc>
+                <a:spcBef>
+                  <a:spcPts val="0"/>
+                </a:spcBef>
+                <a:spcAft>
+                  <a:spcPts val="0"/>
+                </a:spcAft>
+              </a:pPr>
+              <a:r>
+                <a:rPr sz="900">
+                  <a:solidFill>
+                    <a:srgbClr val="404040">
+                      <a:alpha val="100000"/>
+                    </a:srgbClr>
+                  </a:solidFill>
+                  <a:latin typeface="Helvetica"/>
+                  <a:cs typeface="Helvetica"/>
+                </a:rPr>
+                <a:t>subHR per 10 % decline: 1.22 (1.08-1.39), p_Bonf = 0.012 (n = 6)  |  per IQR decline (Δ = 27.5 %): 1.75 (1.23-2.49)  |  IQR: [-29.1, -1.6] %</a:t>
+              </a:r>
+            </a:p>
+          </p:txBody>
+        </p:sp>
+        <p:sp>
+          <p:nvSpPr>
+            <p:cNvPr id="95" name="tx95"/>
+            <p:cNvSpPr/>
+            <p:nvPr/>
+          </p:nvSpPr>
+          <p:spPr>
+            <a:xfrm>
+              <a:off x="887106" y="3932770"/>
               <a:ext cx="1880189" cy="120152"/>
             </a:xfrm>
             <a:prstGeom prst="rect">
